--- a/powerpoints/posit-team.pptx
+++ b/powerpoints/posit-team.pptx
@@ -3083,6 +3083,42 @@
           <a:chExt cx="0" cy="0"/>
         </a:xfrm>
       </p:grpSpPr>
+      <p:pic>
+        <p:nvPicPr>
+          <p:cNvPr id="13" name="Picture 12">
+            <a:extLst>
+              <a:ext uri="{FF2B5EF4-FFF2-40B4-BE49-F238E27FC236}">
+                <a16:creationId xmlns:a16="http://schemas.microsoft.com/office/drawing/2014/main" id="{B8A9E775-E34B-9B8B-6072-B57BF8A7EA18}"/>
+              </a:ext>
+            </a:extLst>
+          </p:cNvPr>
+          <p:cNvPicPr>
+            <a:picLocks noChangeAspect="1"/>
+          </p:cNvPicPr>
+          <p:nvPr/>
+        </p:nvPicPr>
+        <p:blipFill>
+          <a:blip r:embed="rId2">
+            <a:extLst>
+              <a:ext uri="{28A0092B-C50C-407E-A947-70E740481C1C}">
+                <a14:useLocalDpi xmlns:a14="http://schemas.microsoft.com/office/drawing/2010/main" val="0"/>
+              </a:ext>
+            </a:extLst>
+          </a:blip>
+          <a:stretch>
+            <a:fillRect/>
+          </a:stretch>
+        </p:blipFill>
+        <p:spPr>
+          <a:xfrm>
+            <a:off x="364881" y="3094647"/>
+            <a:ext cx="3785545" cy="618649"/>
+          </a:xfrm>
+          <a:prstGeom prst="rect">
+            <a:avLst/>
+          </a:prstGeom>
+        </p:spPr>
+      </p:pic>
       <p:sp>
         <p:nvSpPr>
           <p:cNvPr id="1185" name="Rounded Rectangle 1184">
@@ -3863,7 +3899,7 @@
           <p:nvPr/>
         </p:nvPicPr>
         <p:blipFill>
-          <a:blip r:embed="rId2">
+          <a:blip r:embed="rId3">
             <a:extLst>
               <a:ext uri="{28A0092B-C50C-407E-A947-70E740481C1C}">
                 <a14:useLocalDpi xmlns:a14="http://schemas.microsoft.com/office/drawing/2010/main" val="0"/>
@@ -3901,53 +3937,6 @@
             <a:extLst>
               <a:ext uri="{FF2B5EF4-FFF2-40B4-BE49-F238E27FC236}">
                 <a16:creationId xmlns:a16="http://schemas.microsoft.com/office/drawing/2014/main" id="{7A56E264-453C-C35F-E92C-28AF43EB4CEC}"/>
-              </a:ext>
-            </a:extLst>
-          </p:cNvPr>
-          <p:cNvPicPr>
-            <a:picLocks noChangeAspect="1" noChangeArrowheads="1"/>
-          </p:cNvPicPr>
-          <p:nvPr/>
-        </p:nvPicPr>
-        <p:blipFill>
-          <a:blip r:embed="rId3">
-            <a:extLst>
-              <a:ext uri="{28A0092B-C50C-407E-A947-70E740481C1C}">
-                <a14:useLocalDpi xmlns:a14="http://schemas.microsoft.com/office/drawing/2010/main" val="0"/>
-              </a:ext>
-            </a:extLst>
-          </a:blip>
-          <a:srcRect/>
-          <a:stretch>
-            <a:fillRect/>
-          </a:stretch>
-        </p:blipFill>
-        <p:spPr bwMode="auto">
-          <a:xfrm>
-            <a:off x="5722684" y="2865219"/>
-            <a:ext cx="579114" cy="579114"/>
-          </a:xfrm>
-          <a:prstGeom prst="rect">
-            <a:avLst/>
-          </a:prstGeom>
-          <a:noFill/>
-          <a:extLst>
-            <a:ext uri="{909E8E84-426E-40DD-AFC4-6F175D3DCCD1}">
-              <a14:hiddenFill xmlns:a14="http://schemas.microsoft.com/office/drawing/2010/main">
-                <a:solidFill>
-                  <a:srgbClr val="FFFFFF"/>
-                </a:solidFill>
-              </a14:hiddenFill>
-            </a:ext>
-          </a:extLst>
-        </p:spPr>
-      </p:pic>
-      <p:pic>
-        <p:nvPicPr>
-          <p:cNvPr id="1058" name="Picture 17">
-            <a:extLst>
-              <a:ext uri="{FF2B5EF4-FFF2-40B4-BE49-F238E27FC236}">
-                <a16:creationId xmlns:a16="http://schemas.microsoft.com/office/drawing/2014/main" id="{F8E77C20-E8C6-D37A-3FD1-F4B7B5C355A9}"/>
               </a:ext>
             </a:extLst>
           </p:cNvPr>
@@ -3958,6 +3947,53 @@
         </p:nvPicPr>
         <p:blipFill>
           <a:blip r:embed="rId4">
+            <a:extLst>
+              <a:ext uri="{28A0092B-C50C-407E-A947-70E740481C1C}">
+                <a14:useLocalDpi xmlns:a14="http://schemas.microsoft.com/office/drawing/2010/main" val="0"/>
+              </a:ext>
+            </a:extLst>
+          </a:blip>
+          <a:srcRect/>
+          <a:stretch>
+            <a:fillRect/>
+          </a:stretch>
+        </p:blipFill>
+        <p:spPr bwMode="auto">
+          <a:xfrm>
+            <a:off x="5722684" y="2865219"/>
+            <a:ext cx="579114" cy="579114"/>
+          </a:xfrm>
+          <a:prstGeom prst="rect">
+            <a:avLst/>
+          </a:prstGeom>
+          <a:noFill/>
+          <a:extLst>
+            <a:ext uri="{909E8E84-426E-40DD-AFC4-6F175D3DCCD1}">
+              <a14:hiddenFill xmlns:a14="http://schemas.microsoft.com/office/drawing/2010/main">
+                <a:solidFill>
+                  <a:srgbClr val="FFFFFF"/>
+                </a:solidFill>
+              </a14:hiddenFill>
+            </a:ext>
+          </a:extLst>
+        </p:spPr>
+      </p:pic>
+      <p:pic>
+        <p:nvPicPr>
+          <p:cNvPr id="1058" name="Picture 17">
+            <a:extLst>
+              <a:ext uri="{FF2B5EF4-FFF2-40B4-BE49-F238E27FC236}">
+                <a16:creationId xmlns:a16="http://schemas.microsoft.com/office/drawing/2014/main" id="{F8E77C20-E8C6-D37A-3FD1-F4B7B5C355A9}"/>
+              </a:ext>
+            </a:extLst>
+          </p:cNvPr>
+          <p:cNvPicPr>
+            <a:picLocks noChangeAspect="1" noChangeArrowheads="1"/>
+          </p:cNvPicPr>
+          <p:nvPr/>
+        </p:nvPicPr>
+        <p:blipFill>
+          <a:blip r:embed="rId5">
             <a:extLst>
               <a:ext uri="{28A0092B-C50C-407E-A947-70E740481C1C}">
                 <a14:useLocalDpi xmlns:a14="http://schemas.microsoft.com/office/drawing/2010/main" val="0"/>
@@ -4344,7 +4380,7 @@
                 <a:effectLst/>
                 <a:latin typeface="Source Sans Pro" panose="020B0503030403020204" pitchFamily="34" charset="0"/>
                 <a:ea typeface="Source Sans Pro" panose="020B0503030403020204" pitchFamily="34" charset="0"/>
-                <a:hlinkClick r:id="rId5"/>
+                <a:hlinkClick r:id="rId6"/>
               </a:rPr>
               <a:t>requests</a:t>
             </a:r>
@@ -4378,7 +4414,7 @@
                 <a:effectLst/>
                 <a:latin typeface="Source Sans Pro" panose="020B0503030403020204" pitchFamily="34" charset="0"/>
                 <a:ea typeface="Source Sans Pro" panose="020B0503030403020204" pitchFamily="34" charset="0"/>
-                <a:hlinkClick r:id="rId6"/>
+                <a:hlinkClick r:id="rId7"/>
               </a:rPr>
               <a:t>httr2</a:t>
             </a:r>
@@ -4412,7 +4448,7 @@
                 <a:effectLst/>
                 <a:latin typeface="Source Sans Pro" panose="020B0503030403020204" pitchFamily="34" charset="0"/>
                 <a:ea typeface="Source Sans Pro" panose="020B0503030403020204" pitchFamily="34" charset="0"/>
-                <a:hlinkClick r:id="rId7"/>
+                <a:hlinkClick r:id="rId8"/>
               </a:rPr>
               <a:t>jsonlite</a:t>
             </a:r>
@@ -4595,7 +4631,7 @@
           <a:blip>
             <a:extLst>
               <a:ext uri="{96DAC541-7B7A-43D3-8B79-37D633B846F1}">
-                <asvg:svgBlip xmlns:asvg="http://schemas.microsoft.com/office/drawing/2016/SVG/main" r:embed="rId8"/>
+                <asvg:svgBlip xmlns:asvg="http://schemas.microsoft.com/office/drawing/2016/SVG/main" r:embed="rId9"/>
               </a:ext>
             </a:extLst>
           </a:blip>
@@ -4959,7 +4995,7 @@
           <p:nvPr/>
         </p:nvPicPr>
         <p:blipFill>
-          <a:blip r:embed="rId9">
+          <a:blip r:embed="rId10">
             <a:extLst>
               <a:ext uri="{28A0092B-C50C-407E-A947-70E740481C1C}">
                 <a14:useLocalDpi xmlns:a14="http://schemas.microsoft.com/office/drawing/2010/main" val="0"/>
@@ -5009,7 +5045,7 @@
           <a:blip>
             <a:extLst>
               <a:ext uri="{96DAC541-7B7A-43D3-8B79-37D633B846F1}">
-                <asvg:svgBlip xmlns:asvg="http://schemas.microsoft.com/office/drawing/2016/SVG/main" r:embed="rId8"/>
+                <asvg:svgBlip xmlns:asvg="http://schemas.microsoft.com/office/drawing/2016/SVG/main" r:embed="rId9"/>
               </a:ext>
             </a:extLst>
           </a:blip>
@@ -5542,7 +5578,7 @@
           <a:blip>
             <a:extLst>
               <a:ext uri="{96DAC541-7B7A-43D3-8B79-37D633B846F1}">
-                <asvg:svgBlip xmlns:asvg="http://schemas.microsoft.com/office/drawing/2016/SVG/main" r:embed="rId8"/>
+                <asvg:svgBlip xmlns:asvg="http://schemas.microsoft.com/office/drawing/2016/SVG/main" r:embed="rId9"/>
               </a:ext>
             </a:extLst>
           </a:blip>
@@ -5734,7 +5770,7 @@
           <p:nvPr/>
         </p:nvPicPr>
         <p:blipFill>
-          <a:blip r:embed="rId10">
+          <a:blip r:embed="rId11">
             <a:extLst>
               <a:ext uri="{28A0092B-C50C-407E-A947-70E740481C1C}">
                 <a14:useLocalDpi xmlns:a14="http://schemas.microsoft.com/office/drawing/2010/main" val="0"/>
@@ -6064,7 +6100,7 @@
           <a:blip>
             <a:extLst>
               <a:ext uri="{96DAC541-7B7A-43D3-8B79-37D633B846F1}">
-                <asvg:svgBlip xmlns:asvg="http://schemas.microsoft.com/office/drawing/2016/SVG/main" r:embed="rId8"/>
+                <asvg:svgBlip xmlns:asvg="http://schemas.microsoft.com/office/drawing/2016/SVG/main" r:embed="rId9"/>
               </a:ext>
             </a:extLst>
           </a:blip>
@@ -6992,7 +7028,7 @@
           <p:nvPr/>
         </p:nvPicPr>
         <p:blipFill>
-          <a:blip r:embed="rId9">
+          <a:blip r:embed="rId10">
             <a:extLst>
               <a:ext uri="{28A0092B-C50C-407E-A947-70E740481C1C}">
                 <a14:useLocalDpi xmlns:a14="http://schemas.microsoft.com/office/drawing/2010/main" val="0"/>
@@ -7039,7 +7075,7 @@
           <p:nvPr/>
         </p:nvPicPr>
         <p:blipFill>
-          <a:blip r:embed="rId10">
+          <a:blip r:embed="rId11">
             <a:extLst>
               <a:ext uri="{28A0092B-C50C-407E-A947-70E740481C1C}">
                 <a14:useLocalDpi xmlns:a14="http://schemas.microsoft.com/office/drawing/2010/main" val="0"/>
@@ -7086,7 +7122,7 @@
           <p:nvPr/>
         </p:nvPicPr>
         <p:blipFill rotWithShape="1">
-          <a:blip r:embed="rId11">
+          <a:blip r:embed="rId12">
             <a:extLst>
               <a:ext uri="{28A0092B-C50C-407E-A947-70E740481C1C}">
                 <a14:useLocalDpi xmlns:a14="http://schemas.microsoft.com/office/drawing/2010/main" val="0"/>
@@ -7533,139 +7569,10 @@
       </p:sp>
       <p:pic>
         <p:nvPicPr>
-          <p:cNvPr id="1144" name="Picture 1143">
-            <a:extLst>
-              <a:ext uri="{FF2B5EF4-FFF2-40B4-BE49-F238E27FC236}">
-                <a16:creationId xmlns:a16="http://schemas.microsoft.com/office/drawing/2014/main" id="{20FA58FF-D218-A2B7-9633-7B1A9A0D062A}"/>
-              </a:ext>
-            </a:extLst>
-          </p:cNvPr>
-          <p:cNvPicPr>
-            <a:picLocks noChangeAspect="1"/>
-          </p:cNvPicPr>
-          <p:nvPr/>
-        </p:nvPicPr>
-        <p:blipFill>
-          <a:blip r:embed="rId12"/>
-          <a:stretch>
-            <a:fillRect/>
-          </a:stretch>
-        </p:blipFill>
-        <p:spPr>
-          <a:xfrm>
-            <a:off x="10442330" y="8371698"/>
-            <a:ext cx="2930947" cy="1666710"/>
-          </a:xfrm>
-          <a:prstGeom prst="rect">
-            <a:avLst/>
-          </a:prstGeom>
-          <a:ln>
-            <a:solidFill>
-              <a:srgbClr val="404041"/>
-            </a:solidFill>
-          </a:ln>
-        </p:spPr>
-      </p:pic>
-      <p:pic>
-        <p:nvPicPr>
           <p:cNvPr id="1145" name="Picture 8">
             <a:extLst>
               <a:ext uri="{FF2B5EF4-FFF2-40B4-BE49-F238E27FC236}">
                 <a16:creationId xmlns:a16="http://schemas.microsoft.com/office/drawing/2014/main" id="{C4853229-BE0F-6D06-C5CF-DE2F9107E7DE}"/>
-              </a:ext>
-            </a:extLst>
-          </p:cNvPr>
-          <p:cNvPicPr>
-            <a:picLocks noChangeAspect="1" noChangeArrowheads="1"/>
-          </p:cNvPicPr>
-          <p:nvPr/>
-        </p:nvPicPr>
-        <p:blipFill>
-          <a:blip r:embed="rId9">
-            <a:extLst>
-              <a:ext uri="{28A0092B-C50C-407E-A947-70E740481C1C}">
-                <a14:useLocalDpi xmlns:a14="http://schemas.microsoft.com/office/drawing/2010/main" val="0"/>
-              </a:ext>
-            </a:extLst>
-          </a:blip>
-          <a:srcRect/>
-          <a:stretch>
-            <a:fillRect/>
-          </a:stretch>
-        </p:blipFill>
-        <p:spPr bwMode="auto">
-          <a:xfrm>
-            <a:off x="5670945" y="8637999"/>
-            <a:ext cx="272731" cy="211340"/>
-          </a:xfrm>
-          <a:prstGeom prst="rect">
-            <a:avLst/>
-          </a:prstGeom>
-          <a:noFill/>
-          <a:extLst>
-            <a:ext uri="{909E8E84-426E-40DD-AFC4-6F175D3DCCD1}">
-              <a14:hiddenFill xmlns:a14="http://schemas.microsoft.com/office/drawing/2010/main">
-                <a:solidFill>
-                  <a:srgbClr val="FFFFFF"/>
-                </a:solidFill>
-              </a14:hiddenFill>
-            </a:ext>
-          </a:extLst>
-        </p:spPr>
-      </p:pic>
-      <p:pic>
-        <p:nvPicPr>
-          <p:cNvPr id="1147" name="Picture 8">
-            <a:extLst>
-              <a:ext uri="{FF2B5EF4-FFF2-40B4-BE49-F238E27FC236}">
-                <a16:creationId xmlns:a16="http://schemas.microsoft.com/office/drawing/2014/main" id="{CC4CD93F-FEE3-991E-E57B-AE6070AB7D64}"/>
-              </a:ext>
-            </a:extLst>
-          </p:cNvPr>
-          <p:cNvPicPr>
-            <a:picLocks noChangeAspect="1" noChangeArrowheads="1"/>
-          </p:cNvPicPr>
-          <p:nvPr/>
-        </p:nvPicPr>
-        <p:blipFill>
-          <a:blip r:embed="rId9">
-            <a:extLst>
-              <a:ext uri="{28A0092B-C50C-407E-A947-70E740481C1C}">
-                <a14:useLocalDpi xmlns:a14="http://schemas.microsoft.com/office/drawing/2010/main" val="0"/>
-              </a:ext>
-            </a:extLst>
-          </a:blip>
-          <a:srcRect/>
-          <a:stretch>
-            <a:fillRect/>
-          </a:stretch>
-        </p:blipFill>
-        <p:spPr bwMode="auto">
-          <a:xfrm>
-            <a:off x="6009944" y="8637999"/>
-            <a:ext cx="272731" cy="211340"/>
-          </a:xfrm>
-          <a:prstGeom prst="rect">
-            <a:avLst/>
-          </a:prstGeom>
-          <a:noFill/>
-          <a:extLst>
-            <a:ext uri="{909E8E84-426E-40DD-AFC4-6F175D3DCCD1}">
-              <a14:hiddenFill xmlns:a14="http://schemas.microsoft.com/office/drawing/2010/main">
-                <a:solidFill>
-                  <a:srgbClr val="FFFFFF"/>
-                </a:solidFill>
-              </a14:hiddenFill>
-            </a:ext>
-          </a:extLst>
-        </p:spPr>
-      </p:pic>
-      <p:pic>
-        <p:nvPicPr>
-          <p:cNvPr id="1151" name="Picture 9">
-            <a:extLst>
-              <a:ext uri="{FF2B5EF4-FFF2-40B4-BE49-F238E27FC236}">
-                <a16:creationId xmlns:a16="http://schemas.microsoft.com/office/drawing/2014/main" id="{82BC10A3-10C9-2A7D-EB89-852E9DE5D7E3}"/>
               </a:ext>
             </a:extLst>
           </p:cNvPr>
@@ -7689,8 +7596,8 @@
         </p:blipFill>
         <p:spPr bwMode="auto">
           <a:xfrm>
-            <a:off x="6346522" y="8610790"/>
-            <a:ext cx="266796" cy="265758"/>
+            <a:off x="5670945" y="8637999"/>
+            <a:ext cx="272731" cy="211340"/>
           </a:xfrm>
           <a:prstGeom prst="rect">
             <a:avLst/>
@@ -7709,10 +7616,10 @@
       </p:pic>
       <p:pic>
         <p:nvPicPr>
-          <p:cNvPr id="1152" name="Picture 9">
+          <p:cNvPr id="1147" name="Picture 8">
             <a:extLst>
               <a:ext uri="{FF2B5EF4-FFF2-40B4-BE49-F238E27FC236}">
-                <a16:creationId xmlns:a16="http://schemas.microsoft.com/office/drawing/2014/main" id="{990AF98B-21A8-6FCD-1F28-B7FD2B35377D}"/>
+                <a16:creationId xmlns:a16="http://schemas.microsoft.com/office/drawing/2014/main" id="{CC4CD93F-FEE3-991E-E57B-AE6070AB7D64}"/>
               </a:ext>
             </a:extLst>
           </p:cNvPr>
@@ -7736,6 +7643,100 @@
         </p:blipFill>
         <p:spPr bwMode="auto">
           <a:xfrm>
+            <a:off x="6009944" y="8637999"/>
+            <a:ext cx="272731" cy="211340"/>
+          </a:xfrm>
+          <a:prstGeom prst="rect">
+            <a:avLst/>
+          </a:prstGeom>
+          <a:noFill/>
+          <a:extLst>
+            <a:ext uri="{909E8E84-426E-40DD-AFC4-6F175D3DCCD1}">
+              <a14:hiddenFill xmlns:a14="http://schemas.microsoft.com/office/drawing/2010/main">
+                <a:solidFill>
+                  <a:srgbClr val="FFFFFF"/>
+                </a:solidFill>
+              </a14:hiddenFill>
+            </a:ext>
+          </a:extLst>
+        </p:spPr>
+      </p:pic>
+      <p:pic>
+        <p:nvPicPr>
+          <p:cNvPr id="1151" name="Picture 9">
+            <a:extLst>
+              <a:ext uri="{FF2B5EF4-FFF2-40B4-BE49-F238E27FC236}">
+                <a16:creationId xmlns:a16="http://schemas.microsoft.com/office/drawing/2014/main" id="{82BC10A3-10C9-2A7D-EB89-852E9DE5D7E3}"/>
+              </a:ext>
+            </a:extLst>
+          </p:cNvPr>
+          <p:cNvPicPr>
+            <a:picLocks noChangeAspect="1" noChangeArrowheads="1"/>
+          </p:cNvPicPr>
+          <p:nvPr/>
+        </p:nvPicPr>
+        <p:blipFill>
+          <a:blip r:embed="rId11">
+            <a:extLst>
+              <a:ext uri="{28A0092B-C50C-407E-A947-70E740481C1C}">
+                <a14:useLocalDpi xmlns:a14="http://schemas.microsoft.com/office/drawing/2010/main" val="0"/>
+              </a:ext>
+            </a:extLst>
+          </a:blip>
+          <a:srcRect/>
+          <a:stretch>
+            <a:fillRect/>
+          </a:stretch>
+        </p:blipFill>
+        <p:spPr bwMode="auto">
+          <a:xfrm>
+            <a:off x="6346522" y="8610790"/>
+            <a:ext cx="266796" cy="265758"/>
+          </a:xfrm>
+          <a:prstGeom prst="rect">
+            <a:avLst/>
+          </a:prstGeom>
+          <a:noFill/>
+          <a:extLst>
+            <a:ext uri="{909E8E84-426E-40DD-AFC4-6F175D3DCCD1}">
+              <a14:hiddenFill xmlns:a14="http://schemas.microsoft.com/office/drawing/2010/main">
+                <a:solidFill>
+                  <a:srgbClr val="FFFFFF"/>
+                </a:solidFill>
+              </a14:hiddenFill>
+            </a:ext>
+          </a:extLst>
+        </p:spPr>
+      </p:pic>
+      <p:pic>
+        <p:nvPicPr>
+          <p:cNvPr id="1152" name="Picture 9">
+            <a:extLst>
+              <a:ext uri="{FF2B5EF4-FFF2-40B4-BE49-F238E27FC236}">
+                <a16:creationId xmlns:a16="http://schemas.microsoft.com/office/drawing/2014/main" id="{990AF98B-21A8-6FCD-1F28-B7FD2B35377D}"/>
+              </a:ext>
+            </a:extLst>
+          </p:cNvPr>
+          <p:cNvPicPr>
+            <a:picLocks noChangeAspect="1" noChangeArrowheads="1"/>
+          </p:cNvPicPr>
+          <p:nvPr/>
+        </p:nvPicPr>
+        <p:blipFill>
+          <a:blip r:embed="rId11">
+            <a:extLst>
+              <a:ext uri="{28A0092B-C50C-407E-A947-70E740481C1C}">
+                <a14:useLocalDpi xmlns:a14="http://schemas.microsoft.com/office/drawing/2010/main" val="0"/>
+              </a:ext>
+            </a:extLst>
+          </a:blip>
+          <a:srcRect/>
+          <a:stretch>
+            <a:fillRect/>
+          </a:stretch>
+        </p:blipFill>
+        <p:spPr bwMode="auto">
+          <a:xfrm>
             <a:off x="6691804" y="8610790"/>
             <a:ext cx="266796" cy="265758"/>
           </a:xfrm>
@@ -7769,7 +7770,7 @@
         <p:spPr>
           <a:xfrm>
             <a:off x="7042721" y="8954586"/>
-            <a:ext cx="2664864" cy="505186"/>
+            <a:ext cx="3090562" cy="505186"/>
           </a:xfrm>
           <a:prstGeom prst="rect">
             <a:avLst/>
@@ -8025,8 +8026,8 @@
         </p:nvSpPr>
         <p:spPr>
           <a:xfrm>
-            <a:off x="5661523" y="9463573"/>
-            <a:ext cx="3637086" cy="689852"/>
+            <a:off x="5661522" y="9555906"/>
+            <a:ext cx="4197545" cy="505186"/>
           </a:xfrm>
           <a:prstGeom prst="rect">
             <a:avLst/>
@@ -8121,14 +8122,14 @@
           </p:cNvPr>
           <p:cNvCxnSpPr>
             <a:cxnSpLocks/>
-            <a:stCxn id="1144" idx="1"/>
+            <a:stCxn id="6" idx="1"/>
           </p:cNvCxnSpPr>
           <p:nvPr/>
         </p:nvCxnSpPr>
         <p:spPr>
           <a:xfrm flipH="1">
-            <a:off x="9214338" y="9205053"/>
-            <a:ext cx="1227992" cy="461226"/>
+            <a:off x="9765808" y="9208658"/>
+            <a:ext cx="1194044" cy="455843"/>
           </a:xfrm>
           <a:prstGeom prst="straightConnector1">
             <a:avLst/>
@@ -9465,7 +9466,7 @@
           <p:nvPr/>
         </p:nvPicPr>
         <p:blipFill>
-          <a:blip r:embed="rId9">
+          <a:blip r:embed="rId10">
             <a:extLst>
               <a:ext uri="{28A0092B-C50C-407E-A947-70E740481C1C}">
                 <a14:useLocalDpi xmlns:a14="http://schemas.microsoft.com/office/drawing/2010/main" val="0"/>
@@ -9512,7 +9513,7 @@
           <p:nvPr/>
         </p:nvPicPr>
         <p:blipFill>
-          <a:blip r:embed="rId10">
+          <a:blip r:embed="rId11">
             <a:extLst>
               <a:ext uri="{28A0092B-C50C-407E-A947-70E740481C1C}">
                 <a14:useLocalDpi xmlns:a14="http://schemas.microsoft.com/office/drawing/2010/main" val="0"/>
@@ -11173,7 +11174,7 @@
           <p:nvPr/>
         </p:nvPicPr>
         <p:blipFill rotWithShape="1">
-          <a:blip r:embed="rId11">
+          <a:blip r:embed="rId12">
             <a:extLst>
               <a:ext uri="{28A0092B-C50C-407E-A947-70E740481C1C}">
                 <a14:useLocalDpi xmlns:a14="http://schemas.microsoft.com/office/drawing/2010/main" val="0"/>
@@ -11218,7 +11219,7 @@
           <p:nvPr/>
         </p:nvPicPr>
         <p:blipFill rotWithShape="1">
-          <a:blip r:embed="rId11">
+          <a:blip r:embed="rId12">
             <a:extLst>
               <a:ext uri="{28A0092B-C50C-407E-A947-70E740481C1C}">
                 <a14:useLocalDpi xmlns:a14="http://schemas.microsoft.com/office/drawing/2010/main" val="0"/>
@@ -11361,98 +11362,158 @@
           </a:p>
         </p:txBody>
       </p:sp>
-      <p:grpSp>
-        <p:nvGrpSpPr>
-          <p:cNvPr id="20" name="Group 19">
+      <p:sp>
+        <p:nvSpPr>
+          <p:cNvPr id="126" name="Rounded Rectangle 125">
             <a:extLst>
               <a:ext uri="{FF2B5EF4-FFF2-40B4-BE49-F238E27FC236}">
-                <a16:creationId xmlns:a16="http://schemas.microsoft.com/office/drawing/2014/main" id="{66E08A76-CAE6-8F7F-C8D3-30527A7CB7FB}"/>
+                <a16:creationId xmlns:a16="http://schemas.microsoft.com/office/drawing/2014/main" id="{B05CADA9-DD14-9697-2330-D6492FAD01D1}"/>
               </a:ext>
             </a:extLst>
           </p:cNvPr>
-          <p:cNvGrpSpPr/>
+          <p:cNvSpPr/>
           <p:nvPr/>
-        </p:nvGrpSpPr>
-        <p:grpSpPr>
-          <a:xfrm>
-            <a:off x="219403" y="1055490"/>
-            <a:ext cx="5321332" cy="2751536"/>
-            <a:chOff x="219403" y="1099632"/>
-            <a:chExt cx="5321332" cy="2751536"/>
-          </a:xfrm>
-        </p:grpSpPr>
-        <p:sp>
-          <p:nvSpPr>
-            <p:cNvPr id="126" name="Rounded Rectangle 125">
-              <a:extLst>
-                <a:ext uri="{FF2B5EF4-FFF2-40B4-BE49-F238E27FC236}">
-                  <a16:creationId xmlns:a16="http://schemas.microsoft.com/office/drawing/2014/main" id="{B05CADA9-DD14-9697-2330-D6492FAD01D1}"/>
-                </a:ext>
-              </a:extLst>
-            </p:cNvPr>
-            <p:cNvSpPr/>
-            <p:nvPr/>
-          </p:nvSpPr>
-          <p:spPr>
-            <a:xfrm>
-              <a:off x="219403" y="1382288"/>
-              <a:ext cx="5321332" cy="2468880"/>
-            </a:xfrm>
-            <a:prstGeom prst="roundRect">
-              <a:avLst>
-                <a:gd name="adj" fmla="val 3116"/>
-              </a:avLst>
-            </a:prstGeom>
+        </p:nvSpPr>
+        <p:spPr>
+          <a:xfrm>
+            <a:off x="219403" y="1338146"/>
+            <a:ext cx="5321332" cy="2468880"/>
+          </a:xfrm>
+          <a:prstGeom prst="roundRect">
+            <a:avLst>
+              <a:gd name="adj" fmla="val 3116"/>
+            </a:avLst>
+          </a:prstGeom>
+          <a:noFill/>
+          <a:ln w="12700" cap="flat">
+            <a:solidFill>
+              <a:srgbClr val="404041"/>
+            </a:solidFill>
+            <a:miter lim="400000"/>
+          </a:ln>
+          <a:effectLst/>
+          <a:sp3d/>
+        </p:spPr>
+        <p:style>
+          <a:lnRef idx="0">
+            <a:scrgbClr r="0" g="0" b="0"/>
+          </a:lnRef>
+          <a:fillRef idx="0">
+            <a:scrgbClr r="0" g="0" b="0"/>
+          </a:fillRef>
+          <a:effectRef idx="0">
+            <a:scrgbClr r="0" g="0" b="0"/>
+          </a:effectRef>
+          <a:fontRef idx="none"/>
+        </p:style>
+        <p:txBody>
+          <a:bodyPr rot="0" spcFirstLastPara="1" vertOverflow="overflow" horzOverflow="overflow" vert="horz" wrap="square" lIns="54570" tIns="54570" rIns="54570" bIns="54570" numCol="1" spcCol="38100" rtlCol="0" anchor="ctr">
+            <a:spAutoFit/>
+          </a:bodyPr>
+          <a:lstStyle/>
+          <a:p>
+            <a:pPr marL="0" marR="0" indent="0" algn="l" defTabSz="584200" rtl="0" fontAlgn="auto" latinLnBrk="0" hangingPunct="0">
+              <a:lnSpc>
+                <a:spcPct val="80000"/>
+              </a:lnSpc>
+              <a:spcBef>
+                <a:spcPts val="0"/>
+              </a:spcBef>
+              <a:spcAft>
+                <a:spcPts val="0"/>
+              </a:spcAft>
+              <a:buClrTx/>
+              <a:buSzTx/>
+              <a:buFontTx/>
+              <a:buNone/>
+              <a:tabLst/>
+            </a:pPr>
+            <a:endParaRPr kumimoji="0" lang="en-US" sz="1200" b="0" i="0" u="none" strike="noStrike" cap="none" spc="0" normalizeH="0" baseline="0">
+              <a:ln>
+                <a:noFill/>
+              </a:ln>
+              <a:solidFill>
+                <a:srgbClr val="000000"/>
+              </a:solidFill>
+              <a:effectLst/>
+              <a:uFillTx/>
+              <a:latin typeface="Source Sans Pro"/>
+              <a:ea typeface="Source Sans Pro"/>
+              <a:cs typeface="Source Sans Pro"/>
+              <a:sym typeface="Source Sans Pro"/>
+            </a:endParaRPr>
+          </a:p>
+        </p:txBody>
+      </p:sp>
+      <p:sp>
+        <p:nvSpPr>
+          <p:cNvPr id="120" name="TextBox 119">
+            <a:extLst>
+              <a:ext uri="{FF2B5EF4-FFF2-40B4-BE49-F238E27FC236}">
+                <a16:creationId xmlns:a16="http://schemas.microsoft.com/office/drawing/2014/main" id="{441B1F64-AF38-9748-62C8-4FBD13DD5016}"/>
+              </a:ext>
+            </a:extLst>
+          </p:cNvPr>
+          <p:cNvSpPr txBox="1"/>
+          <p:nvPr/>
+        </p:nvSpPr>
+        <p:spPr>
+          <a:xfrm>
+            <a:off x="245965" y="1432394"/>
+            <a:ext cx="5098663" cy="320520"/>
+          </a:xfrm>
+          <a:prstGeom prst="rect">
+            <a:avLst/>
+          </a:prstGeom>
+          <a:noFill/>
+          <a:ln w="12700" cap="flat">
             <a:noFill/>
-            <a:ln w="12700" cap="flat">
-              <a:solidFill>
-                <a:srgbClr val="404041"/>
-              </a:solidFill>
-              <a:miter lim="400000"/>
-            </a:ln>
-            <a:effectLst/>
-            <a:sp3d/>
-          </p:spPr>
-          <p:style>
-            <a:lnRef idx="0">
-              <a:scrgbClr r="0" g="0" b="0"/>
-            </a:lnRef>
-            <a:fillRef idx="0">
-              <a:scrgbClr r="0" g="0" b="0"/>
-            </a:fillRef>
-            <a:effectRef idx="0">
-              <a:scrgbClr r="0" g="0" b="0"/>
-            </a:effectRef>
-            <a:fontRef idx="none"/>
-          </p:style>
-          <p:txBody>
-            <a:bodyPr rot="0" spcFirstLastPara="1" vertOverflow="overflow" horzOverflow="overflow" vert="horz" wrap="square" lIns="54570" tIns="54570" rIns="54570" bIns="54570" numCol="1" spcCol="38100" rtlCol="0" anchor="ctr">
-              <a:spAutoFit/>
-            </a:bodyPr>
-            <a:lstStyle/>
-            <a:p>
-              <a:pPr marL="0" marR="0" indent="0" algn="l" defTabSz="584200" rtl="0" fontAlgn="auto" latinLnBrk="0" hangingPunct="0">
-                <a:lnSpc>
-                  <a:spcPct val="80000"/>
-                </a:lnSpc>
-                <a:spcBef>
-                  <a:spcPts val="0"/>
-                </a:spcBef>
-                <a:spcAft>
-                  <a:spcPts val="0"/>
-                </a:spcAft>
-                <a:buClrTx/>
-                <a:buSzTx/>
-                <a:buFontTx/>
-                <a:buNone/>
-                <a:tabLst/>
-              </a:pPr>
-              <a:endParaRPr kumimoji="0" lang="en-US" sz="1200" b="0" i="0" u="none" strike="noStrike" cap="none" spc="0" normalizeH="0" baseline="0">
+            <a:miter lim="400000"/>
+          </a:ln>
+          <a:effectLst/>
+          <a:sp3d/>
+        </p:spPr>
+        <p:style>
+          <a:lnRef idx="0">
+            <a:scrgbClr r="0" g="0" b="0"/>
+          </a:lnRef>
+          <a:fillRef idx="0">
+            <a:scrgbClr r="0" g="0" b="0"/>
+          </a:fillRef>
+          <a:effectRef idx="0">
+            <a:scrgbClr r="0" g="0" b="0"/>
+          </a:effectRef>
+          <a:fontRef idx="none"/>
+        </p:style>
+        <p:txBody>
+          <a:bodyPr rot="0" spcFirstLastPara="1" vertOverflow="overflow" horzOverflow="overflow" vert="horz" wrap="square" lIns="54570" tIns="54570" rIns="54570" bIns="54570" numCol="1" spcCol="38100" rtlCol="0" anchor="ctr">
+            <a:spAutoFit/>
+          </a:bodyPr>
+          <a:lstStyle/>
+          <a:p>
+            <a:pPr marL="0" marR="0" indent="0" defTabSz="584200" rtl="0" fontAlgn="auto" latinLnBrk="0" hangingPunct="0">
+              <a:lnSpc>
+                <a:spcPct val="100000"/>
+              </a:lnSpc>
+              <a:spcBef>
+                <a:spcPts val="200"/>
+              </a:spcBef>
+              <a:spcAft>
+                <a:spcPts val="0"/>
+              </a:spcAft>
+              <a:buClrTx/>
+              <a:buSzTx/>
+              <a:buFontTx/>
+              <a:buNone/>
+              <a:tabLst/>
+            </a:pPr>
+            <a:r>
+              <a:rPr kumimoji="0" lang="en-US" sz="1200" b="0" i="0" u="none" strike="noStrike" cap="none" spc="0" normalizeH="0" baseline="0" dirty="0">
                 <a:ln>
                   <a:noFill/>
                 </a:ln>
                 <a:solidFill>
-                  <a:srgbClr val="000000"/>
+                  <a:srgbClr val="4C4C4C"/>
                 </a:solidFill>
                 <a:effectLst/>
                 <a:uFillTx/>
@@ -11460,205 +11521,94 @@
                 <a:ea typeface="Source Sans Pro"/>
                 <a:cs typeface="Source Sans Pro"/>
                 <a:sym typeface="Source Sans Pro"/>
-              </a:endParaRPr>
-            </a:p>
-          </p:txBody>
-        </p:sp>
-        <p:pic>
-          <p:nvPicPr>
-            <p:cNvPr id="112" name="Graphic 111">
-              <a:extLst>
-                <a:ext uri="{FF2B5EF4-FFF2-40B4-BE49-F238E27FC236}">
-                  <a16:creationId xmlns:a16="http://schemas.microsoft.com/office/drawing/2014/main" id="{50291DF8-712B-7E37-E9B4-8EE91291F0A6}"/>
-                </a:ext>
-              </a:extLst>
-            </p:cNvPr>
-            <p:cNvPicPr>
-              <a:picLocks noChangeAspect="1"/>
-            </p:cNvPicPr>
-            <p:nvPr/>
-          </p:nvPicPr>
-          <p:blipFill>
-            <a:blip>
-              <a:extLst>
-                <a:ext uri="{96DAC541-7B7A-43D3-8B79-37D633B846F1}">
-                  <asvg:svgBlip xmlns:asvg="http://schemas.microsoft.com/office/drawing/2016/SVG/main" r:embed="rId19"/>
-                </a:ext>
-              </a:extLst>
-            </a:blip>
-            <a:srcRect l="15366" b="7067"/>
-            <a:stretch>
-              <a:fillRect/>
-            </a:stretch>
-          </p:blipFill>
-          <p:spPr>
-            <a:xfrm>
-              <a:off x="801914" y="2417348"/>
-              <a:ext cx="2810804" cy="420609"/>
-            </a:xfrm>
-            <a:prstGeom prst="rect">
-              <a:avLst/>
-            </a:prstGeom>
-          </p:spPr>
-        </p:pic>
-        <p:pic>
-          <p:nvPicPr>
-            <p:cNvPr id="114" name="Graphic 113">
-              <a:extLst>
-                <a:ext uri="{FF2B5EF4-FFF2-40B4-BE49-F238E27FC236}">
-                  <a16:creationId xmlns:a16="http://schemas.microsoft.com/office/drawing/2014/main" id="{54D5C8BD-77C2-7282-E0CC-80EBF276B468}"/>
-                </a:ext>
-              </a:extLst>
-            </p:cNvPr>
-            <p:cNvPicPr>
-              <a:picLocks noChangeAspect="1"/>
-            </p:cNvPicPr>
-            <p:nvPr/>
-          </p:nvPicPr>
-          <p:blipFill>
-            <a:blip>
-              <a:extLst>
-                <a:ext uri="{96DAC541-7B7A-43D3-8B79-37D633B846F1}">
-                  <asvg:svgBlip xmlns:asvg="http://schemas.microsoft.com/office/drawing/2016/SVG/main" r:embed="rId20"/>
-                </a:ext>
-              </a:extLst>
-            </a:blip>
-            <a:srcRect l="9995" r="-498" b="-3753"/>
-            <a:stretch>
-              <a:fillRect/>
-            </a:stretch>
-          </p:blipFill>
-          <p:spPr>
-            <a:xfrm>
-              <a:off x="801914" y="3073135"/>
-              <a:ext cx="4621020" cy="494158"/>
-            </a:xfrm>
-            <a:prstGeom prst="rect">
-              <a:avLst/>
-            </a:prstGeom>
-          </p:spPr>
-        </p:pic>
-        <p:pic>
-          <p:nvPicPr>
-            <p:cNvPr id="116" name="Graphic 115">
-              <a:extLst>
-                <a:ext uri="{FF2B5EF4-FFF2-40B4-BE49-F238E27FC236}">
-                  <a16:creationId xmlns:a16="http://schemas.microsoft.com/office/drawing/2014/main" id="{B64F98FE-0601-9E84-4FD0-87324DAF7E14}"/>
-                </a:ext>
-              </a:extLst>
-            </p:cNvPr>
-            <p:cNvPicPr>
-              <a:picLocks noChangeAspect="1"/>
-            </p:cNvPicPr>
-            <p:nvPr/>
-          </p:nvPicPr>
-          <p:blipFill>
-            <a:blip>
-              <a:extLst>
-                <a:ext uri="{96DAC541-7B7A-43D3-8B79-37D633B846F1}">
-                  <asvg:svgBlip xmlns:asvg="http://schemas.microsoft.com/office/drawing/2016/SVG/main" r:embed="rId21"/>
-                </a:ext>
-              </a:extLst>
-            </a:blip>
-            <a:srcRect l="13081" b="-1541"/>
-            <a:stretch>
-              <a:fillRect/>
-            </a:stretch>
-          </p:blipFill>
-          <p:spPr>
-            <a:xfrm>
-              <a:off x="801914" y="1754586"/>
-              <a:ext cx="3390888" cy="459566"/>
-            </a:xfrm>
-            <a:prstGeom prst="rect">
-              <a:avLst/>
-            </a:prstGeom>
-          </p:spPr>
-        </p:pic>
-        <p:sp>
-          <p:nvSpPr>
-            <p:cNvPr id="120" name="TextBox 119">
-              <a:extLst>
-                <a:ext uri="{FF2B5EF4-FFF2-40B4-BE49-F238E27FC236}">
-                  <a16:creationId xmlns:a16="http://schemas.microsoft.com/office/drawing/2014/main" id="{441B1F64-AF38-9748-62C8-4FBD13DD5016}"/>
-                </a:ext>
-              </a:extLst>
-            </p:cNvPr>
-            <p:cNvSpPr txBox="1"/>
-            <p:nvPr/>
-          </p:nvSpPr>
-          <p:spPr>
-            <a:xfrm>
-              <a:off x="245965" y="1476536"/>
-              <a:ext cx="5098663" cy="320520"/>
-            </a:xfrm>
-            <a:prstGeom prst="rect">
-              <a:avLst/>
-            </a:prstGeom>
+              </a:rPr>
+              <a:t>Posit Team </a:t>
+            </a:r>
+            <a:r>
+              <a:rPr lang="en-US" b="0" dirty="0"/>
+              <a:t>bundles Posit’s premier data science tools, including:</a:t>
+            </a:r>
+            <a:endParaRPr kumimoji="0" lang="en-US" sz="1200" b="0" i="0" u="none" strike="noStrike" cap="none" spc="0" normalizeH="0" baseline="0" dirty="0">
+              <a:ln>
+                <a:noFill/>
+              </a:ln>
+              <a:solidFill>
+                <a:srgbClr val="4C4C4C"/>
+              </a:solidFill>
+              <a:effectLst/>
+              <a:uFillTx/>
+              <a:latin typeface="Source Sans Pro"/>
+              <a:ea typeface="Source Sans Pro"/>
+              <a:cs typeface="Source Sans Pro"/>
+              <a:sym typeface="Source Sans Pro"/>
+            </a:endParaRPr>
+          </a:p>
+        </p:txBody>
+      </p:sp>
+      <p:sp>
+        <p:nvSpPr>
+          <p:cNvPr id="121" name="TextBox 120">
+            <a:extLst>
+              <a:ext uri="{FF2B5EF4-FFF2-40B4-BE49-F238E27FC236}">
+                <a16:creationId xmlns:a16="http://schemas.microsoft.com/office/drawing/2014/main" id="{FD7D3023-E63D-536B-1230-A563998A5610}"/>
+              </a:ext>
+            </a:extLst>
+          </p:cNvPr>
+          <p:cNvSpPr txBox="1"/>
+          <p:nvPr/>
+        </p:nvSpPr>
+        <p:spPr>
+          <a:xfrm>
+            <a:off x="1103359" y="2120850"/>
+            <a:ext cx="3731003" cy="320520"/>
+          </a:xfrm>
+          <a:prstGeom prst="rect">
+            <a:avLst/>
+          </a:prstGeom>
+          <a:noFill/>
+          <a:ln w="12700" cap="flat">
             <a:noFill/>
-            <a:ln w="12700" cap="flat">
-              <a:noFill/>
-              <a:miter lim="400000"/>
-            </a:ln>
-            <a:effectLst/>
-            <a:sp3d/>
-          </p:spPr>
-          <p:style>
-            <a:lnRef idx="0">
-              <a:scrgbClr r="0" g="0" b="0"/>
-            </a:lnRef>
-            <a:fillRef idx="0">
-              <a:scrgbClr r="0" g="0" b="0"/>
-            </a:fillRef>
-            <a:effectRef idx="0">
-              <a:scrgbClr r="0" g="0" b="0"/>
-            </a:effectRef>
-            <a:fontRef idx="none"/>
-          </p:style>
-          <p:txBody>
-            <a:bodyPr rot="0" spcFirstLastPara="1" vertOverflow="overflow" horzOverflow="overflow" vert="horz" wrap="square" lIns="54570" tIns="54570" rIns="54570" bIns="54570" numCol="1" spcCol="38100" rtlCol="0" anchor="ctr">
-              <a:spAutoFit/>
-            </a:bodyPr>
-            <a:lstStyle/>
-            <a:p>
-              <a:pPr marL="0" marR="0" indent="0" defTabSz="584200" rtl="0" fontAlgn="auto" latinLnBrk="0" hangingPunct="0">
-                <a:lnSpc>
-                  <a:spcPct val="100000"/>
-                </a:lnSpc>
-                <a:spcBef>
-                  <a:spcPts val="200"/>
-                </a:spcBef>
-                <a:spcAft>
-                  <a:spcPts val="0"/>
-                </a:spcAft>
-                <a:buClrTx/>
-                <a:buSzTx/>
-                <a:buFontTx/>
-                <a:buNone/>
-                <a:tabLst/>
-              </a:pPr>
-              <a:r>
-                <a:rPr kumimoji="0" lang="en-US" sz="1200" b="0" i="0" u="none" strike="noStrike" cap="none" spc="0" normalizeH="0" baseline="0" dirty="0">
-                  <a:ln>
-                    <a:noFill/>
-                  </a:ln>
-                  <a:solidFill>
-                    <a:srgbClr val="4C4C4C"/>
-                  </a:solidFill>
-                  <a:effectLst/>
-                  <a:uFillTx/>
-                  <a:latin typeface="Source Sans Pro"/>
-                  <a:ea typeface="Source Sans Pro"/>
-                  <a:cs typeface="Source Sans Pro"/>
-                  <a:sym typeface="Source Sans Pro"/>
-                </a:rPr>
-                <a:t>Posit Team </a:t>
-              </a:r>
-              <a:r>
-                <a:rPr lang="en-US" b="0" dirty="0"/>
-                <a:t>bundles Posit’s premier data science tools, including:</a:t>
-              </a:r>
-              <a:endParaRPr kumimoji="0" lang="en-US" sz="1200" b="0" i="0" u="none" strike="noStrike" cap="none" spc="0" normalizeH="0" baseline="0" dirty="0">
+            <a:miter lim="400000"/>
+          </a:ln>
+          <a:effectLst/>
+          <a:sp3d/>
+        </p:spPr>
+        <p:style>
+          <a:lnRef idx="0">
+            <a:scrgbClr r="0" g="0" b="0"/>
+          </a:lnRef>
+          <a:fillRef idx="0">
+            <a:scrgbClr r="0" g="0" b="0"/>
+          </a:fillRef>
+          <a:effectRef idx="0">
+            <a:scrgbClr r="0" g="0" b="0"/>
+          </a:effectRef>
+          <a:fontRef idx="none"/>
+        </p:style>
+        <p:txBody>
+          <a:bodyPr rot="0" spcFirstLastPara="1" vertOverflow="overflow" horzOverflow="overflow" vert="horz" wrap="square" lIns="54570" tIns="54570" rIns="54570" bIns="54570" numCol="1" spcCol="38100" rtlCol="0" anchor="ctr">
+            <a:spAutoFit/>
+          </a:bodyPr>
+          <a:lstStyle/>
+          <a:p>
+            <a:pPr marL="0" marR="0" indent="0" defTabSz="584200" rtl="0" fontAlgn="auto" latinLnBrk="0" hangingPunct="0">
+              <a:lnSpc>
+                <a:spcPct val="100000"/>
+              </a:lnSpc>
+              <a:spcBef>
+                <a:spcPts val="200"/>
+              </a:spcBef>
+              <a:spcAft>
+                <a:spcPts val="0"/>
+              </a:spcAft>
+              <a:buClrTx/>
+              <a:buSzTx/>
+              <a:buFontTx/>
+              <a:buNone/>
+              <a:tabLst/>
+            </a:pPr>
+            <a:r>
+              <a:rPr kumimoji="0" lang="en-US" sz="1200" b="0" i="0" u="none" strike="noStrike" cap="none" spc="0" normalizeH="0" baseline="0" dirty="0">
                 <a:ln>
                   <a:noFill/>
                 </a:ln>
@@ -11671,450 +11621,260 @@
                 <a:ea typeface="Source Sans Pro"/>
                 <a:cs typeface="Source Sans Pro"/>
                 <a:sym typeface="Source Sans Pro"/>
-              </a:endParaRPr>
-            </a:p>
-          </p:txBody>
-        </p:sp>
-        <p:sp>
-          <p:nvSpPr>
-            <p:cNvPr id="121" name="TextBox 120">
-              <a:extLst>
-                <a:ext uri="{FF2B5EF4-FFF2-40B4-BE49-F238E27FC236}">
-                  <a16:creationId xmlns:a16="http://schemas.microsoft.com/office/drawing/2014/main" id="{FD7D3023-E63D-536B-1230-A563998A5610}"/>
-                </a:ext>
-              </a:extLst>
-            </p:cNvPr>
-            <p:cNvSpPr txBox="1"/>
-            <p:nvPr/>
-          </p:nvSpPr>
-          <p:spPr>
-            <a:xfrm>
-              <a:off x="344384" y="2145531"/>
-              <a:ext cx="3731003" cy="320520"/>
-            </a:xfrm>
-            <a:prstGeom prst="rect">
-              <a:avLst/>
-            </a:prstGeom>
+              </a:rPr>
+              <a:t>Development environment for creating insights</a:t>
+            </a:r>
+          </a:p>
+        </p:txBody>
+      </p:sp>
+      <p:sp>
+        <p:nvSpPr>
+          <p:cNvPr id="122" name="TextBox 121">
+            <a:extLst>
+              <a:ext uri="{FF2B5EF4-FFF2-40B4-BE49-F238E27FC236}">
+                <a16:creationId xmlns:a16="http://schemas.microsoft.com/office/drawing/2014/main" id="{C2FDAFF4-F4B3-4382-4155-80E451DDB251}"/>
+              </a:ext>
+            </a:extLst>
+          </p:cNvPr>
+          <p:cNvSpPr txBox="1"/>
+          <p:nvPr/>
+        </p:nvSpPr>
+        <p:spPr>
+          <a:xfrm>
+            <a:off x="1109296" y="2789256"/>
+            <a:ext cx="3988822" cy="320520"/>
+          </a:xfrm>
+          <a:prstGeom prst="rect">
+            <a:avLst/>
+          </a:prstGeom>
+          <a:noFill/>
+          <a:ln w="12700" cap="flat">
             <a:noFill/>
-            <a:ln w="12700" cap="flat">
-              <a:noFill/>
-              <a:miter lim="400000"/>
-            </a:ln>
-            <a:effectLst/>
-            <a:sp3d/>
-          </p:spPr>
-          <p:style>
-            <a:lnRef idx="0">
-              <a:scrgbClr r="0" g="0" b="0"/>
-            </a:lnRef>
-            <a:fillRef idx="0">
-              <a:scrgbClr r="0" g="0" b="0"/>
-            </a:fillRef>
-            <a:effectRef idx="0">
-              <a:scrgbClr r="0" g="0" b="0"/>
-            </a:effectRef>
-            <a:fontRef idx="none"/>
-          </p:style>
-          <p:txBody>
-            <a:bodyPr rot="0" spcFirstLastPara="1" vertOverflow="overflow" horzOverflow="overflow" vert="horz" wrap="square" lIns="54570" tIns="54570" rIns="54570" bIns="54570" numCol="1" spcCol="38100" rtlCol="0" anchor="ctr">
-              <a:spAutoFit/>
-            </a:bodyPr>
-            <a:lstStyle/>
-            <a:p>
-              <a:pPr marL="0" marR="0" indent="0" defTabSz="584200" rtl="0" fontAlgn="auto" latinLnBrk="0" hangingPunct="0">
-                <a:lnSpc>
-                  <a:spcPct val="100000"/>
-                </a:lnSpc>
-                <a:spcBef>
-                  <a:spcPts val="200"/>
-                </a:spcBef>
-                <a:spcAft>
-                  <a:spcPts val="0"/>
-                </a:spcAft>
-                <a:buClrTx/>
-                <a:buSzTx/>
-                <a:buFontTx/>
-                <a:buNone/>
-                <a:tabLst/>
-              </a:pPr>
-              <a:r>
-                <a:rPr kumimoji="0" lang="en-US" sz="1200" b="0" i="0" u="none" strike="noStrike" cap="none" spc="0" normalizeH="0" baseline="0" dirty="0">
-                  <a:ln>
-                    <a:noFill/>
-                  </a:ln>
-                  <a:solidFill>
-                    <a:srgbClr val="4C4C4C"/>
-                  </a:solidFill>
-                  <a:effectLst/>
-                  <a:uFillTx/>
-                  <a:latin typeface="Source Sans Pro"/>
-                  <a:ea typeface="Source Sans Pro"/>
-                  <a:cs typeface="Source Sans Pro"/>
-                  <a:sym typeface="Source Sans Pro"/>
-                </a:rPr>
-                <a:t>Development environment for creating insights</a:t>
-              </a:r>
-            </a:p>
-          </p:txBody>
-        </p:sp>
-        <p:sp>
-          <p:nvSpPr>
-            <p:cNvPr id="122" name="TextBox 121">
-              <a:extLst>
-                <a:ext uri="{FF2B5EF4-FFF2-40B4-BE49-F238E27FC236}">
-                  <a16:creationId xmlns:a16="http://schemas.microsoft.com/office/drawing/2014/main" id="{C2FDAFF4-F4B3-4382-4155-80E451DDB251}"/>
-                </a:ext>
-              </a:extLst>
-            </p:cNvPr>
-            <p:cNvSpPr txBox="1"/>
-            <p:nvPr/>
-          </p:nvSpPr>
-          <p:spPr>
-            <a:xfrm>
-              <a:off x="344384" y="2798929"/>
-              <a:ext cx="3988822" cy="320520"/>
-            </a:xfrm>
-            <a:prstGeom prst="rect">
-              <a:avLst/>
-            </a:prstGeom>
+            <a:miter lim="400000"/>
+          </a:ln>
+          <a:effectLst/>
+          <a:sp3d/>
+        </p:spPr>
+        <p:style>
+          <a:lnRef idx="0">
+            <a:scrgbClr r="0" g="0" b="0"/>
+          </a:lnRef>
+          <a:fillRef idx="0">
+            <a:scrgbClr r="0" g="0" b="0"/>
+          </a:fillRef>
+          <a:effectRef idx="0">
+            <a:scrgbClr r="0" g="0" b="0"/>
+          </a:effectRef>
+          <a:fontRef idx="none"/>
+        </p:style>
+        <p:txBody>
+          <a:bodyPr rot="0" spcFirstLastPara="1" vertOverflow="overflow" horzOverflow="overflow" vert="horz" wrap="square" lIns="54570" tIns="54570" rIns="54570" bIns="54570" numCol="1" spcCol="38100" rtlCol="0" anchor="ctr">
+            <a:spAutoFit/>
+          </a:bodyPr>
+          <a:lstStyle/>
+          <a:p>
+            <a:pPr marL="0" marR="0" indent="0" defTabSz="584200" rtl="0" fontAlgn="auto" latinLnBrk="0" hangingPunct="0">
+              <a:lnSpc>
+                <a:spcPct val="100000"/>
+              </a:lnSpc>
+              <a:spcBef>
+                <a:spcPts val="200"/>
+              </a:spcBef>
+              <a:spcAft>
+                <a:spcPts val="0"/>
+              </a:spcAft>
+              <a:buClrTx/>
+              <a:buSzTx/>
+              <a:buFontTx/>
+              <a:buNone/>
+              <a:tabLst/>
+            </a:pPr>
+            <a:r>
+              <a:rPr kumimoji="0" lang="en-US" sz="1200" b="0" i="0" u="none" strike="noStrike" cap="none" spc="0" normalizeH="0" baseline="0" dirty="0">
+                <a:ln>
+                  <a:noFill/>
+                </a:ln>
+                <a:solidFill>
+                  <a:srgbClr val="4C4C4C"/>
+                </a:solidFill>
+                <a:effectLst/>
+                <a:uFillTx/>
+                <a:latin typeface="Source Sans Pro"/>
+                <a:ea typeface="Source Sans Pro"/>
+                <a:cs typeface="Source Sans Pro"/>
+                <a:sym typeface="Source Sans Pro"/>
+              </a:rPr>
+              <a:t>Hosting environment for accessing and sharing insights</a:t>
+            </a:r>
+          </a:p>
+        </p:txBody>
+      </p:sp>
+      <p:sp>
+        <p:nvSpPr>
+          <p:cNvPr id="123" name="TextBox 122">
+            <a:extLst>
+              <a:ext uri="{FF2B5EF4-FFF2-40B4-BE49-F238E27FC236}">
+                <a16:creationId xmlns:a16="http://schemas.microsoft.com/office/drawing/2014/main" id="{9347071F-35BF-A22A-18B1-267499D10E47}"/>
+              </a:ext>
+            </a:extLst>
+          </p:cNvPr>
+          <p:cNvSpPr txBox="1"/>
+          <p:nvPr/>
+        </p:nvSpPr>
+        <p:spPr>
+          <a:xfrm>
+            <a:off x="1071087" y="3498362"/>
+            <a:ext cx="3806995" cy="320520"/>
+          </a:xfrm>
+          <a:prstGeom prst="rect">
+            <a:avLst/>
+          </a:prstGeom>
+          <a:noFill/>
+          <a:ln w="12700" cap="flat">
             <a:noFill/>
-            <a:ln w="12700" cap="flat">
-              <a:noFill/>
-              <a:miter lim="400000"/>
-            </a:ln>
-            <a:effectLst/>
-            <a:sp3d/>
-          </p:spPr>
-          <p:style>
-            <a:lnRef idx="0">
-              <a:scrgbClr r="0" g="0" b="0"/>
-            </a:lnRef>
-            <a:fillRef idx="0">
-              <a:scrgbClr r="0" g="0" b="0"/>
-            </a:fillRef>
-            <a:effectRef idx="0">
-              <a:scrgbClr r="0" g="0" b="0"/>
-            </a:effectRef>
-            <a:fontRef idx="none"/>
-          </p:style>
-          <p:txBody>
-            <a:bodyPr rot="0" spcFirstLastPara="1" vertOverflow="overflow" horzOverflow="overflow" vert="horz" wrap="square" lIns="54570" tIns="54570" rIns="54570" bIns="54570" numCol="1" spcCol="38100" rtlCol="0" anchor="ctr">
-              <a:spAutoFit/>
-            </a:bodyPr>
-            <a:lstStyle/>
-            <a:p>
-              <a:pPr marL="0" marR="0" indent="0" defTabSz="584200" rtl="0" fontAlgn="auto" latinLnBrk="0" hangingPunct="0">
-                <a:lnSpc>
-                  <a:spcPct val="100000"/>
-                </a:lnSpc>
-                <a:spcBef>
-                  <a:spcPts val="200"/>
-                </a:spcBef>
-                <a:spcAft>
-                  <a:spcPts val="0"/>
-                </a:spcAft>
-                <a:buClrTx/>
-                <a:buSzTx/>
-                <a:buFontTx/>
-                <a:buNone/>
-                <a:tabLst/>
-              </a:pPr>
-              <a:r>
-                <a:rPr kumimoji="0" lang="en-US" sz="1200" b="0" i="0" u="none" strike="noStrike" cap="none" spc="0" normalizeH="0" baseline="0" dirty="0">
-                  <a:ln>
-                    <a:noFill/>
-                  </a:ln>
-                  <a:solidFill>
-                    <a:srgbClr val="4C4C4C"/>
-                  </a:solidFill>
-                  <a:effectLst/>
-                  <a:uFillTx/>
-                  <a:latin typeface="Source Sans Pro"/>
-                  <a:ea typeface="Source Sans Pro"/>
-                  <a:cs typeface="Source Sans Pro"/>
-                  <a:sym typeface="Source Sans Pro"/>
-                </a:rPr>
-                <a:t>Hosting environment for accessing and sharing insights</a:t>
-              </a:r>
-            </a:p>
-          </p:txBody>
-        </p:sp>
-        <p:sp>
-          <p:nvSpPr>
-            <p:cNvPr id="123" name="TextBox 122">
-              <a:extLst>
-                <a:ext uri="{FF2B5EF4-FFF2-40B4-BE49-F238E27FC236}">
-                  <a16:creationId xmlns:a16="http://schemas.microsoft.com/office/drawing/2014/main" id="{9347071F-35BF-A22A-18B1-267499D10E47}"/>
-                </a:ext>
-              </a:extLst>
-            </p:cNvPr>
-            <p:cNvSpPr txBox="1"/>
-            <p:nvPr/>
-          </p:nvSpPr>
-          <p:spPr>
-            <a:xfrm>
-              <a:off x="344384" y="3465117"/>
-              <a:ext cx="3806995" cy="320520"/>
-            </a:xfrm>
-            <a:prstGeom prst="rect">
-              <a:avLst/>
-            </a:prstGeom>
+            <a:miter lim="400000"/>
+          </a:ln>
+          <a:effectLst/>
+          <a:sp3d/>
+        </p:spPr>
+        <p:style>
+          <a:lnRef idx="0">
+            <a:scrgbClr r="0" g="0" b="0"/>
+          </a:lnRef>
+          <a:fillRef idx="0">
+            <a:scrgbClr r="0" g="0" b="0"/>
+          </a:fillRef>
+          <a:effectRef idx="0">
+            <a:scrgbClr r="0" g="0" b="0"/>
+          </a:effectRef>
+          <a:fontRef idx="none"/>
+        </p:style>
+        <p:txBody>
+          <a:bodyPr rot="0" spcFirstLastPara="1" vertOverflow="overflow" horzOverflow="overflow" vert="horz" wrap="square" lIns="54570" tIns="54570" rIns="54570" bIns="54570" numCol="1" spcCol="38100" rtlCol="0" anchor="ctr">
+            <a:spAutoFit/>
+          </a:bodyPr>
+          <a:lstStyle/>
+          <a:p>
+            <a:pPr marL="0" marR="0" indent="0" defTabSz="584200" rtl="0" fontAlgn="auto" latinLnBrk="0" hangingPunct="0">
+              <a:lnSpc>
+                <a:spcPct val="100000"/>
+              </a:lnSpc>
+              <a:spcBef>
+                <a:spcPts val="200"/>
+              </a:spcBef>
+              <a:spcAft>
+                <a:spcPts val="0"/>
+              </a:spcAft>
+              <a:buClrTx/>
+              <a:buSzTx/>
+              <a:buFontTx/>
+              <a:buNone/>
+              <a:tabLst/>
+            </a:pPr>
+            <a:r>
+              <a:rPr kumimoji="0" lang="en-US" sz="1200" b="0" i="0" u="none" strike="noStrike" cap="none" spc="0" normalizeH="0" baseline="0" dirty="0">
+                <a:ln>
+                  <a:noFill/>
+                </a:ln>
+                <a:solidFill>
+                  <a:srgbClr val="4C4C4C"/>
+                </a:solidFill>
+                <a:effectLst/>
+                <a:uFillTx/>
+                <a:latin typeface="Source Sans Pro"/>
+                <a:ea typeface="Source Sans Pro"/>
+                <a:cs typeface="Source Sans Pro"/>
+                <a:sym typeface="Source Sans Pro"/>
+              </a:rPr>
+              <a:t>R and Python package repository management</a:t>
+            </a:r>
+          </a:p>
+        </p:txBody>
+      </p:sp>
+      <p:sp>
+        <p:nvSpPr>
+          <p:cNvPr id="119" name="TextBox 118">
+            <a:extLst>
+              <a:ext uri="{FF2B5EF4-FFF2-40B4-BE49-F238E27FC236}">
+                <a16:creationId xmlns:a16="http://schemas.microsoft.com/office/drawing/2014/main" id="{E514EF5E-AECC-CB3C-CB13-1805607B5C49}"/>
+              </a:ext>
+            </a:extLst>
+          </p:cNvPr>
+          <p:cNvSpPr txBox="1"/>
+          <p:nvPr/>
+        </p:nvSpPr>
+        <p:spPr>
+          <a:xfrm>
+            <a:off x="445514" y="1019862"/>
+            <a:ext cx="1403830" cy="505186"/>
+          </a:xfrm>
+          <a:prstGeom prst="rect">
+            <a:avLst/>
+          </a:prstGeom>
+          <a:solidFill>
+            <a:srgbClr val="FFFFFF"/>
+          </a:solidFill>
+          <a:ln w="12700" cap="flat">
             <a:noFill/>
-            <a:ln w="12700" cap="flat">
-              <a:noFill/>
-              <a:miter lim="400000"/>
-            </a:ln>
-            <a:effectLst/>
-            <a:sp3d/>
-          </p:spPr>
-          <p:style>
-            <a:lnRef idx="0">
-              <a:scrgbClr r="0" g="0" b="0"/>
-            </a:lnRef>
-            <a:fillRef idx="0">
-              <a:scrgbClr r="0" g="0" b="0"/>
-            </a:fillRef>
-            <a:effectRef idx="0">
-              <a:scrgbClr r="0" g="0" b="0"/>
-            </a:effectRef>
-            <a:fontRef idx="none"/>
-          </p:style>
-          <p:txBody>
-            <a:bodyPr rot="0" spcFirstLastPara="1" vertOverflow="overflow" horzOverflow="overflow" vert="horz" wrap="square" lIns="54570" tIns="54570" rIns="54570" bIns="54570" numCol="1" spcCol="38100" rtlCol="0" anchor="ctr">
-              <a:spAutoFit/>
-            </a:bodyPr>
-            <a:lstStyle/>
-            <a:p>
-              <a:pPr marL="0" marR="0" indent="0" defTabSz="584200" rtl="0" fontAlgn="auto" latinLnBrk="0" hangingPunct="0">
-                <a:lnSpc>
-                  <a:spcPct val="100000"/>
-                </a:lnSpc>
-                <a:spcBef>
-                  <a:spcPts val="200"/>
-                </a:spcBef>
-                <a:spcAft>
-                  <a:spcPts val="0"/>
-                </a:spcAft>
-                <a:buClrTx/>
-                <a:buSzTx/>
-                <a:buFontTx/>
-                <a:buNone/>
-                <a:tabLst/>
-              </a:pPr>
-              <a:r>
-                <a:rPr kumimoji="0" lang="en-US" sz="1200" b="0" i="0" u="none" strike="noStrike" cap="none" spc="0" normalizeH="0" baseline="0" dirty="0">
-                  <a:ln>
-                    <a:noFill/>
-                  </a:ln>
-                  <a:solidFill>
-                    <a:srgbClr val="4C4C4C"/>
-                  </a:solidFill>
-                  <a:effectLst/>
-                  <a:uFillTx/>
-                  <a:latin typeface="Source Sans Pro"/>
-                  <a:ea typeface="Source Sans Pro"/>
-                  <a:cs typeface="Source Sans Pro"/>
-                  <a:sym typeface="Source Sans Pro"/>
-                </a:rPr>
-                <a:t>R and Python package repository management</a:t>
-              </a:r>
-            </a:p>
-          </p:txBody>
-        </p:sp>
-        <p:pic>
-          <p:nvPicPr>
-            <p:cNvPr id="10" name="Graphic 9" descr="Posit Workbench">
-              <a:extLst>
-                <a:ext uri="{FF2B5EF4-FFF2-40B4-BE49-F238E27FC236}">
-                  <a16:creationId xmlns:a16="http://schemas.microsoft.com/office/drawing/2014/main" id="{5F99DD2C-7154-A895-9A90-4F3BF2024CBE}"/>
-                </a:ext>
-              </a:extLst>
-            </p:cNvPr>
-            <p:cNvPicPr>
-              <a:picLocks noChangeAspect="1"/>
-            </p:cNvPicPr>
-            <p:nvPr/>
-          </p:nvPicPr>
-          <p:blipFill>
-            <a:blip>
-              <a:extLst>
-                <a:ext uri="{96DAC541-7B7A-43D3-8B79-37D633B846F1}">
-                  <asvg:svgBlip xmlns:asvg="http://schemas.microsoft.com/office/drawing/2016/SVG/main" r:embed="rId22"/>
-                </a:ext>
-              </a:extLst>
-            </a:blip>
-            <a:stretch>
-              <a:fillRect/>
-            </a:stretch>
-          </p:blipFill>
-          <p:spPr>
-            <a:xfrm>
-              <a:off x="357585" y="1801489"/>
-              <a:ext cx="365760" cy="365760"/>
-            </a:xfrm>
-            <a:prstGeom prst="rect">
-              <a:avLst/>
-            </a:prstGeom>
-          </p:spPr>
-        </p:pic>
-        <p:pic>
-          <p:nvPicPr>
-            <p:cNvPr id="11" name="Graphic 10" descr="Posit Connect documentation">
-              <a:extLst>
-                <a:ext uri="{FF2B5EF4-FFF2-40B4-BE49-F238E27FC236}">
-                  <a16:creationId xmlns:a16="http://schemas.microsoft.com/office/drawing/2014/main" id="{9B232322-8C72-C95C-6C6F-494909EEBAC4}"/>
-                </a:ext>
-              </a:extLst>
-            </p:cNvPr>
-            <p:cNvPicPr>
-              <a:picLocks noChangeAspect="1"/>
-            </p:cNvPicPr>
-            <p:nvPr/>
-          </p:nvPicPr>
-          <p:blipFill>
-            <a:blip>
-              <a:extLst>
-                <a:ext uri="{96DAC541-7B7A-43D3-8B79-37D633B846F1}">
-                  <asvg:svgBlip xmlns:asvg="http://schemas.microsoft.com/office/drawing/2016/SVG/main" r:embed="rId23"/>
-                </a:ext>
-              </a:extLst>
-            </a:blip>
-            <a:stretch>
-              <a:fillRect/>
-            </a:stretch>
-          </p:blipFill>
-          <p:spPr>
-            <a:xfrm>
-              <a:off x="357585" y="2444772"/>
-              <a:ext cx="372176" cy="365760"/>
-            </a:xfrm>
-            <a:prstGeom prst="rect">
-              <a:avLst/>
-            </a:prstGeom>
-          </p:spPr>
-        </p:pic>
-        <p:pic>
-          <p:nvPicPr>
-            <p:cNvPr id="12" name="Graphic 11">
-              <a:extLst>
-                <a:ext uri="{FF2B5EF4-FFF2-40B4-BE49-F238E27FC236}">
-                  <a16:creationId xmlns:a16="http://schemas.microsoft.com/office/drawing/2014/main" id="{292F641C-B8DC-B029-9369-BB3EE9D76103}"/>
-                </a:ext>
-              </a:extLst>
-            </p:cNvPr>
-            <p:cNvPicPr>
-              <a:picLocks noChangeAspect="1"/>
-            </p:cNvPicPr>
-            <p:nvPr/>
-          </p:nvPicPr>
-          <p:blipFill>
-            <a:blip>
-              <a:extLst>
-                <a:ext uri="{96DAC541-7B7A-43D3-8B79-37D633B846F1}">
-                  <asvg:svgBlip xmlns:asvg="http://schemas.microsoft.com/office/drawing/2016/SVG/main" r:embed="rId24"/>
-                </a:ext>
-              </a:extLst>
-            </a:blip>
-            <a:srcRect r="82582" b="-1026"/>
-            <a:stretch>
-              <a:fillRect/>
-            </a:stretch>
-          </p:blipFill>
-          <p:spPr>
-            <a:xfrm>
-              <a:off x="357585" y="3137334"/>
-              <a:ext cx="367844" cy="365760"/>
-            </a:xfrm>
-            <a:prstGeom prst="rect">
-              <a:avLst/>
-            </a:prstGeom>
-          </p:spPr>
-        </p:pic>
-        <p:sp>
-          <p:nvSpPr>
-            <p:cNvPr id="119" name="TextBox 118">
-              <a:extLst>
-                <a:ext uri="{FF2B5EF4-FFF2-40B4-BE49-F238E27FC236}">
-                  <a16:creationId xmlns:a16="http://schemas.microsoft.com/office/drawing/2014/main" id="{E514EF5E-AECC-CB3C-CB13-1805607B5C49}"/>
-                </a:ext>
-              </a:extLst>
-            </p:cNvPr>
-            <p:cNvSpPr txBox="1"/>
-            <p:nvPr/>
-          </p:nvSpPr>
-          <p:spPr>
-            <a:xfrm>
-              <a:off x="445514" y="1099632"/>
-              <a:ext cx="1403830" cy="505186"/>
-            </a:xfrm>
-            <a:prstGeom prst="rect">
-              <a:avLst/>
-            </a:prstGeom>
-            <a:solidFill>
-              <a:srgbClr val="FFFFFF"/>
-            </a:solidFill>
-            <a:ln w="12700" cap="flat">
-              <a:noFill/>
-              <a:miter lim="400000"/>
-            </a:ln>
-            <a:effectLst/>
-            <a:sp3d/>
-          </p:spPr>
-          <p:style>
-            <a:lnRef idx="0">
-              <a:scrgbClr r="0" g="0" b="0"/>
-            </a:lnRef>
-            <a:fillRef idx="0">
-              <a:scrgbClr r="0" g="0" b="0"/>
-            </a:fillRef>
-            <a:effectRef idx="0">
-              <a:scrgbClr r="0" g="0" b="0"/>
-            </a:effectRef>
-            <a:fontRef idx="none"/>
-          </p:style>
-          <p:txBody>
-            <a:bodyPr rot="0" spcFirstLastPara="1" vertOverflow="overflow" horzOverflow="overflow" vert="horz" wrap="none" lIns="54570" tIns="54570" rIns="54570" bIns="54570" numCol="1" spcCol="38100" rtlCol="0" anchor="ctr">
-              <a:spAutoFit/>
-            </a:bodyPr>
-            <a:lstStyle/>
-            <a:p>
-              <a:pPr marL="0" marR="0" indent="0" algn="l" defTabSz="584200" rtl="0" fontAlgn="auto" latinLnBrk="0" hangingPunct="0">
-                <a:lnSpc>
-                  <a:spcPct val="100000"/>
-                </a:lnSpc>
-                <a:spcBef>
-                  <a:spcPts val="200"/>
-                </a:spcBef>
-                <a:spcAft>
-                  <a:spcPts val="0"/>
-                </a:spcAft>
-                <a:buClrTx/>
-                <a:buSzTx/>
-                <a:buFontTx/>
-                <a:buNone/>
-                <a:tabLst/>
-              </a:pPr>
-              <a:r>
-                <a:rPr kumimoji="0" lang="en-US" sz="2400" b="1" i="0" u="none" strike="noStrike" cap="none" spc="0" normalizeH="0" baseline="0" dirty="0">
-                  <a:ln>
-                    <a:noFill/>
-                  </a:ln>
-                  <a:solidFill>
-                    <a:srgbClr val="404041"/>
-                  </a:solidFill>
-                  <a:effectLst/>
-                  <a:uFillTx/>
-                  <a:latin typeface="Source Sans Pro"/>
-                  <a:ea typeface="Source Sans Pro"/>
-                  <a:cs typeface="Source Sans Pro"/>
-                  <a:sym typeface="Source Sans Pro"/>
-                </a:rPr>
-                <a:t>Overview</a:t>
-              </a:r>
-            </a:p>
-          </p:txBody>
-        </p:sp>
-      </p:grpSp>
+            <a:miter lim="400000"/>
+          </a:ln>
+          <a:effectLst/>
+          <a:sp3d/>
+        </p:spPr>
+        <p:style>
+          <a:lnRef idx="0">
+            <a:scrgbClr r="0" g="0" b="0"/>
+          </a:lnRef>
+          <a:fillRef idx="0">
+            <a:scrgbClr r="0" g="0" b="0"/>
+          </a:fillRef>
+          <a:effectRef idx="0">
+            <a:scrgbClr r="0" g="0" b="0"/>
+          </a:effectRef>
+          <a:fontRef idx="none"/>
+        </p:style>
+        <p:txBody>
+          <a:bodyPr rot="0" spcFirstLastPara="1" vertOverflow="overflow" horzOverflow="overflow" vert="horz" wrap="none" lIns="54570" tIns="54570" rIns="54570" bIns="54570" numCol="1" spcCol="38100" rtlCol="0" anchor="ctr">
+            <a:spAutoFit/>
+          </a:bodyPr>
+          <a:lstStyle/>
+          <a:p>
+            <a:pPr marL="0" marR="0" indent="0" algn="l" defTabSz="584200" rtl="0" fontAlgn="auto" latinLnBrk="0" hangingPunct="0">
+              <a:lnSpc>
+                <a:spcPct val="100000"/>
+              </a:lnSpc>
+              <a:spcBef>
+                <a:spcPts val="200"/>
+              </a:spcBef>
+              <a:spcAft>
+                <a:spcPts val="0"/>
+              </a:spcAft>
+              <a:buClrTx/>
+              <a:buSzTx/>
+              <a:buFontTx/>
+              <a:buNone/>
+              <a:tabLst/>
+            </a:pPr>
+            <a:r>
+              <a:rPr kumimoji="0" lang="en-US" sz="2400" b="1" i="0" u="none" strike="noStrike" cap="none" spc="0" normalizeH="0" baseline="0" dirty="0">
+                <a:ln>
+                  <a:noFill/>
+                </a:ln>
+                <a:solidFill>
+                  <a:srgbClr val="404041"/>
+                </a:solidFill>
+                <a:effectLst/>
+                <a:uFillTx/>
+                <a:latin typeface="Source Sans Pro"/>
+                <a:ea typeface="Source Sans Pro"/>
+                <a:cs typeface="Source Sans Pro"/>
+                <a:sym typeface="Source Sans Pro"/>
+              </a:rPr>
+              <a:t>Overview</a:t>
+            </a:r>
+          </a:p>
+        </p:txBody>
+      </p:sp>
       <p:pic>
         <p:nvPicPr>
           <p:cNvPr id="49" name="Picture 48" descr="A black and white logo&#10;&#10;Description automatically generated">
@@ -12130,7 +11890,7 @@
           <p:nvPr/>
         </p:nvPicPr>
         <p:blipFill>
-          <a:blip r:embed="rId25">
+          <a:blip r:embed="rId19">
             <a:extLst>
               <a:ext uri="{28A0092B-C50C-407E-A947-70E740481C1C}">
                 <a14:useLocalDpi xmlns:a14="http://schemas.microsoft.com/office/drawing/2010/main" val="0"/>
@@ -12145,6 +11905,108 @@
           <a:xfrm>
             <a:off x="198752" y="184124"/>
             <a:ext cx="6434661" cy="967701"/>
+          </a:xfrm>
+          <a:prstGeom prst="rect">
+            <a:avLst/>
+          </a:prstGeom>
+        </p:spPr>
+      </p:pic>
+      <p:pic>
+        <p:nvPicPr>
+          <p:cNvPr id="6" name="Picture 5">
+            <a:extLst>
+              <a:ext uri="{FF2B5EF4-FFF2-40B4-BE49-F238E27FC236}">
+                <a16:creationId xmlns:a16="http://schemas.microsoft.com/office/drawing/2014/main" id="{58814863-6270-D313-B6E4-198F173D13D5}"/>
+              </a:ext>
+            </a:extLst>
+          </p:cNvPr>
+          <p:cNvPicPr>
+            <a:picLocks noChangeAspect="1"/>
+          </p:cNvPicPr>
+          <p:nvPr/>
+        </p:nvPicPr>
+        <p:blipFill>
+          <a:blip r:embed="rId20"/>
+          <a:stretch>
+            <a:fillRect/>
+          </a:stretch>
+        </p:blipFill>
+        <p:spPr>
+          <a:xfrm>
+            <a:off x="10959852" y="8374207"/>
+            <a:ext cx="2154653" cy="1668902"/>
+          </a:xfrm>
+          <a:prstGeom prst="rect">
+            <a:avLst/>
+          </a:prstGeom>
+        </p:spPr>
+      </p:pic>
+      <p:pic>
+        <p:nvPicPr>
+          <p:cNvPr id="7" name="Picture 6">
+            <a:extLst>
+              <a:ext uri="{FF2B5EF4-FFF2-40B4-BE49-F238E27FC236}">
+                <a16:creationId xmlns:a16="http://schemas.microsoft.com/office/drawing/2014/main" id="{197051C9-B537-883A-23D5-0EDD02984768}"/>
+              </a:ext>
+            </a:extLst>
+          </p:cNvPr>
+          <p:cNvPicPr>
+            <a:picLocks noChangeAspect="1"/>
+          </p:cNvPicPr>
+          <p:nvPr/>
+        </p:nvPicPr>
+        <p:blipFill>
+          <a:blip r:embed="rId21">
+            <a:extLst>
+              <a:ext uri="{28A0092B-C50C-407E-A947-70E740481C1C}">
+                <a14:useLocalDpi xmlns:a14="http://schemas.microsoft.com/office/drawing/2010/main" val="0"/>
+              </a:ext>
+            </a:extLst>
+          </a:blip>
+          <a:stretch>
+            <a:fillRect/>
+          </a:stretch>
+        </p:blipFill>
+        <p:spPr>
+          <a:xfrm>
+            <a:off x="383939" y="2392376"/>
+            <a:ext cx="2202686" cy="614703"/>
+          </a:xfrm>
+          <a:prstGeom prst="rect">
+            <a:avLst/>
+          </a:prstGeom>
+        </p:spPr>
+      </p:pic>
+      <p:pic>
+        <p:nvPicPr>
+          <p:cNvPr id="17" name="Picture 16">
+            <a:extLst>
+              <a:ext uri="{FF2B5EF4-FFF2-40B4-BE49-F238E27FC236}">
+                <a16:creationId xmlns:a16="http://schemas.microsoft.com/office/drawing/2014/main" id="{26AB2B53-C5DD-8AB6-13FB-EFEAD44CF11B}"/>
+              </a:ext>
+            </a:extLst>
+          </p:cNvPr>
+          <p:cNvPicPr>
+            <a:picLocks noChangeAspect="1"/>
+          </p:cNvPicPr>
+          <p:nvPr/>
+        </p:nvPicPr>
+        <p:blipFill>
+          <a:blip r:embed="rId22">
+            <a:extLst>
+              <a:ext uri="{28A0092B-C50C-407E-A947-70E740481C1C}">
+                <a14:useLocalDpi xmlns:a14="http://schemas.microsoft.com/office/drawing/2010/main" val="0"/>
+              </a:ext>
+            </a:extLst>
+          </a:blip>
+          <a:stretch>
+            <a:fillRect/>
+          </a:stretch>
+        </p:blipFill>
+        <p:spPr>
+          <a:xfrm>
+            <a:off x="377061" y="1699501"/>
+            <a:ext cx="2709427" cy="620141"/>
           </a:xfrm>
           <a:prstGeom prst="rect">
             <a:avLst/>
@@ -12182,6 +12044,66 @@
           <a:chExt cx="0" cy="0"/>
         </a:xfrm>
       </p:grpSpPr>
+      <p:pic>
+        <p:nvPicPr>
+          <p:cNvPr id="3197" name="Picture 3196">
+            <a:extLst>
+              <a:ext uri="{FF2B5EF4-FFF2-40B4-BE49-F238E27FC236}">
+                <a16:creationId xmlns:a16="http://schemas.microsoft.com/office/drawing/2014/main" id="{49E2AB41-080C-6415-55C5-A81295DD8590}"/>
+              </a:ext>
+            </a:extLst>
+          </p:cNvPr>
+          <p:cNvPicPr>
+            <a:picLocks noChangeAspect="1"/>
+          </p:cNvPicPr>
+          <p:nvPr/>
+        </p:nvPicPr>
+        <p:blipFill>
+          <a:blip r:embed="rId2"/>
+          <a:stretch>
+            <a:fillRect/>
+          </a:stretch>
+        </p:blipFill>
+        <p:spPr>
+          <a:xfrm>
+            <a:off x="11829982" y="3637960"/>
+            <a:ext cx="1780781" cy="916286"/>
+          </a:xfrm>
+          <a:prstGeom prst="rect">
+            <a:avLst/>
+          </a:prstGeom>
+        </p:spPr>
+      </p:pic>
+      <p:pic>
+        <p:nvPicPr>
+          <p:cNvPr id="3194" name="Picture 3193">
+            <a:extLst>
+              <a:ext uri="{FF2B5EF4-FFF2-40B4-BE49-F238E27FC236}">
+                <a16:creationId xmlns:a16="http://schemas.microsoft.com/office/drawing/2014/main" id="{61212E88-4FEB-3FB3-43E6-94BF13AA16B5}"/>
+              </a:ext>
+            </a:extLst>
+          </p:cNvPr>
+          <p:cNvPicPr>
+            <a:picLocks noChangeAspect="1"/>
+          </p:cNvPicPr>
+          <p:nvPr/>
+        </p:nvPicPr>
+        <p:blipFill>
+          <a:blip r:embed="rId3"/>
+          <a:stretch>
+            <a:fillRect/>
+          </a:stretch>
+        </p:blipFill>
+        <p:spPr>
+          <a:xfrm>
+            <a:off x="10517849" y="1593547"/>
+            <a:ext cx="1664967" cy="1871703"/>
+          </a:xfrm>
+          <a:prstGeom prst="rect">
+            <a:avLst/>
+          </a:prstGeom>
+        </p:spPr>
+      </p:pic>
       <p:sp>
         <p:nvSpPr>
           <p:cNvPr id="3122" name="Rounded Rectangle 3121">
@@ -12283,7 +12205,7 @@
         <p:spPr>
           <a:xfrm>
             <a:off x="4754722" y="856247"/>
-            <a:ext cx="1592812" cy="474436"/>
+            <a:ext cx="797983" cy="474436"/>
           </a:xfrm>
           <a:prstGeom prst="rect">
             <a:avLst/>
@@ -12794,7 +12716,7 @@
           <p:nvPr/>
         </p:nvPicPr>
         <p:blipFill>
-          <a:blip r:embed="rId2">
+          <a:blip r:embed="rId4">
             <a:extLst>
               <a:ext uri="{28A0092B-C50C-407E-A947-70E740481C1C}">
                 <a14:useLocalDpi xmlns:a14="http://schemas.microsoft.com/office/drawing/2010/main" val="0"/>
@@ -12832,100 +12754,6 @@
             <a:extLst>
               <a:ext uri="{FF2B5EF4-FFF2-40B4-BE49-F238E27FC236}">
                 <a16:creationId xmlns:a16="http://schemas.microsoft.com/office/drawing/2014/main" id="{0B9BBF94-943C-F7F3-9309-F47E40DD5CA9}"/>
-              </a:ext>
-            </a:extLst>
-          </p:cNvPr>
-          <p:cNvPicPr>
-            <a:picLocks noChangeAspect="1" noChangeArrowheads="1"/>
-          </p:cNvPicPr>
-          <p:nvPr/>
-        </p:nvPicPr>
-        <p:blipFill>
-          <a:blip r:embed="rId3">
-            <a:extLst>
-              <a:ext uri="{28A0092B-C50C-407E-A947-70E740481C1C}">
-                <a14:useLocalDpi xmlns:a14="http://schemas.microsoft.com/office/drawing/2010/main" val="0"/>
-              </a:ext>
-            </a:extLst>
-          </a:blip>
-          <a:srcRect/>
-          <a:stretch>
-            <a:fillRect/>
-          </a:stretch>
-        </p:blipFill>
-        <p:spPr bwMode="auto">
-          <a:xfrm>
-            <a:off x="3419360" y="2921073"/>
-            <a:ext cx="535914" cy="621138"/>
-          </a:xfrm>
-          <a:prstGeom prst="rect">
-            <a:avLst/>
-          </a:prstGeom>
-          <a:noFill/>
-          <a:extLst>
-            <a:ext uri="{909E8E84-426E-40DD-AFC4-6F175D3DCCD1}">
-              <a14:hiddenFill xmlns:a14="http://schemas.microsoft.com/office/drawing/2010/main">
-                <a:solidFill>
-                  <a:srgbClr val="FFFFFF"/>
-                </a:solidFill>
-              </a14:hiddenFill>
-            </a:ext>
-          </a:extLst>
-        </p:spPr>
-      </p:pic>
-      <p:pic>
-        <p:nvPicPr>
-          <p:cNvPr id="3080" name="Picture 8">
-            <a:extLst>
-              <a:ext uri="{FF2B5EF4-FFF2-40B4-BE49-F238E27FC236}">
-                <a16:creationId xmlns:a16="http://schemas.microsoft.com/office/drawing/2014/main" id="{392DBA8D-F241-C72B-E811-332884F2ECE5}"/>
-              </a:ext>
-            </a:extLst>
-          </p:cNvPr>
-          <p:cNvPicPr>
-            <a:picLocks noChangeAspect="1" noChangeArrowheads="1"/>
-          </p:cNvPicPr>
-          <p:nvPr/>
-        </p:nvPicPr>
-        <p:blipFill>
-          <a:blip r:embed="rId4">
-            <a:extLst>
-              <a:ext uri="{28A0092B-C50C-407E-A947-70E740481C1C}">
-                <a14:useLocalDpi xmlns:a14="http://schemas.microsoft.com/office/drawing/2010/main" val="0"/>
-              </a:ext>
-            </a:extLst>
-          </a:blip>
-          <a:srcRect/>
-          <a:stretch>
-            <a:fillRect/>
-          </a:stretch>
-        </p:blipFill>
-        <p:spPr bwMode="auto">
-          <a:xfrm>
-            <a:off x="1037298" y="1818862"/>
-            <a:ext cx="443468" cy="514423"/>
-          </a:xfrm>
-          <a:prstGeom prst="rect">
-            <a:avLst/>
-          </a:prstGeom>
-          <a:noFill/>
-          <a:extLst>
-            <a:ext uri="{909E8E84-426E-40DD-AFC4-6F175D3DCCD1}">
-              <a14:hiddenFill xmlns:a14="http://schemas.microsoft.com/office/drawing/2010/main">
-                <a:solidFill>
-                  <a:srgbClr val="FFFFFF"/>
-                </a:solidFill>
-              </a14:hiddenFill>
-            </a:ext>
-          </a:extLst>
-        </p:spPr>
-      </p:pic>
-      <p:pic>
-        <p:nvPicPr>
-          <p:cNvPr id="3081" name="Picture 9">
-            <a:extLst>
-              <a:ext uri="{FF2B5EF4-FFF2-40B4-BE49-F238E27FC236}">
-                <a16:creationId xmlns:a16="http://schemas.microsoft.com/office/drawing/2014/main" id="{B0745CFE-6074-5EBB-4FD4-2AFA79EEE2ED}"/>
               </a:ext>
             </a:extLst>
           </p:cNvPr>
@@ -12949,8 +12777,8 @@
         </p:blipFill>
         <p:spPr bwMode="auto">
           <a:xfrm>
-            <a:off x="1927971" y="2783768"/>
-            <a:ext cx="1123510" cy="405255"/>
+            <a:off x="3419360" y="3009093"/>
+            <a:ext cx="535914" cy="621138"/>
           </a:xfrm>
           <a:prstGeom prst="rect">
             <a:avLst/>
@@ -12969,10 +12797,10 @@
       </p:pic>
       <p:pic>
         <p:nvPicPr>
-          <p:cNvPr id="3083" name="Picture 11">
+          <p:cNvPr id="3080" name="Picture 8">
             <a:extLst>
               <a:ext uri="{FF2B5EF4-FFF2-40B4-BE49-F238E27FC236}">
-                <a16:creationId xmlns:a16="http://schemas.microsoft.com/office/drawing/2014/main" id="{B5EB01F2-07C6-9FEE-B249-49AD3A8B70C2}"/>
+                <a16:creationId xmlns:a16="http://schemas.microsoft.com/office/drawing/2014/main" id="{392DBA8D-F241-C72B-E811-332884F2ECE5}"/>
               </a:ext>
             </a:extLst>
           </p:cNvPr>
@@ -12996,8 +12824,8 @@
         </p:blipFill>
         <p:spPr bwMode="auto">
           <a:xfrm>
-            <a:off x="563367" y="2883682"/>
-            <a:ext cx="429370" cy="495783"/>
+            <a:off x="1037298" y="1818862"/>
+            <a:ext cx="443468" cy="514423"/>
           </a:xfrm>
           <a:prstGeom prst="rect">
             <a:avLst/>
@@ -13016,10 +12844,10 @@
       </p:pic>
       <p:pic>
         <p:nvPicPr>
-          <p:cNvPr id="3084" name="Picture 12">
+          <p:cNvPr id="3081" name="Picture 9">
             <a:extLst>
               <a:ext uri="{FF2B5EF4-FFF2-40B4-BE49-F238E27FC236}">
-                <a16:creationId xmlns:a16="http://schemas.microsoft.com/office/drawing/2014/main" id="{EA1C3289-CD6F-73B6-9147-F89F1BE169F1}"/>
+                <a16:creationId xmlns:a16="http://schemas.microsoft.com/office/drawing/2014/main" id="{B0745CFE-6074-5EBB-4FD4-2AFA79EEE2ED}"/>
               </a:ext>
             </a:extLst>
           </p:cNvPr>
@@ -13043,8 +12871,8 @@
         </p:blipFill>
         <p:spPr bwMode="auto">
           <a:xfrm>
-            <a:off x="2032285" y="3115666"/>
-            <a:ext cx="837681" cy="430702"/>
+            <a:off x="1927971" y="2783768"/>
+            <a:ext cx="1123510" cy="405255"/>
           </a:xfrm>
           <a:prstGeom prst="rect">
             <a:avLst/>
@@ -13063,10 +12891,10 @@
       </p:pic>
       <p:pic>
         <p:nvPicPr>
-          <p:cNvPr id="3085" name="Picture 13">
+          <p:cNvPr id="3083" name="Picture 11">
             <a:extLst>
               <a:ext uri="{FF2B5EF4-FFF2-40B4-BE49-F238E27FC236}">
-                <a16:creationId xmlns:a16="http://schemas.microsoft.com/office/drawing/2014/main" id="{0D42BF47-46C7-3FD8-4E23-2B5E1C11FD9C}"/>
+                <a16:creationId xmlns:a16="http://schemas.microsoft.com/office/drawing/2014/main" id="{B5EB01F2-07C6-9FEE-B249-49AD3A8B70C2}"/>
               </a:ext>
             </a:extLst>
           </p:cNvPr>
@@ -13090,8 +12918,8 @@
         </p:blipFill>
         <p:spPr bwMode="auto">
           <a:xfrm>
-            <a:off x="2804144" y="1450338"/>
-            <a:ext cx="1216586" cy="205486"/>
+            <a:off x="563367" y="2883682"/>
+            <a:ext cx="429370" cy="495783"/>
           </a:xfrm>
           <a:prstGeom prst="rect">
             <a:avLst/>
@@ -13110,10 +12938,10 @@
       </p:pic>
       <p:pic>
         <p:nvPicPr>
-          <p:cNvPr id="3086" name="Picture 14">
+          <p:cNvPr id="3084" name="Picture 12">
             <a:extLst>
               <a:ext uri="{FF2B5EF4-FFF2-40B4-BE49-F238E27FC236}">
-                <a16:creationId xmlns:a16="http://schemas.microsoft.com/office/drawing/2014/main" id="{F587653A-60D5-8187-CB4B-8FC2BE98CB5B}"/>
+                <a16:creationId xmlns:a16="http://schemas.microsoft.com/office/drawing/2014/main" id="{EA1C3289-CD6F-73B6-9147-F89F1BE169F1}"/>
               </a:ext>
             </a:extLst>
           </p:cNvPr>
@@ -13137,8 +12965,8 @@
         </p:blipFill>
         <p:spPr bwMode="auto">
           <a:xfrm>
-            <a:off x="2107848" y="1951125"/>
-            <a:ext cx="665260" cy="189623"/>
+            <a:off x="2032285" y="3115666"/>
+            <a:ext cx="837681" cy="430702"/>
           </a:xfrm>
           <a:prstGeom prst="rect">
             <a:avLst/>
@@ -13157,10 +12985,10 @@
       </p:pic>
       <p:pic>
         <p:nvPicPr>
-          <p:cNvPr id="3087" name="Picture 15">
+          <p:cNvPr id="3085" name="Picture 13">
             <a:extLst>
               <a:ext uri="{FF2B5EF4-FFF2-40B4-BE49-F238E27FC236}">
-                <a16:creationId xmlns:a16="http://schemas.microsoft.com/office/drawing/2014/main" id="{2CCEAE55-7310-9654-31B1-BE969058EC4F}"/>
+                <a16:creationId xmlns:a16="http://schemas.microsoft.com/office/drawing/2014/main" id="{0D42BF47-46C7-3FD8-4E23-2B5E1C11FD9C}"/>
               </a:ext>
             </a:extLst>
           </p:cNvPr>
@@ -13184,8 +13012,8 @@
         </p:blipFill>
         <p:spPr bwMode="auto">
           <a:xfrm>
-            <a:off x="2964474" y="1854531"/>
-            <a:ext cx="944503" cy="361431"/>
+            <a:off x="2790016" y="1343289"/>
+            <a:ext cx="1216586" cy="205486"/>
           </a:xfrm>
           <a:prstGeom prst="rect">
             <a:avLst/>
@@ -13204,10 +13032,10 @@
       </p:pic>
       <p:pic>
         <p:nvPicPr>
-          <p:cNvPr id="3088" name="Picture 16">
+          <p:cNvPr id="3086" name="Picture 14">
             <a:extLst>
               <a:ext uri="{FF2B5EF4-FFF2-40B4-BE49-F238E27FC236}">
-                <a16:creationId xmlns:a16="http://schemas.microsoft.com/office/drawing/2014/main" id="{A56F62C5-78CF-6032-3132-8FFD041E9800}"/>
+                <a16:creationId xmlns:a16="http://schemas.microsoft.com/office/drawing/2014/main" id="{F587653A-60D5-8187-CB4B-8FC2BE98CB5B}"/>
               </a:ext>
             </a:extLst>
           </p:cNvPr>
@@ -13218,6 +13046,100 @@
         </p:nvPicPr>
         <p:blipFill>
           <a:blip r:embed="rId11">
+            <a:extLst>
+              <a:ext uri="{28A0092B-C50C-407E-A947-70E740481C1C}">
+                <a14:useLocalDpi xmlns:a14="http://schemas.microsoft.com/office/drawing/2010/main" val="0"/>
+              </a:ext>
+            </a:extLst>
+          </a:blip>
+          <a:srcRect/>
+          <a:stretch>
+            <a:fillRect/>
+          </a:stretch>
+        </p:blipFill>
+        <p:spPr bwMode="auto">
+          <a:xfrm>
+            <a:off x="2107848" y="1951125"/>
+            <a:ext cx="665260" cy="189623"/>
+          </a:xfrm>
+          <a:prstGeom prst="rect">
+            <a:avLst/>
+          </a:prstGeom>
+          <a:noFill/>
+          <a:extLst>
+            <a:ext uri="{909E8E84-426E-40DD-AFC4-6F175D3DCCD1}">
+              <a14:hiddenFill xmlns:a14="http://schemas.microsoft.com/office/drawing/2010/main">
+                <a:solidFill>
+                  <a:srgbClr val="FFFFFF"/>
+                </a:solidFill>
+              </a14:hiddenFill>
+            </a:ext>
+          </a:extLst>
+        </p:spPr>
+      </p:pic>
+      <p:pic>
+        <p:nvPicPr>
+          <p:cNvPr id="3087" name="Picture 15">
+            <a:extLst>
+              <a:ext uri="{FF2B5EF4-FFF2-40B4-BE49-F238E27FC236}">
+                <a16:creationId xmlns:a16="http://schemas.microsoft.com/office/drawing/2014/main" id="{2CCEAE55-7310-9654-31B1-BE969058EC4F}"/>
+              </a:ext>
+            </a:extLst>
+          </p:cNvPr>
+          <p:cNvPicPr>
+            <a:picLocks noChangeAspect="1" noChangeArrowheads="1"/>
+          </p:cNvPicPr>
+          <p:nvPr/>
+        </p:nvPicPr>
+        <p:blipFill>
+          <a:blip r:embed="rId12">
+            <a:extLst>
+              <a:ext uri="{28A0092B-C50C-407E-A947-70E740481C1C}">
+                <a14:useLocalDpi xmlns:a14="http://schemas.microsoft.com/office/drawing/2010/main" val="0"/>
+              </a:ext>
+            </a:extLst>
+          </a:blip>
+          <a:srcRect/>
+          <a:stretch>
+            <a:fillRect/>
+          </a:stretch>
+        </p:blipFill>
+        <p:spPr bwMode="auto">
+          <a:xfrm>
+            <a:off x="2926058" y="1630371"/>
+            <a:ext cx="944503" cy="361431"/>
+          </a:xfrm>
+          <a:prstGeom prst="rect">
+            <a:avLst/>
+          </a:prstGeom>
+          <a:noFill/>
+          <a:extLst>
+            <a:ext uri="{909E8E84-426E-40DD-AFC4-6F175D3DCCD1}">
+              <a14:hiddenFill xmlns:a14="http://schemas.microsoft.com/office/drawing/2010/main">
+                <a:solidFill>
+                  <a:srgbClr val="FFFFFF"/>
+                </a:solidFill>
+              </a14:hiddenFill>
+            </a:ext>
+          </a:extLst>
+        </p:spPr>
+      </p:pic>
+      <p:pic>
+        <p:nvPicPr>
+          <p:cNvPr id="3088" name="Picture 16">
+            <a:extLst>
+              <a:ext uri="{FF2B5EF4-FFF2-40B4-BE49-F238E27FC236}">
+                <a16:creationId xmlns:a16="http://schemas.microsoft.com/office/drawing/2014/main" id="{A56F62C5-78CF-6032-3132-8FFD041E9800}"/>
+              </a:ext>
+            </a:extLst>
+          </p:cNvPr>
+          <p:cNvPicPr>
+            <a:picLocks noChangeAspect="1" noChangeArrowheads="1"/>
+          </p:cNvPicPr>
+          <p:nvPr/>
+        </p:nvPicPr>
+        <p:blipFill>
+          <a:blip r:embed="rId13">
             <a:extLst>
               <a:ext uri="{28A0092B-C50C-407E-A947-70E740481C1C}">
                 <a14:useLocalDpi xmlns:a14="http://schemas.microsoft.com/office/drawing/2010/main" val="0"/>
@@ -13512,7 +13434,7 @@
           <p:nvPr/>
         </p:nvPicPr>
         <p:blipFill>
-          <a:blip r:embed="rId12">
+          <a:blip r:embed="rId14">
             <a:extLst>
               <a:ext uri="{28A0092B-C50C-407E-A947-70E740481C1C}">
                 <a14:useLocalDpi xmlns:a14="http://schemas.microsoft.com/office/drawing/2010/main" val="0"/>
@@ -13562,7 +13484,7 @@
           <a:blip>
             <a:extLst>
               <a:ext uri="{96DAC541-7B7A-43D3-8B79-37D633B846F1}">
-                <asvg:svgBlip xmlns:asvg="http://schemas.microsoft.com/office/drawing/2016/SVG/main" r:embed="rId13"/>
+                <asvg:svgBlip xmlns:asvg="http://schemas.microsoft.com/office/drawing/2016/SVG/main" r:embed="rId15"/>
               </a:ext>
             </a:extLst>
           </a:blip>
@@ -14095,7 +14017,7 @@
           <p:nvPr/>
         </p:nvPicPr>
         <p:blipFill>
-          <a:blip r:embed="rId14">
+          <a:blip r:embed="rId16">
             <a:extLst>
               <a:ext uri="{28A0092B-C50C-407E-A947-70E740481C1C}">
                 <a14:useLocalDpi xmlns:a14="http://schemas.microsoft.com/office/drawing/2010/main" val="0"/>
@@ -14375,80 +14297,12 @@
           </a:p>
         </p:txBody>
       </p:sp>
-      <p:sp>
-        <p:nvSpPr>
-          <p:cNvPr id="27" name="TextBox 26">
-            <a:extLst>
-              <a:ext uri="{FF2B5EF4-FFF2-40B4-BE49-F238E27FC236}">
-                <a16:creationId xmlns:a16="http://schemas.microsoft.com/office/drawing/2014/main" id="{BA7DEBF9-870A-48FF-07D0-B667794F77EE}"/>
-              </a:ext>
-            </a:extLst>
-          </p:cNvPr>
-          <p:cNvSpPr txBox="1"/>
-          <p:nvPr/>
-        </p:nvSpPr>
-        <p:spPr>
-          <a:xfrm>
-            <a:off x="301195" y="4140700"/>
-            <a:ext cx="2862200" cy="600164"/>
-          </a:xfrm>
-          <a:prstGeom prst="rect">
-            <a:avLst/>
-          </a:prstGeom>
-          <a:noFill/>
-          <a:ln w="12700" cap="flat">
-            <a:noFill/>
-            <a:miter lim="400000"/>
-          </a:ln>
-          <a:effectLst/>
-          <a:sp3d/>
-        </p:spPr>
-        <p:style>
-          <a:lnRef idx="0">
-            <a:scrgbClr r="0" g="0" b="0"/>
-          </a:lnRef>
-          <a:fillRef idx="0">
-            <a:scrgbClr r="0" g="0" b="0"/>
-          </a:fillRef>
-          <a:effectRef idx="0">
-            <a:scrgbClr r="0" g="0" b="0"/>
-          </a:effectRef>
-          <a:fontRef idx="none"/>
-        </p:style>
-        <p:txBody>
-          <a:bodyPr wrap="square">
-            <a:spAutoFit/>
-          </a:bodyPr>
-          <a:lstStyle/>
-          <a:p>
-            <a:r>
-              <a:rPr lang="en-US" sz="1100" b="0" dirty="0">
-                <a:solidFill>
-                  <a:srgbClr val="404041"/>
-                </a:solidFill>
-                <a:latin typeface="Open Sans Light" panose="020B0606030504020204" pitchFamily="34" charset="0"/>
-              </a:rPr>
-              <a:t>U</a:t>
-            </a:r>
-            <a:r>
-              <a:rPr lang="en-US" sz="1100" b="0" i="0" dirty="0">
-                <a:solidFill>
-                  <a:srgbClr val="404041"/>
-                </a:solidFill>
-                <a:effectLst/>
-                <a:latin typeface="Open Sans Light" panose="020B0606030504020204" pitchFamily="34" charset="0"/>
-              </a:rPr>
-              <a:t>sed from Tableau workbooks to make real-time requests from Tableau to your Python and R code.</a:t>
-            </a:r>
-          </a:p>
-        </p:txBody>
-      </p:sp>
       <p:pic>
         <p:nvPicPr>
-          <p:cNvPr id="3090" name="Picture 18" descr="FastAPI Tableau">
+          <p:cNvPr id="3092" name="Picture 20">
             <a:extLst>
               <a:ext uri="{FF2B5EF4-FFF2-40B4-BE49-F238E27FC236}">
-                <a16:creationId xmlns:a16="http://schemas.microsoft.com/office/drawing/2014/main" id="{203B47C5-0165-5974-2B18-A4C97CED0A14}"/>
+                <a16:creationId xmlns:a16="http://schemas.microsoft.com/office/drawing/2014/main" id="{3FC1D4DB-0D17-26F8-5420-D70D6E7FB984}"/>
               </a:ext>
             </a:extLst>
           </p:cNvPr>
@@ -14458,7 +14312,7 @@
           <p:nvPr/>
         </p:nvPicPr>
         <p:blipFill>
-          <a:blip r:embed="rId15">
+          <a:blip r:embed="rId17">
             <a:extLst>
               <a:ext uri="{28A0092B-C50C-407E-A947-70E740481C1C}">
                 <a14:useLocalDpi xmlns:a14="http://schemas.microsoft.com/office/drawing/2010/main" val="0"/>
@@ -14472,53 +14326,6 @@
         </p:blipFill>
         <p:spPr bwMode="auto">
           <a:xfrm>
-            <a:off x="2859050" y="1696023"/>
-            <a:ext cx="182876" cy="45719"/>
-          </a:xfrm>
-          <a:prstGeom prst="rect">
-            <a:avLst/>
-          </a:prstGeom>
-          <a:noFill/>
-          <a:extLst>
-            <a:ext uri="{909E8E84-426E-40DD-AFC4-6F175D3DCCD1}">
-              <a14:hiddenFill xmlns:a14="http://schemas.microsoft.com/office/drawing/2010/main">
-                <a:solidFill>
-                  <a:srgbClr val="FFFFFF"/>
-                </a:solidFill>
-              </a14:hiddenFill>
-            </a:ext>
-          </a:extLst>
-        </p:spPr>
-      </p:pic>
-      <p:pic>
-        <p:nvPicPr>
-          <p:cNvPr id="3092" name="Picture 20">
-            <a:extLst>
-              <a:ext uri="{FF2B5EF4-FFF2-40B4-BE49-F238E27FC236}">
-                <a16:creationId xmlns:a16="http://schemas.microsoft.com/office/drawing/2014/main" id="{3FC1D4DB-0D17-26F8-5420-D70D6E7FB984}"/>
-              </a:ext>
-            </a:extLst>
-          </p:cNvPr>
-          <p:cNvPicPr>
-            <a:picLocks noChangeAspect="1" noChangeArrowheads="1"/>
-          </p:cNvPicPr>
-          <p:nvPr/>
-        </p:nvPicPr>
-        <p:blipFill>
-          <a:blip r:embed="rId16">
-            <a:extLst>
-              <a:ext uri="{28A0092B-C50C-407E-A947-70E740481C1C}">
-                <a14:useLocalDpi xmlns:a14="http://schemas.microsoft.com/office/drawing/2010/main" val="0"/>
-              </a:ext>
-            </a:extLst>
-          </a:blip>
-          <a:srcRect/>
-          <a:stretch>
-            <a:fillRect/>
-          </a:stretch>
-        </p:blipFill>
-        <p:spPr bwMode="auto">
-          <a:xfrm>
             <a:off x="1070974" y="2886059"/>
             <a:ext cx="425317" cy="491028"/>
           </a:xfrm>
@@ -14552,7 +14359,7 @@
           <p:nvPr/>
         </p:nvPicPr>
         <p:blipFill rotWithShape="1">
-          <a:blip r:embed="rId17">
+          <a:blip r:embed="rId18">
             <a:extLst>
               <a:ext uri="{28A0092B-C50C-407E-A947-70E740481C1C}">
                 <a14:useLocalDpi xmlns:a14="http://schemas.microsoft.com/office/drawing/2010/main" val="0"/>
@@ -14582,185 +14389,6 @@
           </a:extLst>
         </p:spPr>
       </p:pic>
-      <p:pic>
-        <p:nvPicPr>
-          <p:cNvPr id="31" name="Graphic 30">
-            <a:extLst>
-              <a:ext uri="{FF2B5EF4-FFF2-40B4-BE49-F238E27FC236}">
-                <a16:creationId xmlns:a16="http://schemas.microsoft.com/office/drawing/2014/main" id="{6E90EBC8-2BDD-97B9-0002-66C8277B6919}"/>
-              </a:ext>
-            </a:extLst>
-          </p:cNvPr>
-          <p:cNvPicPr>
-            <a:picLocks noChangeAspect="1"/>
-          </p:cNvPicPr>
-          <p:nvPr/>
-        </p:nvPicPr>
-        <p:blipFill>
-          <a:blip>
-            <a:extLst>
-              <a:ext uri="{96DAC541-7B7A-43D3-8B79-37D633B846F1}">
-                <asvg:svgBlip xmlns:asvg="http://schemas.microsoft.com/office/drawing/2016/SVG/main" r:embed="rId18"/>
-              </a:ext>
-            </a:extLst>
-          </a:blip>
-          <a:stretch>
-            <a:fillRect/>
-          </a:stretch>
-        </p:blipFill>
-        <p:spPr>
-          <a:xfrm>
-            <a:off x="809928" y="3377087"/>
-            <a:ext cx="430478" cy="497213"/>
-          </a:xfrm>
-          <a:prstGeom prst="rect">
-            <a:avLst/>
-          </a:prstGeom>
-        </p:spPr>
-      </p:pic>
-      <p:pic>
-        <p:nvPicPr>
-          <p:cNvPr id="3102" name="Picture 30" descr="FastAPI Tableau">
-            <a:extLst>
-              <a:ext uri="{FF2B5EF4-FFF2-40B4-BE49-F238E27FC236}">
-                <a16:creationId xmlns:a16="http://schemas.microsoft.com/office/drawing/2014/main" id="{557BCE28-0397-D436-EB47-4EE96E7118EA}"/>
-              </a:ext>
-            </a:extLst>
-          </p:cNvPr>
-          <p:cNvPicPr>
-            <a:picLocks noChangeAspect="1" noChangeArrowheads="1"/>
-          </p:cNvPicPr>
-          <p:nvPr/>
-        </p:nvPicPr>
-        <p:blipFill>
-          <a:blip r:embed="rId15">
-            <a:extLst>
-              <a:ext uri="{28A0092B-C50C-407E-A947-70E740481C1C}">
-                <a14:useLocalDpi xmlns:a14="http://schemas.microsoft.com/office/drawing/2010/main" val="0"/>
-              </a:ext>
-            </a:extLst>
-          </a:blip>
-          <a:srcRect/>
-          <a:stretch>
-            <a:fillRect/>
-          </a:stretch>
-        </p:blipFill>
-        <p:spPr bwMode="auto">
-          <a:xfrm>
-            <a:off x="1477824" y="3546368"/>
-            <a:ext cx="1071888" cy="267972"/>
-          </a:xfrm>
-          <a:prstGeom prst="rect">
-            <a:avLst/>
-          </a:prstGeom>
-          <a:noFill/>
-          <a:extLst>
-            <a:ext uri="{909E8E84-426E-40DD-AFC4-6F175D3DCCD1}">
-              <a14:hiddenFill xmlns:a14="http://schemas.microsoft.com/office/drawing/2010/main">
-                <a:solidFill>
-                  <a:srgbClr val="FFFFFF"/>
-                </a:solidFill>
-              </a14:hiddenFill>
-            </a:ext>
-          </a:extLst>
-        </p:spPr>
-      </p:pic>
-      <p:cxnSp>
-        <p:nvCxnSpPr>
-          <p:cNvPr id="32" name="Straight Arrow Connector 31">
-            <a:extLst>
-              <a:ext uri="{FF2B5EF4-FFF2-40B4-BE49-F238E27FC236}">
-                <a16:creationId xmlns:a16="http://schemas.microsoft.com/office/drawing/2014/main" id="{0A28F990-46B7-D036-2C7C-36A1DAF644C2}"/>
-              </a:ext>
-            </a:extLst>
-          </p:cNvPr>
-          <p:cNvCxnSpPr>
-            <a:cxnSpLocks/>
-          </p:cNvCxnSpPr>
-          <p:nvPr/>
-        </p:nvCxnSpPr>
-        <p:spPr>
-          <a:xfrm flipH="1">
-            <a:off x="948579" y="3902697"/>
-            <a:ext cx="74931" cy="238003"/>
-          </a:xfrm>
-          <a:prstGeom prst="straightConnector1">
-            <a:avLst/>
-          </a:prstGeom>
-          <a:noFill/>
-          <a:ln w="12700" cap="flat">
-            <a:solidFill>
-              <a:srgbClr val="000000"/>
-            </a:solidFill>
-            <a:prstDash val="sysDot"/>
-            <a:miter lim="400000"/>
-            <a:headEnd type="none" w="med" len="med"/>
-            <a:tailEnd type="none" w="med" len="med"/>
-          </a:ln>
-          <a:effectLst/>
-          <a:sp3d/>
-        </p:spPr>
-        <p:style>
-          <a:lnRef idx="0">
-            <a:scrgbClr r="0" g="0" b="0"/>
-          </a:lnRef>
-          <a:fillRef idx="0">
-            <a:scrgbClr r="0" g="0" b="0"/>
-          </a:fillRef>
-          <a:effectRef idx="0">
-            <a:scrgbClr r="0" g="0" b="0"/>
-          </a:effectRef>
-          <a:fontRef idx="none"/>
-        </p:style>
-      </p:cxnSp>
-      <p:cxnSp>
-        <p:nvCxnSpPr>
-          <p:cNvPr id="36" name="Straight Arrow Connector 35">
-            <a:extLst>
-              <a:ext uri="{FF2B5EF4-FFF2-40B4-BE49-F238E27FC236}">
-                <a16:creationId xmlns:a16="http://schemas.microsoft.com/office/drawing/2014/main" id="{E7182D64-77FB-E839-29AA-1AAAD4299B8B}"/>
-              </a:ext>
-            </a:extLst>
-          </p:cNvPr>
-          <p:cNvCxnSpPr>
-            <a:cxnSpLocks/>
-          </p:cNvCxnSpPr>
-          <p:nvPr/>
-        </p:nvCxnSpPr>
-        <p:spPr>
-          <a:xfrm flipH="1">
-            <a:off x="1230901" y="3855563"/>
-            <a:ext cx="405352" cy="301658"/>
-          </a:xfrm>
-          <a:prstGeom prst="straightConnector1">
-            <a:avLst/>
-          </a:prstGeom>
-          <a:noFill/>
-          <a:ln w="12700" cap="flat">
-            <a:solidFill>
-              <a:srgbClr val="000000"/>
-            </a:solidFill>
-            <a:prstDash val="sysDot"/>
-            <a:miter lim="400000"/>
-            <a:headEnd type="none" w="med" len="med"/>
-            <a:tailEnd type="none" w="med" len="med"/>
-          </a:ln>
-          <a:effectLst/>
-          <a:sp3d/>
-        </p:spPr>
-        <p:style>
-          <a:lnRef idx="0">
-            <a:scrgbClr r="0" g="0" b="0"/>
-          </a:lnRef>
-          <a:fillRef idx="0">
-            <a:scrgbClr r="0" g="0" b="0"/>
-          </a:fillRef>
-          <a:effectRef idx="0">
-            <a:scrgbClr r="0" g="0" b="0"/>
-          </a:effectRef>
-          <a:fontRef idx="none"/>
-        </p:style>
-      </p:cxnSp>
       <p:sp>
         <p:nvSpPr>
           <p:cNvPr id="42" name="Rounded Rectangle 41">
@@ -14778,7 +14406,7 @@
         <p:spPr>
           <a:xfrm>
             <a:off x="3249642" y="2688585"/>
-            <a:ext cx="872885" cy="1239341"/>
+            <a:ext cx="872885" cy="1249241"/>
           </a:xfrm>
           <a:prstGeom prst="roundRect">
             <a:avLst/>
@@ -15151,7 +14779,7 @@
         </p:blipFill>
         <p:spPr bwMode="auto">
           <a:xfrm>
-            <a:off x="1159672" y="6631363"/>
+            <a:off x="1159672" y="6634378"/>
             <a:ext cx="263394" cy="263394"/>
           </a:xfrm>
           <a:prstGeom prst="rect">
@@ -15196,7 +14824,7 @@
         </p:blipFill>
         <p:spPr>
           <a:xfrm>
-            <a:off x="1503537" y="6628482"/>
+            <a:off x="1485143" y="6630824"/>
             <a:ext cx="322107" cy="270502"/>
           </a:xfrm>
           <a:prstGeom prst="rect">
@@ -15347,55 +14975,8 @@
         </p:blipFill>
         <p:spPr bwMode="auto">
           <a:xfrm>
-            <a:off x="1130316" y="7467608"/>
+            <a:off x="1130316" y="7461490"/>
             <a:ext cx="322107" cy="318309"/>
-          </a:xfrm>
-          <a:prstGeom prst="rect">
-            <a:avLst/>
-          </a:prstGeom>
-          <a:noFill/>
-          <a:extLst>
-            <a:ext uri="{909E8E84-426E-40DD-AFC4-6F175D3DCCD1}">
-              <a14:hiddenFill xmlns:a14="http://schemas.microsoft.com/office/drawing/2010/main">
-                <a:solidFill>
-                  <a:srgbClr val="FFFFFF"/>
-                </a:solidFill>
-              </a14:hiddenFill>
-            </a:ext>
-          </a:extLst>
-        </p:spPr>
-      </p:pic>
-      <p:pic>
-        <p:nvPicPr>
-          <p:cNvPr id="3114" name="Picture 42">
-            <a:extLst>
-              <a:ext uri="{FF2B5EF4-FFF2-40B4-BE49-F238E27FC236}">
-                <a16:creationId xmlns:a16="http://schemas.microsoft.com/office/drawing/2014/main" id="{DEF4E8F2-3F13-5DE7-8AD3-6C890FE6E28B}"/>
-              </a:ext>
-            </a:extLst>
-          </p:cNvPr>
-          <p:cNvPicPr>
-            <a:picLocks noChangeAspect="1" noChangeArrowheads="1"/>
-          </p:cNvPicPr>
-          <p:nvPr/>
-        </p:nvPicPr>
-        <p:blipFill>
-          <a:blip r:embed="rId4">
-            <a:extLst>
-              <a:ext uri="{28A0092B-C50C-407E-A947-70E740481C1C}">
-                <a14:useLocalDpi xmlns:a14="http://schemas.microsoft.com/office/drawing/2010/main" val="0"/>
-              </a:ext>
-            </a:extLst>
-          </a:blip>
-          <a:srcRect/>
-          <a:stretch>
-            <a:fillRect/>
-          </a:stretch>
-        </p:blipFill>
-        <p:spPr bwMode="auto">
-          <a:xfrm>
-            <a:off x="1527993" y="7467432"/>
-            <a:ext cx="273194" cy="316905"/>
           </a:xfrm>
           <a:prstGeom prst="rect">
             <a:avLst/>
@@ -16510,7 +16091,7 @@
         </p:blipFill>
         <p:spPr>
           <a:xfrm>
-            <a:off x="7968213" y="583976"/>
+            <a:off x="7875613" y="583976"/>
             <a:ext cx="248728" cy="238364"/>
           </a:xfrm>
           <a:prstGeom prst="rect">
@@ -16532,8 +16113,8 @@
         </p:nvSpPr>
         <p:spPr>
           <a:xfrm>
-            <a:off x="4529814" y="1338978"/>
-            <a:ext cx="2862200" cy="846386"/>
+            <a:off x="4529814" y="1157171"/>
+            <a:ext cx="2862200" cy="1041311"/>
           </a:xfrm>
           <a:prstGeom prst="rect">
             <a:avLst/>
@@ -16576,7 +16157,7 @@
                 <a:effectLst/>
                 <a:latin typeface="Open Sans Light" panose="020B0606030504020204" pitchFamily="34" charset="0"/>
               </a:rPr>
-              <a:t>Change content title</a:t>
+              <a:t>Content Title &amp; Description</a:t>
             </a:r>
           </a:p>
           <a:p>
@@ -16591,7 +16172,7 @@
                 </a:solidFill>
                 <a:latin typeface="Open Sans Light" panose="020B0606030504020204" pitchFamily="34" charset="0"/>
               </a:rPr>
-              <a:t>Content information</a:t>
+              <a:t>Content URL</a:t>
             </a:r>
             <a:endParaRPr lang="en-US" sz="1100" b="0" i="0" dirty="0">
               <a:solidFill>
@@ -16613,7 +16194,7 @@
                 </a:solidFill>
                 <a:latin typeface="Open Sans Light" panose="020B0606030504020204" pitchFamily="34" charset="0"/>
               </a:rPr>
-              <a:t>Add thumbnail</a:t>
+              <a:t>Thumbnail</a:t>
             </a:r>
           </a:p>
           <a:p>
@@ -16622,6 +16203,21 @@
               <a:buChar char="-"/>
             </a:pPr>
             <a:r>
+              <a:rPr lang="en-US" sz="1100" b="0" dirty="0">
+                <a:solidFill>
+                  <a:srgbClr val="404041"/>
+                </a:solidFill>
+                <a:latin typeface="Open Sans Light" panose="020B0606030504020204" pitchFamily="34" charset="0"/>
+              </a:rPr>
+              <a:t>Tags</a:t>
+            </a:r>
+          </a:p>
+          <a:p>
+            <a:pPr marL="171450" indent="-171450">
+              <a:buFontTx/>
+              <a:buChar char="-"/>
+            </a:pPr>
+            <a:r>
               <a:rPr lang="en-US" sz="1100" b="0" i="0" dirty="0">
                 <a:solidFill>
                   <a:srgbClr val="404041"/>
@@ -16629,149 +16225,11 @@
                 <a:effectLst/>
                 <a:latin typeface="Open Sans Light" panose="020B0606030504020204" pitchFamily="34" charset="0"/>
               </a:rPr>
-              <a:t>Usage data</a:t>
+              <a:t>Lock/Delete Content</a:t>
             </a:r>
           </a:p>
         </p:txBody>
       </p:sp>
-      <p:pic>
-        <p:nvPicPr>
-          <p:cNvPr id="3118" name="Picture 46" descr="Example usage data graphs for a Shiny application and an R Markdown report.">
-            <a:extLst>
-              <a:ext uri="{FF2B5EF4-FFF2-40B4-BE49-F238E27FC236}">
-                <a16:creationId xmlns:a16="http://schemas.microsoft.com/office/drawing/2014/main" id="{56B0B099-E130-B36F-E43B-D6B205941D78}"/>
-              </a:ext>
-            </a:extLst>
-          </p:cNvPr>
-          <p:cNvPicPr>
-            <a:picLocks noChangeAspect="1" noChangeArrowheads="1"/>
-          </p:cNvPicPr>
-          <p:nvPr/>
-        </p:nvPicPr>
-        <p:blipFill rotWithShape="1">
-          <a:blip r:embed="rId27">
-            <a:extLst>
-              <a:ext uri="{28A0092B-C50C-407E-A947-70E740481C1C}">
-                <a14:useLocalDpi xmlns:a14="http://schemas.microsoft.com/office/drawing/2010/main" val="0"/>
-              </a:ext>
-            </a:extLst>
-          </a:blip>
-          <a:srcRect r="52182"/>
-          <a:stretch/>
-        </p:blipFill>
-        <p:spPr bwMode="auto">
-          <a:xfrm>
-            <a:off x="4779755" y="2193659"/>
-            <a:ext cx="1905837" cy="952925"/>
-          </a:xfrm>
-          <a:prstGeom prst="rect">
-            <a:avLst/>
-          </a:prstGeom>
-          <a:noFill/>
-          <a:extLst>
-            <a:ext uri="{909E8E84-426E-40DD-AFC4-6F175D3DCCD1}">
-              <a14:hiddenFill xmlns:a14="http://schemas.microsoft.com/office/drawing/2010/main">
-                <a:solidFill>
-                  <a:srgbClr val="FFFFFF"/>
-                </a:solidFill>
-              </a14:hiddenFill>
-            </a:ext>
-          </a:extLst>
-        </p:spPr>
-      </p:pic>
-      <p:pic>
-        <p:nvPicPr>
-          <p:cNvPr id="3117" name="Picture 46" descr="Example usage data graphs for a Shiny application and an R Markdown report.">
-            <a:extLst>
-              <a:ext uri="{FF2B5EF4-FFF2-40B4-BE49-F238E27FC236}">
-                <a16:creationId xmlns:a16="http://schemas.microsoft.com/office/drawing/2014/main" id="{488F5A90-9B0D-62EA-9C9E-157E6FEDE7E6}"/>
-              </a:ext>
-            </a:extLst>
-          </p:cNvPr>
-          <p:cNvPicPr>
-            <a:picLocks noChangeAspect="1" noChangeArrowheads="1"/>
-          </p:cNvPicPr>
-          <p:nvPr/>
-        </p:nvPicPr>
-        <p:blipFill rotWithShape="1">
-          <a:blip r:embed="rId27">
-            <a:extLst>
-              <a:ext uri="{28A0092B-C50C-407E-A947-70E740481C1C}">
-                <a14:useLocalDpi xmlns:a14="http://schemas.microsoft.com/office/drawing/2010/main" val="0"/>
-              </a:ext>
-            </a:extLst>
-          </a:blip>
-          <a:srcRect l="50141"/>
-          <a:stretch/>
-        </p:blipFill>
-        <p:spPr bwMode="auto">
-          <a:xfrm>
-            <a:off x="4778208" y="3113868"/>
-            <a:ext cx="1905837" cy="913912"/>
-          </a:xfrm>
-          <a:prstGeom prst="rect">
-            <a:avLst/>
-          </a:prstGeom>
-          <a:noFill/>
-          <a:extLst>
-            <a:ext uri="{909E8E84-426E-40DD-AFC4-6F175D3DCCD1}">
-              <a14:hiddenFill xmlns:a14="http://schemas.microsoft.com/office/drawing/2010/main">
-                <a:solidFill>
-                  <a:srgbClr val="FFFFFF"/>
-                </a:solidFill>
-              </a14:hiddenFill>
-            </a:ext>
-          </a:extLst>
-        </p:spPr>
-      </p:pic>
-      <p:cxnSp>
-        <p:nvCxnSpPr>
-          <p:cNvPr id="3119" name="Straight Arrow Connector 3118">
-            <a:extLst>
-              <a:ext uri="{FF2B5EF4-FFF2-40B4-BE49-F238E27FC236}">
-                <a16:creationId xmlns:a16="http://schemas.microsoft.com/office/drawing/2014/main" id="{4A079248-E790-3D88-5273-FC527DFE7A3A}"/>
-              </a:ext>
-            </a:extLst>
-          </p:cNvPr>
-          <p:cNvCxnSpPr>
-            <a:cxnSpLocks/>
-          </p:cNvCxnSpPr>
-          <p:nvPr/>
-        </p:nvCxnSpPr>
-        <p:spPr>
-          <a:xfrm>
-            <a:off x="5348253" y="2140748"/>
-            <a:ext cx="308370" cy="431656"/>
-          </a:xfrm>
-          <a:prstGeom prst="straightConnector1">
-            <a:avLst/>
-          </a:prstGeom>
-          <a:noFill/>
-          <a:ln w="12700" cap="flat">
-            <a:solidFill>
-              <a:srgbClr val="000000"/>
-            </a:solidFill>
-            <a:prstDash val="sysDot"/>
-            <a:miter lim="400000"/>
-            <a:headEnd type="none" w="med" len="med"/>
-            <a:tailEnd type="none" w="med" len="med"/>
-          </a:ln>
-          <a:effectLst/>
-          <a:sp3d/>
-        </p:spPr>
-        <p:style>
-          <a:lnRef idx="0">
-            <a:scrgbClr r="0" g="0" b="0"/>
-          </a:lnRef>
-          <a:fillRef idx="0">
-            <a:scrgbClr r="0" g="0" b="0"/>
-          </a:fillRef>
-          <a:effectRef idx="0">
-            <a:scrgbClr r="0" g="0" b="0"/>
-          </a:effectRef>
-          <a:fontRef idx="none"/>
-        </p:style>
-      </p:cxnSp>
       <p:sp>
         <p:nvSpPr>
           <p:cNvPr id="3109" name="TextBox 3108">
@@ -16786,8 +16244,8 @@
         </p:nvSpPr>
         <p:spPr>
           <a:xfrm>
-            <a:off x="4754721" y="743185"/>
-            <a:ext cx="1870820" cy="628296"/>
+            <a:off x="4754721" y="866295"/>
+            <a:ext cx="894270" cy="382075"/>
           </a:xfrm>
           <a:prstGeom prst="rect">
             <a:avLst/>
@@ -16836,7 +16294,7 @@
             </a:pPr>
             <a:r>
               <a:rPr lang="en-US" sz="1600" dirty="0"/>
-              <a:t>Info and Content Metadata</a:t>
+              <a:t>General</a:t>
             </a:r>
             <a:endParaRPr kumimoji="0" lang="en-US" sz="1600" b="1" i="0" u="none" strike="noStrike" cap="none" spc="0" normalizeH="0" baseline="0" dirty="0">
               <a:ln>
@@ -16872,7 +16330,7 @@
         <p:spPr>
           <a:xfrm>
             <a:off x="4551314" y="4706239"/>
-            <a:ext cx="2361279" cy="3891218"/>
+            <a:ext cx="2361279" cy="2457761"/>
           </a:xfrm>
           <a:prstGeom prst="roundRect">
             <a:avLst>
@@ -16955,8 +16413,8 @@
         </p:nvSpPr>
         <p:spPr>
           <a:xfrm>
-            <a:off x="4769054" y="4633536"/>
-            <a:ext cx="1506835" cy="166696"/>
+            <a:off x="4769055" y="4633536"/>
+            <a:ext cx="717346" cy="166696"/>
           </a:xfrm>
           <a:prstGeom prst="rect">
             <a:avLst/>
@@ -17037,7 +16495,7 @@
         <p:spPr>
           <a:xfrm>
             <a:off x="4760175" y="4519747"/>
-            <a:ext cx="1515714" cy="382075"/>
+            <a:ext cx="993593" cy="382075"/>
           </a:xfrm>
           <a:prstGeom prst="rect">
             <a:avLst/>
@@ -17086,7 +16544,7 @@
             </a:pPr>
             <a:r>
               <a:rPr lang="en-US" sz="1600" dirty="0"/>
-              <a:t>Access Controls</a:t>
+              <a:t>Source</a:t>
             </a:r>
             <a:endParaRPr kumimoji="0" lang="en-US" sz="1600" b="1" i="0" u="none" strike="noStrike" cap="none" spc="0" normalizeH="0" baseline="0" dirty="0">
               <a:ln>
@@ -17101,202 +16559,6 @@
               <a:ea typeface="Source Sans Pro"/>
               <a:cs typeface="Source Sans Pro"/>
               <a:sym typeface="Source Sans Pro"/>
-            </a:endParaRPr>
-          </a:p>
-        </p:txBody>
-      </p:sp>
-      <p:pic>
-        <p:nvPicPr>
-          <p:cNvPr id="3138" name="Picture 3137">
-            <a:extLst>
-              <a:ext uri="{FF2B5EF4-FFF2-40B4-BE49-F238E27FC236}">
-                <a16:creationId xmlns:a16="http://schemas.microsoft.com/office/drawing/2014/main" id="{F949A86F-6D5C-AF2B-3D67-E2F7CB92FFA4}"/>
-              </a:ext>
-            </a:extLst>
-          </p:cNvPr>
-          <p:cNvPicPr>
-            <a:picLocks noChangeAspect="1"/>
-          </p:cNvPicPr>
-          <p:nvPr/>
-        </p:nvPicPr>
-        <p:blipFill>
-          <a:blip r:embed="rId28"/>
-          <a:srcRect b="57922"/>
-          <a:stretch/>
-        </p:blipFill>
-        <p:spPr>
-          <a:xfrm>
-            <a:off x="4754721" y="5280285"/>
-            <a:ext cx="1977217" cy="1532692"/>
-          </a:xfrm>
-          <a:prstGeom prst="rect">
-            <a:avLst/>
-          </a:prstGeom>
-          <a:ln>
-            <a:noFill/>
-          </a:ln>
-        </p:spPr>
-      </p:pic>
-      <p:pic>
-        <p:nvPicPr>
-          <p:cNvPr id="3139" name="Picture 3138">
-            <a:extLst>
-              <a:ext uri="{FF2B5EF4-FFF2-40B4-BE49-F238E27FC236}">
-                <a16:creationId xmlns:a16="http://schemas.microsoft.com/office/drawing/2014/main" id="{2D1ADAFE-9849-E25A-2D2C-A3DD419CEAD5}"/>
-              </a:ext>
-            </a:extLst>
-          </p:cNvPr>
-          <p:cNvPicPr>
-            <a:picLocks noChangeAspect="1"/>
-          </p:cNvPicPr>
-          <p:nvPr/>
-        </p:nvPicPr>
-        <p:blipFill>
-          <a:blip r:embed="rId28"/>
-          <a:srcRect t="54045" b="14832"/>
-          <a:stretch/>
-        </p:blipFill>
-        <p:spPr>
-          <a:xfrm>
-            <a:off x="4723873" y="7385661"/>
-            <a:ext cx="2004814" cy="1149481"/>
-          </a:xfrm>
-          <a:prstGeom prst="rect">
-            <a:avLst/>
-          </a:prstGeom>
-          <a:ln>
-            <a:noFill/>
-          </a:ln>
-        </p:spPr>
-      </p:pic>
-      <p:sp>
-        <p:nvSpPr>
-          <p:cNvPr id="3140" name="TextBox 3139">
-            <a:extLst>
-              <a:ext uri="{FF2B5EF4-FFF2-40B4-BE49-F238E27FC236}">
-                <a16:creationId xmlns:a16="http://schemas.microsoft.com/office/drawing/2014/main" id="{1F004255-516E-24D5-3149-1BDDB9D9DCFD}"/>
-              </a:ext>
-            </a:extLst>
-          </p:cNvPr>
-          <p:cNvSpPr txBox="1"/>
-          <p:nvPr/>
-        </p:nvSpPr>
-        <p:spPr>
-          <a:xfrm>
-            <a:off x="4635730" y="4869660"/>
-            <a:ext cx="2178114" cy="430887"/>
-          </a:xfrm>
-          <a:prstGeom prst="rect">
-            <a:avLst/>
-          </a:prstGeom>
-          <a:noFill/>
-          <a:ln w="12700" cap="flat">
-            <a:noFill/>
-            <a:miter lim="400000"/>
-          </a:ln>
-          <a:effectLst/>
-          <a:sp3d/>
-        </p:spPr>
-        <p:style>
-          <a:lnRef idx="0">
-            <a:scrgbClr r="0" g="0" b="0"/>
-          </a:lnRef>
-          <a:fillRef idx="0">
-            <a:scrgbClr r="0" g="0" b="0"/>
-          </a:fillRef>
-          <a:effectRef idx="0">
-            <a:scrgbClr r="0" g="0" b="0"/>
-          </a:effectRef>
-          <a:fontRef idx="none"/>
-        </p:style>
-        <p:txBody>
-          <a:bodyPr wrap="square">
-            <a:spAutoFit/>
-          </a:bodyPr>
-          <a:lstStyle/>
-          <a:p>
-            <a:pPr algn="ctr"/>
-            <a:r>
-              <a:rPr lang="en-US" sz="1100" b="0" dirty="0">
-                <a:solidFill>
-                  <a:srgbClr val="404041"/>
-                </a:solidFill>
-                <a:latin typeface="Open Sans Light" panose="020B0606030504020204" pitchFamily="34" charset="0"/>
-              </a:rPr>
-              <a:t>Control who has access to your content</a:t>
-            </a:r>
-            <a:endParaRPr lang="en-US" sz="1100" b="0" i="0" dirty="0">
-              <a:solidFill>
-                <a:srgbClr val="404041"/>
-              </a:solidFill>
-              <a:effectLst/>
-              <a:latin typeface="Open Sans Light" panose="020B0606030504020204" pitchFamily="34" charset="0"/>
-            </a:endParaRPr>
-          </a:p>
-        </p:txBody>
-      </p:sp>
-      <p:sp>
-        <p:nvSpPr>
-          <p:cNvPr id="3141" name="TextBox 3140">
-            <a:extLst>
-              <a:ext uri="{FF2B5EF4-FFF2-40B4-BE49-F238E27FC236}">
-                <a16:creationId xmlns:a16="http://schemas.microsoft.com/office/drawing/2014/main" id="{F3C00C87-E86F-0E35-C24D-2DDC943D71C2}"/>
-              </a:ext>
-            </a:extLst>
-          </p:cNvPr>
-          <p:cNvSpPr txBox="1"/>
-          <p:nvPr/>
-        </p:nvSpPr>
-        <p:spPr>
-          <a:xfrm>
-            <a:off x="4621690" y="6990033"/>
-            <a:ext cx="2209180" cy="430887"/>
-          </a:xfrm>
-          <a:prstGeom prst="rect">
-            <a:avLst/>
-          </a:prstGeom>
-          <a:noFill/>
-          <a:ln w="12700" cap="flat">
-            <a:noFill/>
-            <a:miter lim="400000"/>
-          </a:ln>
-          <a:effectLst/>
-          <a:sp3d/>
-        </p:spPr>
-        <p:style>
-          <a:lnRef idx="0">
-            <a:scrgbClr r="0" g="0" b="0"/>
-          </a:lnRef>
-          <a:fillRef idx="0">
-            <a:scrgbClr r="0" g="0" b="0"/>
-          </a:fillRef>
-          <a:effectRef idx="0">
-            <a:scrgbClr r="0" g="0" b="0"/>
-          </a:effectRef>
-          <a:fontRef idx="none"/>
-        </p:style>
-        <p:txBody>
-          <a:bodyPr wrap="square">
-            <a:spAutoFit/>
-          </a:bodyPr>
-          <a:lstStyle/>
-          <a:p>
-            <a:pPr algn="ctr"/>
-            <a:r>
-              <a:rPr lang="en-US" sz="1100" b="0" dirty="0">
-                <a:solidFill>
-                  <a:srgbClr val="404041"/>
-                </a:solidFill>
-                <a:latin typeface="Open Sans Light" panose="020B0606030504020204" pitchFamily="34" charset="0"/>
-              </a:rPr>
-              <a:t>Share your content with a customized URL</a:t>
-            </a:r>
-            <a:endParaRPr lang="en-US" sz="1100" b="0" i="0" dirty="0">
-              <a:solidFill>
-                <a:srgbClr val="404041"/>
-              </a:solidFill>
-              <a:effectLst/>
-              <a:latin typeface="Open Sans Light" panose="020B0606030504020204" pitchFamily="34" charset="0"/>
             </a:endParaRPr>
           </a:p>
         </p:txBody>
@@ -17680,35 +16942,6 @@
           </a:p>
         </p:txBody>
       </p:sp>
-      <p:pic>
-        <p:nvPicPr>
-          <p:cNvPr id="3147" name="Picture 3146">
-            <a:extLst>
-              <a:ext uri="{FF2B5EF4-FFF2-40B4-BE49-F238E27FC236}">
-                <a16:creationId xmlns:a16="http://schemas.microsoft.com/office/drawing/2014/main" id="{1E2BEFCB-1C63-F155-DDF9-A36DB8721CAE}"/>
-              </a:ext>
-            </a:extLst>
-          </p:cNvPr>
-          <p:cNvPicPr>
-            <a:picLocks noChangeAspect="1"/>
-          </p:cNvPicPr>
-          <p:nvPr/>
-        </p:nvPicPr>
-        <p:blipFill>
-          <a:blip r:embed="rId29"/>
-          <a:srcRect b="23623"/>
-          <a:stretch/>
-        </p:blipFill>
-        <p:spPr>
-          <a:xfrm>
-            <a:off x="7303824" y="1830454"/>
-            <a:ext cx="2711968" cy="1536790"/>
-          </a:xfrm>
-          <a:prstGeom prst="rect">
-            <a:avLst/>
-          </a:prstGeom>
-        </p:spPr>
-      </p:pic>
       <p:sp>
         <p:nvSpPr>
           <p:cNvPr id="3152" name="TextBox 3151">
@@ -17723,7 +16956,7 @@
         </p:nvSpPr>
         <p:spPr>
           <a:xfrm>
-            <a:off x="7120182" y="3328731"/>
+            <a:off x="7120182" y="2932731"/>
             <a:ext cx="3105049" cy="982239"/>
           </a:xfrm>
           <a:prstGeom prst="rect">
@@ -17798,53 +17031,6 @@
           </a:p>
         </p:txBody>
       </p:sp>
-      <p:pic>
-        <p:nvPicPr>
-          <p:cNvPr id="3154" name="Picture 48" descr="Alternate RunAs user configuration.">
-            <a:extLst>
-              <a:ext uri="{FF2B5EF4-FFF2-40B4-BE49-F238E27FC236}">
-                <a16:creationId xmlns:a16="http://schemas.microsoft.com/office/drawing/2014/main" id="{169D6ACF-81CF-43B2-D599-2DD1D63CF4FD}"/>
-              </a:ext>
-            </a:extLst>
-          </p:cNvPr>
-          <p:cNvPicPr>
-            <a:picLocks noChangeAspect="1" noChangeArrowheads="1"/>
-          </p:cNvPicPr>
-          <p:nvPr/>
-        </p:nvPicPr>
-        <p:blipFill>
-          <a:blip r:embed="rId30">
-            <a:extLst>
-              <a:ext uri="{28A0092B-C50C-407E-A947-70E740481C1C}">
-                <a14:useLocalDpi xmlns:a14="http://schemas.microsoft.com/office/drawing/2010/main" val="0"/>
-              </a:ext>
-            </a:extLst>
-          </a:blip>
-          <a:srcRect/>
-          <a:stretch>
-            <a:fillRect/>
-          </a:stretch>
-        </p:blipFill>
-        <p:spPr bwMode="auto">
-          <a:xfrm>
-            <a:off x="7163643" y="5519728"/>
-            <a:ext cx="1444752" cy="784399"/>
-          </a:xfrm>
-          <a:prstGeom prst="rect">
-            <a:avLst/>
-          </a:prstGeom>
-          <a:noFill/>
-          <a:extLst>
-            <a:ext uri="{909E8E84-426E-40DD-AFC4-6F175D3DCCD1}">
-              <a14:hiddenFill xmlns:a14="http://schemas.microsoft.com/office/drawing/2010/main">
-                <a:solidFill>
-                  <a:srgbClr val="FFFFFF"/>
-                </a:solidFill>
-              </a14:hiddenFill>
-            </a:ext>
-          </a:extLst>
-        </p:spPr>
-      </p:pic>
       <p:sp>
         <p:nvSpPr>
           <p:cNvPr id="3155" name="TextBox 3154">
@@ -17859,7 +17045,7 @@
         </p:nvSpPr>
         <p:spPr>
           <a:xfrm>
-            <a:off x="7048017" y="4351821"/>
+            <a:off x="7048017" y="3840621"/>
             <a:ext cx="3249378" cy="382075"/>
           </a:xfrm>
           <a:prstGeom prst="rect">
@@ -17942,7 +17128,7 @@
         </p:nvSpPr>
         <p:spPr>
           <a:xfrm>
-            <a:off x="7082310" y="4598352"/>
+            <a:off x="7082310" y="4087152"/>
             <a:ext cx="3105049" cy="812962"/>
           </a:xfrm>
           <a:prstGeom prst="rect">
@@ -18019,224 +17205,6 @@
           </a:p>
         </p:txBody>
       </p:sp>
-      <p:pic>
-        <p:nvPicPr>
-          <p:cNvPr id="3157" name="Picture 50" descr="Runtime settings panel CPU &amp; RAM options.">
-            <a:extLst>
-              <a:ext uri="{FF2B5EF4-FFF2-40B4-BE49-F238E27FC236}">
-                <a16:creationId xmlns:a16="http://schemas.microsoft.com/office/drawing/2014/main" id="{CE9906AF-D95E-9E1F-F6EF-E243D44CE364}"/>
-              </a:ext>
-            </a:extLst>
-          </p:cNvPr>
-          <p:cNvPicPr>
-            <a:picLocks noChangeAspect="1" noChangeArrowheads="1"/>
-          </p:cNvPicPr>
-          <p:nvPr/>
-        </p:nvPicPr>
-        <p:blipFill>
-          <a:blip r:embed="rId31">
-            <a:extLst>
-              <a:ext uri="{28A0092B-C50C-407E-A947-70E740481C1C}">
-                <a14:useLocalDpi xmlns:a14="http://schemas.microsoft.com/office/drawing/2010/main" val="0"/>
-              </a:ext>
-            </a:extLst>
-          </a:blip>
-          <a:srcRect/>
-          <a:stretch>
-            <a:fillRect/>
-          </a:stretch>
-        </p:blipFill>
-        <p:spPr bwMode="auto">
-          <a:xfrm>
-            <a:off x="8797402" y="5533701"/>
-            <a:ext cx="1313170" cy="1324757"/>
-          </a:xfrm>
-          <a:prstGeom prst="rect">
-            <a:avLst/>
-          </a:prstGeom>
-          <a:noFill/>
-          <a:extLst>
-            <a:ext uri="{909E8E84-426E-40DD-AFC4-6F175D3DCCD1}">
-              <a14:hiddenFill xmlns:a14="http://schemas.microsoft.com/office/drawing/2010/main">
-                <a:solidFill>
-                  <a:srgbClr val="FFFFFF"/>
-                </a:solidFill>
-              </a14:hiddenFill>
-            </a:ext>
-          </a:extLst>
-        </p:spPr>
-      </p:pic>
-      <p:pic>
-        <p:nvPicPr>
-          <p:cNvPr id="3158" name="Picture 52" descr="Execution environment section.">
-            <a:extLst>
-              <a:ext uri="{FF2B5EF4-FFF2-40B4-BE49-F238E27FC236}">
-                <a16:creationId xmlns:a16="http://schemas.microsoft.com/office/drawing/2014/main" id="{C25D09AB-15BB-5DF1-9320-7F5394C857C3}"/>
-              </a:ext>
-            </a:extLst>
-          </p:cNvPr>
-          <p:cNvPicPr>
-            <a:picLocks noChangeAspect="1" noChangeArrowheads="1"/>
-          </p:cNvPicPr>
-          <p:nvPr/>
-        </p:nvPicPr>
-        <p:blipFill>
-          <a:blip r:embed="rId32">
-            <a:extLst>
-              <a:ext uri="{28A0092B-C50C-407E-A947-70E740481C1C}">
-                <a14:useLocalDpi xmlns:a14="http://schemas.microsoft.com/office/drawing/2010/main" val="0"/>
-              </a:ext>
-            </a:extLst>
-          </a:blip>
-          <a:srcRect/>
-          <a:stretch>
-            <a:fillRect/>
-          </a:stretch>
-        </p:blipFill>
-        <p:spPr bwMode="auto">
-          <a:xfrm>
-            <a:off x="7163643" y="6515249"/>
-            <a:ext cx="1444752" cy="817634"/>
-          </a:xfrm>
-          <a:prstGeom prst="rect">
-            <a:avLst/>
-          </a:prstGeom>
-          <a:noFill/>
-          <a:extLst>
-            <a:ext uri="{909E8E84-426E-40DD-AFC4-6F175D3DCCD1}">
-              <a14:hiddenFill xmlns:a14="http://schemas.microsoft.com/office/drawing/2010/main">
-                <a:solidFill>
-                  <a:srgbClr val="FFFFFF"/>
-                </a:solidFill>
-              </a14:hiddenFill>
-            </a:ext>
-          </a:extLst>
-        </p:spPr>
-      </p:pic>
-      <p:pic>
-        <p:nvPicPr>
-          <p:cNvPr id="3159" name="Picture 54" descr="GPU settings options.">
-            <a:extLst>
-              <a:ext uri="{FF2B5EF4-FFF2-40B4-BE49-F238E27FC236}">
-                <a16:creationId xmlns:a16="http://schemas.microsoft.com/office/drawing/2014/main" id="{27A440C1-D628-92A4-A277-26548F8EB0E4}"/>
-              </a:ext>
-            </a:extLst>
-          </p:cNvPr>
-          <p:cNvPicPr>
-            <a:picLocks noChangeAspect="1" noChangeArrowheads="1"/>
-          </p:cNvPicPr>
-          <p:nvPr/>
-        </p:nvPicPr>
-        <p:blipFill>
-          <a:blip r:embed="rId33">
-            <a:extLst>
-              <a:ext uri="{28A0092B-C50C-407E-A947-70E740481C1C}">
-                <a14:useLocalDpi xmlns:a14="http://schemas.microsoft.com/office/drawing/2010/main" val="0"/>
-              </a:ext>
-            </a:extLst>
-          </a:blip>
-          <a:srcRect/>
-          <a:stretch>
-            <a:fillRect/>
-          </a:stretch>
-        </p:blipFill>
-        <p:spPr bwMode="auto">
-          <a:xfrm>
-            <a:off x="7160930" y="7544004"/>
-            <a:ext cx="1447465" cy="702590"/>
-          </a:xfrm>
-          <a:prstGeom prst="rect">
-            <a:avLst/>
-          </a:prstGeom>
-          <a:noFill/>
-          <a:extLst>
-            <a:ext uri="{909E8E84-426E-40DD-AFC4-6F175D3DCCD1}">
-              <a14:hiddenFill xmlns:a14="http://schemas.microsoft.com/office/drawing/2010/main">
-                <a:solidFill>
-                  <a:srgbClr val="FFFFFF"/>
-                </a:solidFill>
-              </a14:hiddenFill>
-            </a:ext>
-          </a:extLst>
-        </p:spPr>
-      </p:pic>
-      <p:pic>
-        <p:nvPicPr>
-          <p:cNvPr id="3160" name="Picture 56" descr="Environment management options.">
-            <a:extLst>
-              <a:ext uri="{FF2B5EF4-FFF2-40B4-BE49-F238E27FC236}">
-                <a16:creationId xmlns:a16="http://schemas.microsoft.com/office/drawing/2014/main" id="{92CACE3E-E656-26C3-7B83-FDD1BD03019C}"/>
-              </a:ext>
-            </a:extLst>
-          </p:cNvPr>
-          <p:cNvPicPr>
-            <a:picLocks noChangeAspect="1" noChangeArrowheads="1"/>
-          </p:cNvPicPr>
-          <p:nvPr/>
-        </p:nvPicPr>
-        <p:blipFill>
-          <a:blip r:embed="rId34">
-            <a:extLst>
-              <a:ext uri="{28A0092B-C50C-407E-A947-70E740481C1C}">
-                <a14:useLocalDpi xmlns:a14="http://schemas.microsoft.com/office/drawing/2010/main" val="0"/>
-              </a:ext>
-            </a:extLst>
-          </a:blip>
-          <a:srcRect/>
-          <a:stretch>
-            <a:fillRect/>
-          </a:stretch>
-        </p:blipFill>
-        <p:spPr bwMode="auto">
-          <a:xfrm>
-            <a:off x="8797402" y="6909255"/>
-            <a:ext cx="1313170" cy="1550535"/>
-          </a:xfrm>
-          <a:prstGeom prst="rect">
-            <a:avLst/>
-          </a:prstGeom>
-          <a:noFill/>
-          <a:extLst>
-            <a:ext uri="{909E8E84-426E-40DD-AFC4-6F175D3DCCD1}">
-              <a14:hiddenFill xmlns:a14="http://schemas.microsoft.com/office/drawing/2010/main">
-                <a:solidFill>
-                  <a:srgbClr val="FFFFFF"/>
-                </a:solidFill>
-              </a14:hiddenFill>
-            </a:ext>
-          </a:extLst>
-        </p:spPr>
-      </p:pic>
-      <p:pic>
-        <p:nvPicPr>
-          <p:cNvPr id="3162" name="Picture 3161">
-            <a:extLst>
-              <a:ext uri="{FF2B5EF4-FFF2-40B4-BE49-F238E27FC236}">
-                <a16:creationId xmlns:a16="http://schemas.microsoft.com/office/drawing/2014/main" id="{79E03BEE-D0FF-C8F3-6A07-08FD6F172FC7}"/>
-              </a:ext>
-            </a:extLst>
-          </p:cNvPr>
-          <p:cNvPicPr>
-            <a:picLocks noChangeAspect="1"/>
-          </p:cNvPicPr>
-          <p:nvPr/>
-        </p:nvPicPr>
-        <p:blipFill>
-          <a:blip r:embed="rId35"/>
-          <a:stretch>
-            <a:fillRect/>
-          </a:stretch>
-        </p:blipFill>
-        <p:spPr>
-          <a:xfrm>
-            <a:off x="10536974" y="1613572"/>
-            <a:ext cx="1427627" cy="1945741"/>
-          </a:xfrm>
-          <a:prstGeom prst="rect">
-            <a:avLst/>
-          </a:prstGeom>
-        </p:spPr>
-      </p:pic>
       <p:sp>
         <p:nvSpPr>
           <p:cNvPr id="3163" name="Rounded Rectangle 3162">
@@ -18338,7 +17306,7 @@
         <p:spPr>
           <a:xfrm>
             <a:off x="10622406" y="996370"/>
-            <a:ext cx="2138098" cy="154075"/>
+            <a:ext cx="969241" cy="160801"/>
           </a:xfrm>
           <a:prstGeom prst="rect">
             <a:avLst/>
@@ -18419,7 +17387,7 @@
         <p:spPr>
           <a:xfrm>
             <a:off x="10623799" y="876006"/>
-            <a:ext cx="2505323" cy="382075"/>
+            <a:ext cx="1169801" cy="382075"/>
           </a:xfrm>
           <a:prstGeom prst="rect">
             <a:avLst/>
@@ -18468,7 +17436,7 @@
             </a:pPr>
             <a:r>
               <a:rPr lang="en-US" sz="1600" dirty="0"/>
-              <a:t>Schedule and Emailing</a:t>
+              <a:t>Schedule</a:t>
             </a:r>
             <a:endParaRPr kumimoji="0" lang="en-US" sz="1600" b="1" i="0" u="none" strike="noStrike" cap="none" spc="0" normalizeH="0" baseline="0" dirty="0">
               <a:ln>
@@ -18601,7 +17569,7 @@
           <p:nvPr/>
         </p:nvPicPr>
         <p:blipFill>
-          <a:blip r:embed="rId36"/>
+          <a:blip r:embed="rId27"/>
           <a:stretch>
             <a:fillRect/>
           </a:stretch>
@@ -18632,9 +17600,9 @@
           <p:nvPr/>
         </p:nvCxnSpPr>
         <p:spPr>
-          <a:xfrm flipV="1">
-            <a:off x="11917758" y="2639179"/>
-            <a:ext cx="530116" cy="38526"/>
+          <a:xfrm>
+            <a:off x="11788694" y="2429932"/>
+            <a:ext cx="659180" cy="209247"/>
           </a:xfrm>
           <a:prstGeom prst="straightConnector1">
             <a:avLst/>
@@ -18747,36 +17715,6 @@
           </a:p>
         </p:txBody>
       </p:sp>
-      <p:pic>
-        <p:nvPicPr>
-          <p:cNvPr id="3172" name="Picture 3171">
-            <a:extLst>
-              <a:ext uri="{FF2B5EF4-FFF2-40B4-BE49-F238E27FC236}">
-                <a16:creationId xmlns:a16="http://schemas.microsoft.com/office/drawing/2014/main" id="{D34936D4-BC49-5A3D-CFF7-ACDF3853BEC1}"/>
-              </a:ext>
-            </a:extLst>
-          </p:cNvPr>
-          <p:cNvPicPr>
-            <a:picLocks noChangeAspect="1"/>
-          </p:cNvPicPr>
-          <p:nvPr/>
-        </p:nvPicPr>
-        <p:blipFill>
-          <a:blip r:embed="rId37"/>
-          <a:stretch>
-            <a:fillRect/>
-          </a:stretch>
-        </p:blipFill>
-        <p:spPr>
-          <a:xfrm>
-            <a:off x="12091708" y="3553784"/>
-            <a:ext cx="1552368" cy="750675"/>
-          </a:xfrm>
-          <a:prstGeom prst="rect">
-            <a:avLst/>
-          </a:prstGeom>
-        </p:spPr>
-      </p:pic>
       <p:cxnSp>
         <p:nvCxnSpPr>
           <p:cNvPr id="3174" name="Straight Arrow Connector 3173">
@@ -18788,14 +17726,13 @@
           </p:cNvPr>
           <p:cNvCxnSpPr>
             <a:cxnSpLocks/>
-            <a:endCxn id="3172" idx="1"/>
           </p:cNvCxnSpPr>
           <p:nvPr/>
         </p:nvCxnSpPr>
         <p:spPr>
           <a:xfrm>
-            <a:off x="11342670" y="3506918"/>
-            <a:ext cx="749038" cy="422204"/>
+            <a:off x="11208699" y="3461607"/>
+            <a:ext cx="600777" cy="206522"/>
           </a:xfrm>
           <a:prstGeom prst="straightConnector1">
             <a:avLst/>
@@ -18908,36 +17845,6 @@
           </a:p>
         </p:txBody>
       </p:sp>
-      <p:pic>
-        <p:nvPicPr>
-          <p:cNvPr id="3178" name="Picture 3177">
-            <a:extLst>
-              <a:ext uri="{FF2B5EF4-FFF2-40B4-BE49-F238E27FC236}">
-                <a16:creationId xmlns:a16="http://schemas.microsoft.com/office/drawing/2014/main" id="{1C80F66B-AEEB-A354-DD3A-6E67D87BDDAC}"/>
-              </a:ext>
-            </a:extLst>
-          </p:cNvPr>
-          <p:cNvPicPr>
-            <a:picLocks noChangeAspect="1"/>
-          </p:cNvPicPr>
-          <p:nvPr/>
-        </p:nvPicPr>
-        <p:blipFill>
-          <a:blip r:embed="rId38"/>
-          <a:stretch>
-            <a:fillRect/>
-          </a:stretch>
-        </p:blipFill>
-        <p:spPr>
-          <a:xfrm>
-            <a:off x="12741292" y="4927422"/>
-            <a:ext cx="788828" cy="1314714"/>
-          </a:xfrm>
-          <a:prstGeom prst="rect">
-            <a:avLst/>
-          </a:prstGeom>
-        </p:spPr>
-      </p:pic>
       <p:sp>
         <p:nvSpPr>
           <p:cNvPr id="3179" name="Rounded Rectangle 3178">
@@ -19039,7 +17946,7 @@
         <p:spPr>
           <a:xfrm>
             <a:off x="10629332" y="4792728"/>
-            <a:ext cx="559225" cy="116391"/>
+            <a:ext cx="867675" cy="116391"/>
           </a:xfrm>
           <a:prstGeom prst="rect">
             <a:avLst/>
@@ -19119,8 +18026,8 @@
         </p:nvSpPr>
         <p:spPr>
           <a:xfrm>
-            <a:off x="10630725" y="4672364"/>
-            <a:ext cx="711945" cy="382075"/>
+            <a:off x="10630725" y="4672365"/>
+            <a:ext cx="867675" cy="382075"/>
           </a:xfrm>
           <a:prstGeom prst="rect">
             <a:avLst/>
@@ -19169,7 +18076,7 @@
             </a:pPr>
             <a:r>
               <a:rPr lang="en-US" sz="1600" dirty="0"/>
-              <a:t>Tags</a:t>
+              <a:t>Monitor</a:t>
             </a:r>
             <a:endParaRPr kumimoji="0" lang="en-US" sz="1600" b="1" i="0" u="none" strike="noStrike" cap="none" spc="0" normalizeH="0" baseline="0" dirty="0">
               <a:ln>
@@ -19202,8 +18109,8 @@
         </p:nvSpPr>
         <p:spPr>
           <a:xfrm>
-            <a:off x="10536974" y="5153051"/>
-            <a:ext cx="2138098" cy="874518"/>
+            <a:off x="10536974" y="5245384"/>
+            <a:ext cx="1429100" cy="689852"/>
           </a:xfrm>
           <a:prstGeom prst="rect">
             <a:avLst/>
@@ -19258,17 +18165,7 @@
                 <a:effectLst/>
                 <a:latin typeface="Open Sans Light" panose="020B0606030504020204" pitchFamily="34" charset="0"/>
               </a:rPr>
-              <a:t>Tags</a:t>
-            </a:r>
-            <a:r>
-              <a:rPr lang="en-US" b="0" i="0" dirty="0">
-                <a:solidFill>
-                  <a:srgbClr val="404041"/>
-                </a:solidFill>
-                <a:effectLst/>
-                <a:latin typeface="Open Sans Light" panose="020B0606030504020204" pitchFamily="34" charset="0"/>
-              </a:rPr>
-              <a:t> make content organization, discovery, and filtering easier across the Connect dashboard</a:t>
+              <a:t>View number of visitors to your content and logs</a:t>
             </a:r>
             <a:endParaRPr kumimoji="0" lang="en-US" sz="1200" b="1" i="0" u="none" strike="noStrike" cap="none" spc="0" normalizeH="0" baseline="0" dirty="0">
               <a:ln>
@@ -19537,36 +18434,6 @@
           </a:p>
         </p:txBody>
       </p:sp>
-      <p:pic>
-        <p:nvPicPr>
-          <p:cNvPr id="3186" name="Picture 3185">
-            <a:extLst>
-              <a:ext uri="{FF2B5EF4-FFF2-40B4-BE49-F238E27FC236}">
-                <a16:creationId xmlns:a16="http://schemas.microsoft.com/office/drawing/2014/main" id="{980D88C0-D5C1-7067-145B-141B666A4F1D}"/>
-              </a:ext>
-            </a:extLst>
-          </p:cNvPr>
-          <p:cNvPicPr>
-            <a:picLocks noChangeAspect="1"/>
-          </p:cNvPicPr>
-          <p:nvPr/>
-        </p:nvPicPr>
-        <p:blipFill>
-          <a:blip r:embed="rId39"/>
-          <a:stretch>
-            <a:fillRect/>
-          </a:stretch>
-        </p:blipFill>
-        <p:spPr>
-          <a:xfrm>
-            <a:off x="11917758" y="6657755"/>
-            <a:ext cx="1687273" cy="1710568"/>
-          </a:xfrm>
-          <a:prstGeom prst="rect">
-            <a:avLst/>
-          </a:prstGeom>
-        </p:spPr>
-      </p:pic>
       <p:sp>
         <p:nvSpPr>
           <p:cNvPr id="3187" name="TextBox 3186">
@@ -19581,8 +18448,8 @@
         </p:nvSpPr>
         <p:spPr>
           <a:xfrm>
-            <a:off x="10506043" y="6784909"/>
-            <a:ext cx="1538698" cy="1613181"/>
+            <a:off x="10506043" y="6692576"/>
+            <a:ext cx="1323939" cy="1797847"/>
           </a:xfrm>
           <a:prstGeom prst="rect">
             <a:avLst/>
@@ -19777,53 +18644,6 @@
           </a:p>
         </p:txBody>
       </p:sp>
-      <p:pic>
-        <p:nvPicPr>
-          <p:cNvPr id="3189" name="Picture 60" descr="End to End Data Science Workflows with Posit Team">
-            <a:extLst>
-              <a:ext uri="{FF2B5EF4-FFF2-40B4-BE49-F238E27FC236}">
-                <a16:creationId xmlns:a16="http://schemas.microsoft.com/office/drawing/2014/main" id="{9719F4AA-6AF7-D2FD-3C05-243D22784BD1}"/>
-              </a:ext>
-            </a:extLst>
-          </p:cNvPr>
-          <p:cNvPicPr>
-            <a:picLocks noChangeAspect="1" noChangeArrowheads="1"/>
-          </p:cNvPicPr>
-          <p:nvPr/>
-        </p:nvPicPr>
-        <p:blipFill>
-          <a:blip r:embed="rId40">
-            <a:extLst>
-              <a:ext uri="{28A0092B-C50C-407E-A947-70E740481C1C}">
-                <a14:useLocalDpi xmlns:a14="http://schemas.microsoft.com/office/drawing/2010/main" val="0"/>
-              </a:ext>
-            </a:extLst>
-          </a:blip>
-          <a:srcRect/>
-          <a:stretch>
-            <a:fillRect/>
-          </a:stretch>
-        </p:blipFill>
-        <p:spPr bwMode="auto">
-          <a:xfrm>
-            <a:off x="10411554" y="9085568"/>
-            <a:ext cx="1426041" cy="800960"/>
-          </a:xfrm>
-          <a:prstGeom prst="rect">
-            <a:avLst/>
-          </a:prstGeom>
-          <a:noFill/>
-          <a:extLst>
-            <a:ext uri="{909E8E84-426E-40DD-AFC4-6F175D3DCCD1}">
-              <a14:hiddenFill xmlns:a14="http://schemas.microsoft.com/office/drawing/2010/main">
-                <a:solidFill>
-                  <a:srgbClr val="FFFFFF"/>
-                </a:solidFill>
-              </a14:hiddenFill>
-            </a:ext>
-          </a:extLst>
-        </p:spPr>
-      </p:pic>
       <p:sp>
         <p:nvSpPr>
           <p:cNvPr id="3190" name="TextBox 3189">
@@ -19838,8 +18658,8 @@
         </p:nvSpPr>
         <p:spPr>
           <a:xfrm>
-            <a:off x="11837595" y="9026938"/>
-            <a:ext cx="1882643" cy="874518"/>
+            <a:off x="11837595" y="8934605"/>
+            <a:ext cx="1882643" cy="1059184"/>
           </a:xfrm>
           <a:prstGeom prst="rect">
             <a:avLst/>
@@ -19887,24 +18707,37 @@
               <a:tabLst/>
             </a:pPr>
             <a:r>
-              <a:rPr lang="en-US" b="0" i="0" dirty="0">
-                <a:solidFill>
-                  <a:srgbClr val="404041"/>
+              <a:rPr kumimoji="0" lang="en-US" sz="1200" b="0" i="0" u="none" strike="noStrike" cap="none" spc="0" normalizeH="0" baseline="0" dirty="0">
+                <a:ln>
+                  <a:noFill/>
+                </a:ln>
+                <a:solidFill>
+                  <a:srgbClr val="4C4C4C"/>
                 </a:solidFill>
                 <a:effectLst/>
+                <a:uFillTx/>
                 <a:latin typeface="Source Sans Pro" panose="020B0503030403020204" pitchFamily="34" charset="0"/>
                 <a:ea typeface="Source Sans Pro" panose="020B0503030403020204" pitchFamily="34" charset="0"/>
+                <a:sym typeface="Source Sans Pro"/>
               </a:rPr>
-              <a:t>Join our monthly Posit Team Demos on the last Wednesday of every month: </a:t>
-            </a:r>
-            <a:r>
-              <a:rPr lang="en-US" b="0" i="0" u="sng" dirty="0">
+              <a:t>Learn more about Posit Team through free on-demand courses and live workshops: </a:t>
+            </a:r>
+            <a:r>
+              <a:rPr kumimoji="0" lang="en-US" sz="1200" b="0" i="0" u="none" strike="noStrike" cap="none" spc="0" normalizeH="0" baseline="0" dirty="0">
+                <a:ln>
+                  <a:noFill/>
+                </a:ln>
+                <a:solidFill>
+                  <a:srgbClr val="4C4C4C"/>
+                </a:solidFill>
                 <a:effectLst/>
+                <a:uFillTx/>
                 <a:latin typeface="Source Sans Pro" panose="020B0503030403020204" pitchFamily="34" charset="0"/>
                 <a:ea typeface="Source Sans Pro" panose="020B0503030403020204" pitchFamily="34" charset="0"/>
-                <a:hlinkClick r:id="rId41"/>
+                <a:sym typeface="Source Sans Pro"/>
+                <a:hlinkClick r:id="rId28"/>
               </a:rPr>
-              <a:t>pos.it/team-demo</a:t>
+              <a:t>https://academy.posit.co</a:t>
             </a:r>
             <a:endParaRPr kumimoji="0" lang="en-US" sz="1200" b="0" i="0" u="none" strike="noStrike" cap="none" spc="0" normalizeH="0" baseline="0" dirty="0">
               <a:ln>
@@ -19979,8 +18812,8 @@
         </p:nvSpPr>
         <p:spPr>
           <a:xfrm>
-            <a:off x="4551314" y="3987774"/>
-            <a:ext cx="2418802" cy="500056"/>
+            <a:off x="4670694" y="4061916"/>
+            <a:ext cx="2108185" cy="474408"/>
           </a:xfrm>
           <a:prstGeom prst="rect">
             <a:avLst/>
@@ -20032,53 +18865,8 @@
                 <a:latin typeface="Source Sans Pro" panose="020B0503030403020204" pitchFamily="34" charset="0"/>
                 <a:ea typeface="Source Sans Pro" panose="020B0503030403020204" pitchFamily="34" charset="0"/>
               </a:rPr>
-              <a:t>More usage info here: </a:t>
-            </a:r>
-          </a:p>
-          <a:p>
-            <a:pPr marL="0" marR="0" indent="0" algn="ctr" defTabSz="584200" rtl="0" fontAlgn="auto" latinLnBrk="0" hangingPunct="0">
-              <a:lnSpc>
-                <a:spcPct val="100000"/>
-              </a:lnSpc>
-              <a:spcBef>
-                <a:spcPts val="200"/>
-              </a:spcBef>
-              <a:spcAft>
-                <a:spcPts val="0"/>
-              </a:spcAft>
-              <a:buClrTx/>
-              <a:buSzTx/>
-              <a:buFontTx/>
-              <a:buNone/>
-              <a:tabLst/>
-            </a:pPr>
-            <a:r>
-              <a:rPr lang="en-US" sz="1100" dirty="0" err="1">
-                <a:latin typeface="Source Sans Pro" panose="020B0503030403020204" pitchFamily="34" charset="0"/>
-                <a:ea typeface="Source Sans Pro" panose="020B0503030403020204" pitchFamily="34" charset="0"/>
-              </a:rPr>
-              <a:t>pos.it</a:t>
-            </a:r>
-            <a:r>
-              <a:rPr lang="en-US" sz="1100" dirty="0">
-                <a:latin typeface="Source Sans Pro" panose="020B0503030403020204" pitchFamily="34" charset="0"/>
-                <a:ea typeface="Source Sans Pro" panose="020B0503030403020204" pitchFamily="34" charset="0"/>
-              </a:rPr>
-              <a:t>/cookbook</a:t>
-            </a:r>
-            <a:endParaRPr kumimoji="0" lang="en-US" sz="1100" i="0" u="none" strike="noStrike" cap="none" spc="0" normalizeH="0" baseline="0" dirty="0">
-              <a:ln>
-                <a:noFill/>
-              </a:ln>
-              <a:solidFill>
-                <a:srgbClr val="4C4C4C"/>
-              </a:solidFill>
-              <a:effectLst/>
-              <a:uFillTx/>
-              <a:latin typeface="Source Sans Pro" panose="020B0503030403020204" pitchFamily="34" charset="0"/>
-              <a:ea typeface="Source Sans Pro" panose="020B0503030403020204" pitchFamily="34" charset="0"/>
-              <a:sym typeface="Source Sans Pro"/>
-            </a:endParaRPr>
+              <a:t>Share content by sharing the Content URL</a:t>
+            </a:r>
           </a:p>
         </p:txBody>
       </p:sp>
@@ -20395,7 +19183,7 @@
                 <a:ea typeface="Source Sans Pro"/>
                 <a:cs typeface="Source Sans Pro"/>
                 <a:sym typeface="Wingdings" pitchFamily="2" charset="2"/>
-                <a:hlinkClick r:id="rId42"/>
+                <a:hlinkClick r:id="rId29"/>
               </a:rPr>
               <a:t>sales@posit.co</a:t>
             </a:r>
@@ -20463,7 +19251,7 @@
                 <a:ea typeface="Source Sans Pro"/>
                 <a:cs typeface="Source Sans Pro"/>
                 <a:sym typeface="Wingdings" pitchFamily="2" charset="2"/>
-                <a:hlinkClick r:id="rId42"/>
+                <a:hlinkClick r:id="rId29"/>
               </a:rPr>
               <a:t>support@posit.co</a:t>
             </a:r>
@@ -20514,7 +19302,7 @@
                 <a:ea typeface="Source Sans Pro"/>
                 <a:cs typeface="Source Sans Pro"/>
                 <a:sym typeface="Wingdings" pitchFamily="2" charset="2"/>
-                <a:hlinkClick r:id="rId43"/>
+                <a:hlinkClick r:id="rId30"/>
               </a:rPr>
               <a:t>info@posit.co</a:t>
             </a:r>
@@ -20622,7 +19410,7 @@
           <p:nvPr/>
         </p:nvPicPr>
         <p:blipFill>
-          <a:blip r:embed="rId44">
+          <a:blip r:embed="rId31">
             <a:extLst>
               <a:ext uri="{28A0092B-C50C-407E-A947-70E740481C1C}">
                 <a14:useLocalDpi xmlns:a14="http://schemas.microsoft.com/office/drawing/2010/main" val="0"/>
@@ -20636,7 +19424,7 @@
         </p:blipFill>
         <p:spPr bwMode="auto">
           <a:xfrm>
-            <a:off x="2851015" y="7674187"/>
+            <a:off x="2795130" y="7859308"/>
             <a:ext cx="359308" cy="359308"/>
           </a:xfrm>
           <a:prstGeom prst="rect">
@@ -20681,7 +19469,7 @@
         </p:blipFill>
         <p:spPr>
           <a:xfrm>
-            <a:off x="1864592" y="7489367"/>
+            <a:off x="1491089" y="7485393"/>
             <a:ext cx="322107" cy="270502"/>
           </a:xfrm>
           <a:prstGeom prst="rect">
@@ -20703,8 +19491,8 @@
         </p:nvSpPr>
         <p:spPr>
           <a:xfrm>
-            <a:off x="3153615" y="7544004"/>
-            <a:ext cx="1066826" cy="600164"/>
+            <a:off x="3097730" y="7828779"/>
+            <a:ext cx="1066826" cy="430887"/>
           </a:xfrm>
           <a:prstGeom prst="rect">
             <a:avLst/>
@@ -20744,7 +19532,7 @@
                 <a:latin typeface="Source Sans Pro" panose="020B0503030403020204" pitchFamily="34" charset="0"/>
                 <a:ea typeface="Source Sans Pro" panose="020B0503030403020204" pitchFamily="34" charset="0"/>
               </a:rPr>
-              <a:t>VS Code Posit Publisher Extension</a:t>
+              <a:t>Posit Publisher Extension</a:t>
             </a:r>
           </a:p>
         </p:txBody>
@@ -20761,14 +19549,13 @@
           <p:cNvCxnSpPr>
             <a:cxnSpLocks/>
             <a:stCxn id="1026" idx="1"/>
-            <a:endCxn id="20" idx="3"/>
           </p:cNvCxnSpPr>
           <p:nvPr/>
         </p:nvCxnSpPr>
         <p:spPr>
           <a:xfrm flipH="1" flipV="1">
-            <a:off x="2186699" y="7624618"/>
-            <a:ext cx="664316" cy="229223"/>
+            <a:off x="2211312" y="7784337"/>
+            <a:ext cx="583818" cy="254625"/>
           </a:xfrm>
           <a:prstGeom prst="straightConnector1">
             <a:avLst/>
@@ -20814,7 +19601,7 @@
           <p:nvPr/>
         </p:nvPicPr>
         <p:blipFill>
-          <a:blip r:embed="rId45">
+          <a:blip r:embed="rId32">
             <a:extLst>
               <a:ext uri="{28A0092B-C50C-407E-A947-70E740481C1C}">
                 <a14:useLocalDpi xmlns:a14="http://schemas.microsoft.com/office/drawing/2010/main" val="0"/>
@@ -20939,7 +19726,7 @@
                 <a:latin typeface="Source Sans Pro" panose="020B0503030403020204" pitchFamily="34" charset="0"/>
                 <a:ea typeface="Source Sans Pro" panose="020B0503030403020204" pitchFamily="34" charset="0"/>
                 <a:sym typeface="Source Sans Pro"/>
-                <a:hlinkClick r:id="rId46"/>
+                <a:hlinkClick r:id="rId33"/>
               </a:rPr>
               <a:t>https://forum.posit.co</a:t>
             </a:r>
@@ -21115,7 +19902,7 @@
                 <a:ea typeface="Source Sans Pro"/>
                 <a:cs typeface="Source Sans Pro"/>
                 <a:sym typeface="Wingdings" pitchFamily="2" charset="2"/>
-                <a:hlinkClick r:id="rId47"/>
+                <a:hlinkClick r:id="rId34"/>
               </a:rPr>
               <a:t>https://docs.posit.co</a:t>
             </a:r>
@@ -21179,7 +19966,7 @@
                 <a:ea typeface="Source Sans Pro"/>
                 <a:cs typeface="Source Sans Pro"/>
                 <a:sym typeface="Wingdings" pitchFamily="2" charset="2"/>
-                <a:hlinkClick r:id="rId48"/>
+                <a:hlinkClick r:id="rId35"/>
               </a:rPr>
               <a:t>https://docs.posit.co/release-notes.html</a:t>
             </a:r>
@@ -21215,7 +20002,7 @@
           <p:nvPr/>
         </p:nvPicPr>
         <p:blipFill>
-          <a:blip r:embed="rId49">
+          <a:blip r:embed="rId36">
             <a:extLst>
               <a:ext uri="{28A0092B-C50C-407E-A947-70E740481C1C}">
                 <a14:useLocalDpi xmlns:a14="http://schemas.microsoft.com/office/drawing/2010/main" val="0"/>
@@ -21230,6 +20017,1152 @@
           <a:xfrm>
             <a:off x="4098269" y="9025364"/>
             <a:ext cx="2863629" cy="430658"/>
+          </a:xfrm>
+          <a:prstGeom prst="rect">
+            <a:avLst/>
+          </a:prstGeom>
+        </p:spPr>
+      </p:pic>
+      <p:pic>
+        <p:nvPicPr>
+          <p:cNvPr id="30" name="Picture 29">
+            <a:extLst>
+              <a:ext uri="{FF2B5EF4-FFF2-40B4-BE49-F238E27FC236}">
+                <a16:creationId xmlns:a16="http://schemas.microsoft.com/office/drawing/2014/main" id="{1D6A48CC-C047-BAD9-9D36-F06ADB64EF32}"/>
+              </a:ext>
+            </a:extLst>
+          </p:cNvPr>
+          <p:cNvPicPr>
+            <a:picLocks noChangeAspect="1"/>
+          </p:cNvPicPr>
+          <p:nvPr/>
+        </p:nvPicPr>
+        <p:blipFill>
+          <a:blip r:embed="rId37"/>
+          <a:stretch>
+            <a:fillRect/>
+          </a:stretch>
+        </p:blipFill>
+        <p:spPr>
+          <a:xfrm>
+            <a:off x="523837" y="3462618"/>
+            <a:ext cx="2416916" cy="392806"/>
+          </a:xfrm>
+          <a:prstGeom prst="rect">
+            <a:avLst/>
+          </a:prstGeom>
+        </p:spPr>
+      </p:pic>
+      <p:pic>
+        <p:nvPicPr>
+          <p:cNvPr id="34" name="Graphic 33" descr="NodeJS Vector Logo SVG - Free Download | Worldvectorlogo">
+            <a:extLst>
+              <a:ext uri="{FF2B5EF4-FFF2-40B4-BE49-F238E27FC236}">
+                <a16:creationId xmlns:a16="http://schemas.microsoft.com/office/drawing/2014/main" id="{7329FB20-2FE6-B157-1BE7-FAFE040F2D4C}"/>
+              </a:ext>
+            </a:extLst>
+          </p:cNvPr>
+          <p:cNvPicPr>
+            <a:picLocks noChangeAspect="1"/>
+          </p:cNvPicPr>
+          <p:nvPr/>
+        </p:nvPicPr>
+        <p:blipFill>
+          <a:blip>
+            <a:extLst>
+              <a:ext uri="{96DAC541-7B7A-43D3-8B79-37D633B846F1}">
+                <asvg:svgBlip xmlns:asvg="http://schemas.microsoft.com/office/drawing/2016/SVG/main" r:embed="rId38"/>
+              </a:ext>
+            </a:extLst>
+          </a:blip>
+          <a:stretch>
+            <a:fillRect/>
+          </a:stretch>
+        </p:blipFill>
+        <p:spPr>
+          <a:xfrm>
+            <a:off x="1584749" y="4275772"/>
+            <a:ext cx="1261812" cy="357345"/>
+          </a:xfrm>
+          <a:prstGeom prst="rect">
+            <a:avLst/>
+          </a:prstGeom>
+        </p:spPr>
+      </p:pic>
+      <p:sp>
+        <p:nvSpPr>
+          <p:cNvPr id="45" name="Rounded Rectangle 44">
+            <a:extLst>
+              <a:ext uri="{FF2B5EF4-FFF2-40B4-BE49-F238E27FC236}">
+                <a16:creationId xmlns:a16="http://schemas.microsoft.com/office/drawing/2014/main" id="{F4A61AF1-D217-9240-4405-8883EED9E927}"/>
+              </a:ext>
+            </a:extLst>
+          </p:cNvPr>
+          <p:cNvSpPr>
+            <a:spLocks/>
+          </p:cNvSpPr>
+          <p:nvPr/>
+        </p:nvSpPr>
+        <p:spPr>
+          <a:xfrm>
+            <a:off x="254581" y="4122795"/>
+            <a:ext cx="3867946" cy="707720"/>
+          </a:xfrm>
+          <a:prstGeom prst="roundRect">
+            <a:avLst/>
+          </a:prstGeom>
+          <a:noFill/>
+          <a:ln w="12700" cap="flat">
+            <a:solidFill>
+              <a:srgbClr val="404041"/>
+            </a:solidFill>
+            <a:prstDash val="dash"/>
+            <a:miter lim="400000"/>
+          </a:ln>
+          <a:effectLst/>
+          <a:sp3d/>
+        </p:spPr>
+        <p:style>
+          <a:lnRef idx="0">
+            <a:scrgbClr r="0" g="0" b="0"/>
+          </a:lnRef>
+          <a:fillRef idx="0">
+            <a:scrgbClr r="0" g="0" b="0"/>
+          </a:fillRef>
+          <a:effectRef idx="0">
+            <a:scrgbClr r="0" g="0" b="0"/>
+          </a:effectRef>
+          <a:fontRef idx="none"/>
+        </p:style>
+        <p:txBody>
+          <a:bodyPr rot="0" spcFirstLastPara="1" vertOverflow="overflow" horzOverflow="overflow" vert="horz" wrap="square" lIns="54570" tIns="54570" rIns="54570" bIns="54570" numCol="1" spcCol="38100" rtlCol="0" anchor="ctr">
+            <a:noAutofit/>
+          </a:bodyPr>
+          <a:lstStyle/>
+          <a:p>
+            <a:pPr marL="0" marR="0" indent="0" algn="l" defTabSz="584200" rtl="0" fontAlgn="auto" latinLnBrk="0" hangingPunct="0">
+              <a:lnSpc>
+                <a:spcPct val="80000"/>
+              </a:lnSpc>
+              <a:spcBef>
+                <a:spcPts val="0"/>
+              </a:spcBef>
+              <a:spcAft>
+                <a:spcPts val="0"/>
+              </a:spcAft>
+              <a:buClrTx/>
+              <a:buSzTx/>
+              <a:buFontTx/>
+              <a:buNone/>
+              <a:tabLst/>
+            </a:pPr>
+            <a:endParaRPr kumimoji="0" lang="en-US" sz="1200" b="0" i="0" u="none" strike="noStrike" cap="none" spc="0" normalizeH="0" baseline="0">
+              <a:ln>
+                <a:noFill/>
+              </a:ln>
+              <a:solidFill>
+                <a:srgbClr val="000000"/>
+              </a:solidFill>
+              <a:effectLst/>
+              <a:uFillTx/>
+              <a:latin typeface="Source Sans Pro"/>
+              <a:ea typeface="Source Sans Pro"/>
+              <a:cs typeface="Source Sans Pro"/>
+              <a:sym typeface="Source Sans Pro"/>
+            </a:endParaRPr>
+          </a:p>
+        </p:txBody>
+      </p:sp>
+      <p:sp>
+        <p:nvSpPr>
+          <p:cNvPr id="47" name="TextBox 46">
+            <a:extLst>
+              <a:ext uri="{FF2B5EF4-FFF2-40B4-BE49-F238E27FC236}">
+                <a16:creationId xmlns:a16="http://schemas.microsoft.com/office/drawing/2014/main" id="{02465B0E-016E-A3A6-D4ED-E1A4F9F15A3B}"/>
+              </a:ext>
+            </a:extLst>
+          </p:cNvPr>
+          <p:cNvSpPr txBox="1"/>
+          <p:nvPr/>
+        </p:nvSpPr>
+        <p:spPr>
+          <a:xfrm>
+            <a:off x="761708" y="3950842"/>
+            <a:ext cx="734583" cy="351297"/>
+          </a:xfrm>
+          <a:prstGeom prst="rect">
+            <a:avLst/>
+          </a:prstGeom>
+          <a:solidFill>
+            <a:schemeClr val="bg1"/>
+          </a:solidFill>
+          <a:ln w="12700" cap="flat">
+            <a:noFill/>
+            <a:miter lim="400000"/>
+          </a:ln>
+          <a:effectLst/>
+          <a:sp3d/>
+        </p:spPr>
+        <p:style>
+          <a:lnRef idx="0">
+            <a:scrgbClr r="0" g="0" b="0"/>
+          </a:lnRef>
+          <a:fillRef idx="0">
+            <a:scrgbClr r="0" g="0" b="0"/>
+          </a:fillRef>
+          <a:effectRef idx="0">
+            <a:scrgbClr r="0" g="0" b="0"/>
+          </a:effectRef>
+          <a:fontRef idx="none"/>
+        </p:style>
+        <p:txBody>
+          <a:bodyPr rot="0" spcFirstLastPara="1" vertOverflow="overflow" horzOverflow="overflow" vert="horz" wrap="square" lIns="54570" tIns="54570" rIns="54570" bIns="54570" numCol="1" spcCol="38100" rtlCol="0" anchor="ctr">
+            <a:spAutoFit/>
+          </a:bodyPr>
+          <a:lstStyle/>
+          <a:p>
+            <a:pPr marL="0" marR="0" indent="0" algn="ctr" defTabSz="584200" rtl="0" fontAlgn="auto" latinLnBrk="0" hangingPunct="0">
+              <a:lnSpc>
+                <a:spcPct val="100000"/>
+              </a:lnSpc>
+              <a:spcBef>
+                <a:spcPts val="200"/>
+              </a:spcBef>
+              <a:spcAft>
+                <a:spcPts val="0"/>
+              </a:spcAft>
+              <a:buClrTx/>
+              <a:buSzTx/>
+              <a:buFontTx/>
+              <a:buNone/>
+              <a:tabLst/>
+            </a:pPr>
+            <a:r>
+              <a:rPr kumimoji="0" lang="en-US" sz="1400" b="1" i="0" u="none" strike="noStrike" cap="none" spc="0" normalizeH="0" baseline="0" dirty="0">
+                <a:ln>
+                  <a:noFill/>
+                </a:ln>
+                <a:solidFill>
+                  <a:srgbClr val="4C4C4C"/>
+                </a:solidFill>
+                <a:effectLst/>
+                <a:uFillTx/>
+                <a:latin typeface="Source Sans Pro"/>
+                <a:ea typeface="Source Sans Pro"/>
+                <a:cs typeface="Source Sans Pro"/>
+                <a:sym typeface="Source Sans Pro"/>
+              </a:rPr>
+              <a:t>Node.js</a:t>
+            </a:r>
+          </a:p>
+        </p:txBody>
+      </p:sp>
+      <p:pic>
+        <p:nvPicPr>
+          <p:cNvPr id="49" name="Picture 48">
+            <a:extLst>
+              <a:ext uri="{FF2B5EF4-FFF2-40B4-BE49-F238E27FC236}">
+                <a16:creationId xmlns:a16="http://schemas.microsoft.com/office/drawing/2014/main" id="{5FCA053C-F927-8D53-BB28-470CE2E09CB6}"/>
+              </a:ext>
+            </a:extLst>
+          </p:cNvPr>
+          <p:cNvPicPr>
+            <a:picLocks noChangeAspect="1"/>
+          </p:cNvPicPr>
+          <p:nvPr/>
+        </p:nvPicPr>
+        <p:blipFill>
+          <a:blip r:embed="rId39"/>
+          <a:stretch>
+            <a:fillRect/>
+          </a:stretch>
+        </p:blipFill>
+        <p:spPr>
+          <a:xfrm>
+            <a:off x="1865131" y="7441405"/>
+            <a:ext cx="358479" cy="358479"/>
+          </a:xfrm>
+          <a:prstGeom prst="rect">
+            <a:avLst/>
+          </a:prstGeom>
+        </p:spPr>
+      </p:pic>
+      <p:cxnSp>
+        <p:nvCxnSpPr>
+          <p:cNvPr id="52" name="Straight Arrow Connector 51">
+            <a:extLst>
+              <a:ext uri="{FF2B5EF4-FFF2-40B4-BE49-F238E27FC236}">
+                <a16:creationId xmlns:a16="http://schemas.microsoft.com/office/drawing/2014/main" id="{8325533E-AF67-CD3E-0799-1E68C5BF9972}"/>
+              </a:ext>
+            </a:extLst>
+          </p:cNvPr>
+          <p:cNvCxnSpPr>
+            <a:cxnSpLocks/>
+            <a:stCxn id="1026" idx="1"/>
+          </p:cNvCxnSpPr>
+          <p:nvPr/>
+        </p:nvCxnSpPr>
+        <p:spPr>
+          <a:xfrm flipH="1" flipV="1">
+            <a:off x="1801762" y="7784337"/>
+            <a:ext cx="993368" cy="254625"/>
+          </a:xfrm>
+          <a:prstGeom prst="straightConnector1">
+            <a:avLst/>
+          </a:prstGeom>
+          <a:noFill/>
+          <a:ln w="12700" cap="flat">
+            <a:solidFill>
+              <a:srgbClr val="000000"/>
+            </a:solidFill>
+            <a:prstDash val="sysDot"/>
+            <a:miter lim="400000"/>
+            <a:headEnd type="none" w="med" len="med"/>
+            <a:tailEnd type="none" w="med" len="med"/>
+          </a:ln>
+          <a:effectLst/>
+          <a:sp3d/>
+        </p:spPr>
+        <p:style>
+          <a:lnRef idx="0">
+            <a:scrgbClr r="0" g="0" b="0"/>
+          </a:lnRef>
+          <a:fillRef idx="0">
+            <a:scrgbClr r="0" g="0" b="0"/>
+          </a:fillRef>
+          <a:effectRef idx="0">
+            <a:scrgbClr r="0" g="0" b="0"/>
+          </a:effectRef>
+          <a:fontRef idx="none"/>
+        </p:style>
+      </p:cxnSp>
+      <p:pic>
+        <p:nvPicPr>
+          <p:cNvPr id="58" name="Picture 57">
+            <a:extLst>
+              <a:ext uri="{FF2B5EF4-FFF2-40B4-BE49-F238E27FC236}">
+                <a16:creationId xmlns:a16="http://schemas.microsoft.com/office/drawing/2014/main" id="{EE5BA7B6-A396-4C1A-8A5C-736C4ED828C5}"/>
+              </a:ext>
+            </a:extLst>
+          </p:cNvPr>
+          <p:cNvPicPr>
+            <a:picLocks noChangeAspect="1"/>
+          </p:cNvPicPr>
+          <p:nvPr/>
+        </p:nvPicPr>
+        <p:blipFill>
+          <a:blip r:embed="rId39"/>
+          <a:stretch>
+            <a:fillRect/>
+          </a:stretch>
+        </p:blipFill>
+        <p:spPr>
+          <a:xfrm>
+            <a:off x="1869328" y="6586836"/>
+            <a:ext cx="358479" cy="358479"/>
+          </a:xfrm>
+          <a:prstGeom prst="rect">
+            <a:avLst/>
+          </a:prstGeom>
+        </p:spPr>
+      </p:pic>
+      <p:pic>
+        <p:nvPicPr>
+          <p:cNvPr id="3136" name="Picture 3135" descr="Panel v1.9.4 - Home">
+            <a:extLst>
+              <a:ext uri="{FF2B5EF4-FFF2-40B4-BE49-F238E27FC236}">
+                <a16:creationId xmlns:a16="http://schemas.microsoft.com/office/drawing/2014/main" id="{AC1EBD98-65CE-7C2B-D98B-3134D8BCA4FC}"/>
+              </a:ext>
+            </a:extLst>
+          </p:cNvPr>
+          <p:cNvPicPr>
+            <a:picLocks noChangeAspect="1"/>
+          </p:cNvPicPr>
+          <p:nvPr/>
+        </p:nvPicPr>
+        <p:blipFill>
+          <a:blip r:embed="rId40"/>
+          <a:stretch>
+            <a:fillRect/>
+          </a:stretch>
+        </p:blipFill>
+        <p:spPr>
+          <a:xfrm>
+            <a:off x="2931513" y="2073398"/>
+            <a:ext cx="933593" cy="219096"/>
+          </a:xfrm>
+          <a:prstGeom prst="rect">
+            <a:avLst/>
+          </a:prstGeom>
+        </p:spPr>
+      </p:pic>
+      <p:pic>
+        <p:nvPicPr>
+          <p:cNvPr id="3137" name="Picture 3136">
+            <a:extLst>
+              <a:ext uri="{FF2B5EF4-FFF2-40B4-BE49-F238E27FC236}">
+                <a16:creationId xmlns:a16="http://schemas.microsoft.com/office/drawing/2014/main" id="{7CC0D37E-726E-4C36-C173-36E79EECA0F6}"/>
+              </a:ext>
+            </a:extLst>
+          </p:cNvPr>
+          <p:cNvPicPr>
+            <a:picLocks noChangeAspect="1"/>
+          </p:cNvPicPr>
+          <p:nvPr/>
+        </p:nvPicPr>
+        <p:blipFill>
+          <a:blip r:embed="rId41"/>
+          <a:stretch>
+            <a:fillRect/>
+          </a:stretch>
+        </p:blipFill>
+        <p:spPr>
+          <a:xfrm>
+            <a:off x="4974096" y="2205387"/>
+            <a:ext cx="1515714" cy="1827847"/>
+          </a:xfrm>
+          <a:prstGeom prst="rect">
+            <a:avLst/>
+          </a:prstGeom>
+        </p:spPr>
+      </p:pic>
+      <p:cxnSp>
+        <p:nvCxnSpPr>
+          <p:cNvPr id="3142" name="Straight Arrow Connector 3141">
+            <a:extLst>
+              <a:ext uri="{FF2B5EF4-FFF2-40B4-BE49-F238E27FC236}">
+                <a16:creationId xmlns:a16="http://schemas.microsoft.com/office/drawing/2014/main" id="{29A35F9F-2589-D96F-622A-0CA9D0CBDB40}"/>
+              </a:ext>
+            </a:extLst>
+          </p:cNvPr>
+          <p:cNvCxnSpPr>
+            <a:cxnSpLocks/>
+          </p:cNvCxnSpPr>
+          <p:nvPr/>
+        </p:nvCxnSpPr>
+        <p:spPr>
+          <a:xfrm flipV="1">
+            <a:off x="5165558" y="3600451"/>
+            <a:ext cx="267368" cy="540833"/>
+          </a:xfrm>
+          <a:prstGeom prst="straightConnector1">
+            <a:avLst/>
+          </a:prstGeom>
+          <a:noFill/>
+          <a:ln w="12700" cap="flat">
+            <a:solidFill>
+              <a:srgbClr val="000000"/>
+            </a:solidFill>
+            <a:prstDash val="sysDot"/>
+            <a:miter lim="400000"/>
+            <a:headEnd type="none" w="med" len="med"/>
+            <a:tailEnd type="none" w="med" len="med"/>
+          </a:ln>
+          <a:effectLst/>
+          <a:sp3d/>
+        </p:spPr>
+        <p:style>
+          <a:lnRef idx="0">
+            <a:scrgbClr r="0" g="0" b="0"/>
+          </a:lnRef>
+          <a:fillRef idx="0">
+            <a:scrgbClr r="0" g="0" b="0"/>
+          </a:fillRef>
+          <a:effectRef idx="0">
+            <a:scrgbClr r="0" g="0" b="0"/>
+          </a:effectRef>
+          <a:fontRef idx="none"/>
+        </p:style>
+      </p:cxnSp>
+      <p:sp>
+        <p:nvSpPr>
+          <p:cNvPr id="3150" name="TextBox 3149">
+            <a:extLst>
+              <a:ext uri="{FF2B5EF4-FFF2-40B4-BE49-F238E27FC236}">
+                <a16:creationId xmlns:a16="http://schemas.microsoft.com/office/drawing/2014/main" id="{04C6B2E6-A030-4698-ED66-20DDBD52C9C5}"/>
+              </a:ext>
+            </a:extLst>
+          </p:cNvPr>
+          <p:cNvSpPr txBox="1"/>
+          <p:nvPr/>
+        </p:nvSpPr>
+        <p:spPr>
+          <a:xfrm>
+            <a:off x="4553724" y="4824245"/>
+            <a:ext cx="2294305" cy="651460"/>
+          </a:xfrm>
+          <a:prstGeom prst="rect">
+            <a:avLst/>
+          </a:prstGeom>
+          <a:noFill/>
+          <a:ln w="12700" cap="flat">
+            <a:noFill/>
+            <a:miter lim="400000"/>
+          </a:ln>
+          <a:effectLst/>
+          <a:sp3d/>
+        </p:spPr>
+        <p:style>
+          <a:lnRef idx="0">
+            <a:scrgbClr r="0" g="0" b="0"/>
+          </a:lnRef>
+          <a:fillRef idx="0">
+            <a:scrgbClr r="0" g="0" b="0"/>
+          </a:fillRef>
+          <a:effectRef idx="0">
+            <a:scrgbClr r="0" g="0" b="0"/>
+          </a:effectRef>
+          <a:fontRef idx="none"/>
+        </p:style>
+        <p:txBody>
+          <a:bodyPr wrap="square">
+            <a:spAutoFit/>
+          </a:bodyPr>
+          <a:lstStyle/>
+          <a:p>
+            <a:pPr marL="171450" indent="-171450">
+              <a:buFontTx/>
+              <a:buChar char="-"/>
+            </a:pPr>
+            <a:r>
+              <a:rPr lang="en-US" sz="1100" b="0" i="0" dirty="0">
+                <a:solidFill>
+                  <a:srgbClr val="404041"/>
+                </a:solidFill>
+                <a:effectLst/>
+                <a:latin typeface="Open Sans Light" panose="020B0606030504020204" pitchFamily="34" charset="0"/>
+              </a:rPr>
+              <a:t>Content Bundles</a:t>
+            </a:r>
+          </a:p>
+          <a:p>
+            <a:pPr marL="171450" indent="-171450">
+              <a:buFontTx/>
+              <a:buChar char="-"/>
+            </a:pPr>
+            <a:r>
+              <a:rPr lang="en-US" sz="1100" b="0" dirty="0">
+                <a:solidFill>
+                  <a:srgbClr val="404041"/>
+                </a:solidFill>
+                <a:latin typeface="Open Sans Light" panose="020B0606030504020204" pitchFamily="34" charset="0"/>
+              </a:rPr>
+              <a:t>Language/Quarto Versions</a:t>
+            </a:r>
+          </a:p>
+          <a:p>
+            <a:pPr marL="171450" indent="-171450">
+              <a:buFontTx/>
+              <a:buChar char="-"/>
+            </a:pPr>
+            <a:r>
+              <a:rPr lang="en-US" sz="1100" b="0" i="0" dirty="0">
+                <a:solidFill>
+                  <a:srgbClr val="404041"/>
+                </a:solidFill>
+                <a:effectLst/>
+                <a:latin typeface="Open Sans Light" panose="020B0606030504020204" pitchFamily="34" charset="0"/>
+              </a:rPr>
+              <a:t>Package Dependencies</a:t>
+            </a:r>
+          </a:p>
+        </p:txBody>
+      </p:sp>
+      <p:pic>
+        <p:nvPicPr>
+          <p:cNvPr id="3153" name="Picture 3152">
+            <a:extLst>
+              <a:ext uri="{FF2B5EF4-FFF2-40B4-BE49-F238E27FC236}">
+                <a16:creationId xmlns:a16="http://schemas.microsoft.com/office/drawing/2014/main" id="{60AFBD8A-D274-717C-1DE3-07CD26799DCF}"/>
+              </a:ext>
+            </a:extLst>
+          </p:cNvPr>
+          <p:cNvPicPr>
+            <a:picLocks noChangeAspect="1"/>
+          </p:cNvPicPr>
+          <p:nvPr/>
+        </p:nvPicPr>
+        <p:blipFill>
+          <a:blip r:embed="rId42"/>
+          <a:srcRect b="23673"/>
+          <a:stretch>
+            <a:fillRect/>
+          </a:stretch>
+        </p:blipFill>
+        <p:spPr>
+          <a:xfrm>
+            <a:off x="4592843" y="5478760"/>
+            <a:ext cx="2278219" cy="1634840"/>
+          </a:xfrm>
+          <a:prstGeom prst="rect">
+            <a:avLst/>
+          </a:prstGeom>
+        </p:spPr>
+      </p:pic>
+      <p:sp>
+        <p:nvSpPr>
+          <p:cNvPr id="3171" name="Rounded Rectangle 3170">
+            <a:extLst>
+              <a:ext uri="{FF2B5EF4-FFF2-40B4-BE49-F238E27FC236}">
+                <a16:creationId xmlns:a16="http://schemas.microsoft.com/office/drawing/2014/main" id="{C8BBEDDB-751F-B6A4-0725-46994DE2E3E3}"/>
+              </a:ext>
+            </a:extLst>
+          </p:cNvPr>
+          <p:cNvSpPr>
+            <a:spLocks/>
+          </p:cNvSpPr>
+          <p:nvPr/>
+        </p:nvSpPr>
+        <p:spPr>
+          <a:xfrm>
+            <a:off x="4551313" y="7332884"/>
+            <a:ext cx="2361279" cy="1264574"/>
+          </a:xfrm>
+          <a:prstGeom prst="roundRect">
+            <a:avLst>
+              <a:gd name="adj" fmla="val 3961"/>
+            </a:avLst>
+          </a:prstGeom>
+          <a:noFill/>
+          <a:ln w="12700" cap="flat">
+            <a:solidFill>
+              <a:srgbClr val="404041"/>
+            </a:solidFill>
+            <a:prstDash val="dash"/>
+            <a:miter lim="400000"/>
+          </a:ln>
+          <a:effectLst/>
+          <a:sp3d/>
+        </p:spPr>
+        <p:style>
+          <a:lnRef idx="0">
+            <a:scrgbClr r="0" g="0" b="0"/>
+          </a:lnRef>
+          <a:fillRef idx="0">
+            <a:scrgbClr r="0" g="0" b="0"/>
+          </a:fillRef>
+          <a:effectRef idx="0">
+            <a:scrgbClr r="0" g="0" b="0"/>
+          </a:effectRef>
+          <a:fontRef idx="none"/>
+        </p:style>
+        <p:txBody>
+          <a:bodyPr rot="0" spcFirstLastPara="1" vertOverflow="overflow" horzOverflow="overflow" vert="horz" wrap="square" lIns="54570" tIns="54570" rIns="54570" bIns="54570" numCol="1" spcCol="38100" rtlCol="0" anchor="ctr">
+            <a:noAutofit/>
+          </a:bodyPr>
+          <a:lstStyle/>
+          <a:p>
+            <a:pPr marL="0" marR="0" indent="0" algn="l" defTabSz="584200" rtl="0" fontAlgn="auto" latinLnBrk="0" hangingPunct="0">
+              <a:lnSpc>
+                <a:spcPct val="80000"/>
+              </a:lnSpc>
+              <a:spcBef>
+                <a:spcPts val="0"/>
+              </a:spcBef>
+              <a:spcAft>
+                <a:spcPts val="0"/>
+              </a:spcAft>
+              <a:buClrTx/>
+              <a:buSzTx/>
+              <a:buFontTx/>
+              <a:buNone/>
+              <a:tabLst/>
+            </a:pPr>
+            <a:endParaRPr kumimoji="0" lang="en-US" sz="1200" b="0" i="0" u="none" strike="noStrike" cap="none" spc="0" normalizeH="0" baseline="0">
+              <a:ln>
+                <a:noFill/>
+              </a:ln>
+              <a:solidFill>
+                <a:srgbClr val="000000"/>
+              </a:solidFill>
+              <a:effectLst/>
+              <a:uFillTx/>
+              <a:latin typeface="Source Sans Pro"/>
+              <a:ea typeface="Source Sans Pro"/>
+              <a:cs typeface="Source Sans Pro"/>
+              <a:sym typeface="Source Sans Pro"/>
+            </a:endParaRPr>
+          </a:p>
+        </p:txBody>
+      </p:sp>
+      <p:sp>
+        <p:nvSpPr>
+          <p:cNvPr id="3173" name="Rectangle 3172">
+            <a:extLst>
+              <a:ext uri="{FF2B5EF4-FFF2-40B4-BE49-F238E27FC236}">
+                <a16:creationId xmlns:a16="http://schemas.microsoft.com/office/drawing/2014/main" id="{76EA49D1-6FFE-ECF5-5167-20B1B28FB4C7}"/>
+              </a:ext>
+            </a:extLst>
+          </p:cNvPr>
+          <p:cNvSpPr/>
+          <p:nvPr/>
+        </p:nvSpPr>
+        <p:spPr>
+          <a:xfrm>
+            <a:off x="4705640" y="7248434"/>
+            <a:ext cx="717346" cy="166696"/>
+          </a:xfrm>
+          <a:prstGeom prst="rect">
+            <a:avLst/>
+          </a:prstGeom>
+          <a:solidFill>
+            <a:schemeClr val="bg1"/>
+          </a:solidFill>
+          <a:ln w="12700" cap="flat">
+            <a:noFill/>
+            <a:miter lim="400000"/>
+          </a:ln>
+          <a:effectLst/>
+          <a:sp3d/>
+        </p:spPr>
+        <p:style>
+          <a:lnRef idx="0">
+            <a:scrgbClr r="0" g="0" b="0"/>
+          </a:lnRef>
+          <a:fillRef idx="0">
+            <a:scrgbClr r="0" g="0" b="0"/>
+          </a:fillRef>
+          <a:effectRef idx="0">
+            <a:scrgbClr r="0" g="0" b="0"/>
+          </a:effectRef>
+          <a:fontRef idx="none"/>
+        </p:style>
+        <p:txBody>
+          <a:bodyPr rot="0" spcFirstLastPara="1" vertOverflow="overflow" horzOverflow="overflow" vert="horz" wrap="square" lIns="54570" tIns="54570" rIns="54570" bIns="54570" numCol="1" spcCol="38100" rtlCol="0" anchor="ctr">
+            <a:noAutofit/>
+          </a:bodyPr>
+          <a:lstStyle/>
+          <a:p>
+            <a:pPr marL="0" marR="0" indent="0" algn="l" defTabSz="584200" rtl="0" fontAlgn="auto" latinLnBrk="0" hangingPunct="0">
+              <a:lnSpc>
+                <a:spcPct val="80000"/>
+              </a:lnSpc>
+              <a:spcBef>
+                <a:spcPts val="0"/>
+              </a:spcBef>
+              <a:spcAft>
+                <a:spcPts val="0"/>
+              </a:spcAft>
+              <a:buClrTx/>
+              <a:buSzTx/>
+              <a:buFontTx/>
+              <a:buNone/>
+              <a:tabLst/>
+            </a:pPr>
+            <a:endParaRPr kumimoji="0" lang="en-US" sz="1200" b="0" i="0" u="none" strike="noStrike" cap="none" spc="0" normalizeH="0" baseline="0">
+              <a:ln>
+                <a:noFill/>
+              </a:ln>
+              <a:solidFill>
+                <a:srgbClr val="000000"/>
+              </a:solidFill>
+              <a:effectLst/>
+              <a:uFillTx/>
+              <a:latin typeface="Source Sans Pro"/>
+              <a:ea typeface="Source Sans Pro"/>
+              <a:cs typeface="Source Sans Pro"/>
+              <a:sym typeface="Source Sans Pro"/>
+            </a:endParaRPr>
+          </a:p>
+        </p:txBody>
+      </p:sp>
+      <p:sp>
+        <p:nvSpPr>
+          <p:cNvPr id="3175" name="TextBox 3174">
+            <a:extLst>
+              <a:ext uri="{FF2B5EF4-FFF2-40B4-BE49-F238E27FC236}">
+                <a16:creationId xmlns:a16="http://schemas.microsoft.com/office/drawing/2014/main" id="{59814883-4677-5FB9-7157-06A3C1C15B9F}"/>
+              </a:ext>
+            </a:extLst>
+          </p:cNvPr>
+          <p:cNvSpPr txBox="1"/>
+          <p:nvPr/>
+        </p:nvSpPr>
+        <p:spPr>
+          <a:xfrm>
+            <a:off x="4696760" y="7134645"/>
+            <a:ext cx="993593" cy="382075"/>
+          </a:xfrm>
+          <a:prstGeom prst="rect">
+            <a:avLst/>
+          </a:prstGeom>
+          <a:noFill/>
+          <a:ln w="12700" cap="flat">
+            <a:noFill/>
+            <a:miter lim="400000"/>
+          </a:ln>
+          <a:effectLst/>
+          <a:sp3d/>
+        </p:spPr>
+        <p:style>
+          <a:lnRef idx="0">
+            <a:scrgbClr r="0" g="0" b="0"/>
+          </a:lnRef>
+          <a:fillRef idx="0">
+            <a:scrgbClr r="0" g="0" b="0"/>
+          </a:fillRef>
+          <a:effectRef idx="0">
+            <a:scrgbClr r="0" g="0" b="0"/>
+          </a:effectRef>
+          <a:fontRef idx="none"/>
+        </p:style>
+        <p:txBody>
+          <a:bodyPr rot="0" spcFirstLastPara="1" vertOverflow="overflow" horzOverflow="overflow" vert="horz" wrap="square" lIns="54570" tIns="54570" rIns="54570" bIns="54570" numCol="1" spcCol="38100" rtlCol="0" anchor="ctr">
+            <a:spAutoFit/>
+          </a:bodyPr>
+          <a:lstStyle/>
+          <a:p>
+            <a:pPr marL="0" marR="0" indent="0" defTabSz="584200" rtl="0" fontAlgn="auto" latinLnBrk="0" hangingPunct="0">
+              <a:lnSpc>
+                <a:spcPct val="100000"/>
+              </a:lnSpc>
+              <a:spcBef>
+                <a:spcPts val="200"/>
+              </a:spcBef>
+              <a:spcAft>
+                <a:spcPts val="0"/>
+              </a:spcAft>
+              <a:buClrTx/>
+              <a:buSzTx/>
+              <a:buFontTx/>
+              <a:buNone/>
+              <a:tabLst/>
+            </a:pPr>
+            <a:r>
+              <a:rPr lang="en-US" sz="1600" dirty="0"/>
+              <a:t>Access</a:t>
+            </a:r>
+            <a:endParaRPr kumimoji="0" lang="en-US" sz="1600" b="1" i="0" u="none" strike="noStrike" cap="none" spc="0" normalizeH="0" baseline="0" dirty="0">
+              <a:ln>
+                <a:noFill/>
+              </a:ln>
+              <a:solidFill>
+                <a:srgbClr val="4C4C4C"/>
+              </a:solidFill>
+              <a:effectLst/>
+              <a:uFillTx/>
+              <a:latin typeface="Source Sans Pro"/>
+              <a:ea typeface="Source Sans Pro"/>
+              <a:cs typeface="Source Sans Pro"/>
+              <a:sym typeface="Source Sans Pro"/>
+            </a:endParaRPr>
+          </a:p>
+        </p:txBody>
+      </p:sp>
+      <p:pic>
+        <p:nvPicPr>
+          <p:cNvPr id="3176" name="Picture 3175">
+            <a:extLst>
+              <a:ext uri="{FF2B5EF4-FFF2-40B4-BE49-F238E27FC236}">
+                <a16:creationId xmlns:a16="http://schemas.microsoft.com/office/drawing/2014/main" id="{76E29FC4-220C-02A0-CBED-81A18DF10C69}"/>
+              </a:ext>
+            </a:extLst>
+          </p:cNvPr>
+          <p:cNvPicPr>
+            <a:picLocks noChangeAspect="1"/>
+          </p:cNvPicPr>
+          <p:nvPr/>
+        </p:nvPicPr>
+        <p:blipFill>
+          <a:blip r:embed="rId43"/>
+          <a:stretch>
+            <a:fillRect/>
+          </a:stretch>
+        </p:blipFill>
+        <p:spPr>
+          <a:xfrm>
+            <a:off x="4625601" y="7544004"/>
+            <a:ext cx="1875999" cy="975988"/>
+          </a:xfrm>
+          <a:prstGeom prst="rect">
+            <a:avLst/>
+          </a:prstGeom>
+        </p:spPr>
+      </p:pic>
+      <p:sp>
+        <p:nvSpPr>
+          <p:cNvPr id="3191" name="TextBox 3190">
+            <a:extLst>
+              <a:ext uri="{FF2B5EF4-FFF2-40B4-BE49-F238E27FC236}">
+                <a16:creationId xmlns:a16="http://schemas.microsoft.com/office/drawing/2014/main" id="{E7AF3EE5-C7E9-8C31-681A-56F52019E583}"/>
+              </a:ext>
+            </a:extLst>
+          </p:cNvPr>
+          <p:cNvSpPr txBox="1"/>
+          <p:nvPr/>
+        </p:nvSpPr>
+        <p:spPr>
+          <a:xfrm>
+            <a:off x="5560978" y="7366879"/>
+            <a:ext cx="1306341" cy="474408"/>
+          </a:xfrm>
+          <a:prstGeom prst="rect">
+            <a:avLst/>
+          </a:prstGeom>
+          <a:solidFill>
+            <a:schemeClr val="bg1"/>
+          </a:solidFill>
+          <a:ln w="12700" cap="flat">
+            <a:noFill/>
+            <a:miter lim="400000"/>
+          </a:ln>
+          <a:effectLst/>
+          <a:sp3d/>
+        </p:spPr>
+        <p:style>
+          <a:lnRef idx="0">
+            <a:scrgbClr r="0" g="0" b="0"/>
+          </a:lnRef>
+          <a:fillRef idx="0">
+            <a:scrgbClr r="0" g="0" b="0"/>
+          </a:fillRef>
+          <a:effectRef idx="0">
+            <a:scrgbClr r="0" g="0" b="0"/>
+          </a:effectRef>
+          <a:fontRef idx="none"/>
+        </p:style>
+        <p:txBody>
+          <a:bodyPr rot="0" spcFirstLastPara="1" vertOverflow="overflow" horzOverflow="overflow" vert="horz" wrap="square" lIns="54570" tIns="54570" rIns="54570" bIns="54570" numCol="1" spcCol="38100" rtlCol="0" anchor="ctr">
+            <a:spAutoFit/>
+          </a:bodyPr>
+          <a:lstStyle/>
+          <a:p>
+            <a:pPr marL="0" marR="0" indent="0" algn="ctr" defTabSz="584200" rtl="0" fontAlgn="auto" latinLnBrk="0" hangingPunct="0">
+              <a:lnSpc>
+                <a:spcPct val="100000"/>
+              </a:lnSpc>
+              <a:spcBef>
+                <a:spcPts val="200"/>
+              </a:spcBef>
+              <a:spcAft>
+                <a:spcPts val="0"/>
+              </a:spcAft>
+              <a:buClrTx/>
+              <a:buSzTx/>
+              <a:buFontTx/>
+              <a:buNone/>
+              <a:tabLst/>
+            </a:pPr>
+            <a:r>
+              <a:rPr lang="en-US" sz="1100" b="0" dirty="0">
+                <a:latin typeface="Source Sans Pro" panose="020B0503030403020204" pitchFamily="34" charset="0"/>
+                <a:ea typeface="Source Sans Pro" panose="020B0503030403020204" pitchFamily="34" charset="0"/>
+              </a:rPr>
+              <a:t>Configure who can access your content</a:t>
+            </a:r>
+          </a:p>
+        </p:txBody>
+      </p:sp>
+      <p:pic>
+        <p:nvPicPr>
+          <p:cNvPr id="3199" name="Picture 3198">
+            <a:extLst>
+              <a:ext uri="{FF2B5EF4-FFF2-40B4-BE49-F238E27FC236}">
+                <a16:creationId xmlns:a16="http://schemas.microsoft.com/office/drawing/2014/main" id="{A3669030-AF2E-1CA7-B5FD-A51C6279C918}"/>
+              </a:ext>
+            </a:extLst>
+          </p:cNvPr>
+          <p:cNvPicPr>
+            <a:picLocks noChangeAspect="1"/>
+          </p:cNvPicPr>
+          <p:nvPr/>
+        </p:nvPicPr>
+        <p:blipFill>
+          <a:blip r:embed="rId44"/>
+          <a:stretch>
+            <a:fillRect/>
+          </a:stretch>
+        </p:blipFill>
+        <p:spPr>
+          <a:xfrm>
+            <a:off x="7111989" y="1794189"/>
+            <a:ext cx="3121434" cy="1214344"/>
+          </a:xfrm>
+          <a:prstGeom prst="rect">
+            <a:avLst/>
+          </a:prstGeom>
+        </p:spPr>
+      </p:pic>
+      <p:pic>
+        <p:nvPicPr>
+          <p:cNvPr id="1025" name="Picture 1024">
+            <a:extLst>
+              <a:ext uri="{FF2B5EF4-FFF2-40B4-BE49-F238E27FC236}">
+                <a16:creationId xmlns:a16="http://schemas.microsoft.com/office/drawing/2014/main" id="{41B5DF95-FADC-78BE-94C1-6935D7ADDD75}"/>
+              </a:ext>
+            </a:extLst>
+          </p:cNvPr>
+          <p:cNvPicPr>
+            <a:picLocks noChangeAspect="1"/>
+          </p:cNvPicPr>
+          <p:nvPr/>
+        </p:nvPicPr>
+        <p:blipFill>
+          <a:blip r:embed="rId45"/>
+          <a:stretch>
+            <a:fillRect/>
+          </a:stretch>
+        </p:blipFill>
+        <p:spPr>
+          <a:xfrm>
+            <a:off x="7120183" y="4986262"/>
+            <a:ext cx="1510841" cy="925875"/>
+          </a:xfrm>
+          <a:prstGeom prst="rect">
+            <a:avLst/>
+          </a:prstGeom>
+        </p:spPr>
+      </p:pic>
+      <p:pic>
+        <p:nvPicPr>
+          <p:cNvPr id="1027" name="Picture 1026">
+            <a:extLst>
+              <a:ext uri="{FF2B5EF4-FFF2-40B4-BE49-F238E27FC236}">
+                <a16:creationId xmlns:a16="http://schemas.microsoft.com/office/drawing/2014/main" id="{BA4260AA-FABD-1ACE-73CD-B6638AB057D4}"/>
+              </a:ext>
+            </a:extLst>
+          </p:cNvPr>
+          <p:cNvPicPr>
+            <a:picLocks noChangeAspect="1"/>
+          </p:cNvPicPr>
+          <p:nvPr/>
+        </p:nvPicPr>
+        <p:blipFill>
+          <a:blip r:embed="rId46"/>
+          <a:stretch>
+            <a:fillRect/>
+          </a:stretch>
+        </p:blipFill>
+        <p:spPr>
+          <a:xfrm>
+            <a:off x="8661600" y="4978008"/>
+            <a:ext cx="1597177" cy="955055"/>
+          </a:xfrm>
+          <a:prstGeom prst="rect">
+            <a:avLst/>
+          </a:prstGeom>
+        </p:spPr>
+      </p:pic>
+      <p:pic>
+        <p:nvPicPr>
+          <p:cNvPr id="1028" name="Picture 1027">
+            <a:extLst>
+              <a:ext uri="{FF2B5EF4-FFF2-40B4-BE49-F238E27FC236}">
+                <a16:creationId xmlns:a16="http://schemas.microsoft.com/office/drawing/2014/main" id="{26084D25-622C-1D4D-DE95-5DF097506041}"/>
+              </a:ext>
+            </a:extLst>
+          </p:cNvPr>
+          <p:cNvPicPr>
+            <a:picLocks noChangeAspect="1"/>
+          </p:cNvPicPr>
+          <p:nvPr/>
+        </p:nvPicPr>
+        <p:blipFill>
+          <a:blip r:embed="rId47"/>
+          <a:stretch>
+            <a:fillRect/>
+          </a:stretch>
+        </p:blipFill>
+        <p:spPr>
+          <a:xfrm>
+            <a:off x="7231990" y="6043967"/>
+            <a:ext cx="2908736" cy="2354905"/>
+          </a:xfrm>
+          <a:prstGeom prst="rect">
+            <a:avLst/>
+          </a:prstGeom>
+        </p:spPr>
+      </p:pic>
+      <p:pic>
+        <p:nvPicPr>
+          <p:cNvPr id="1029" name="Picture 1028">
+            <a:extLst>
+              <a:ext uri="{FF2B5EF4-FFF2-40B4-BE49-F238E27FC236}">
+                <a16:creationId xmlns:a16="http://schemas.microsoft.com/office/drawing/2014/main" id="{E770E4F9-63FF-B792-E256-32B754D9A2B4}"/>
+              </a:ext>
+            </a:extLst>
+          </p:cNvPr>
+          <p:cNvPicPr>
+            <a:picLocks noChangeAspect="1"/>
+          </p:cNvPicPr>
+          <p:nvPr/>
+        </p:nvPicPr>
+        <p:blipFill>
+          <a:blip r:embed="rId48"/>
+          <a:stretch>
+            <a:fillRect/>
+          </a:stretch>
+        </p:blipFill>
+        <p:spPr>
+          <a:xfrm>
+            <a:off x="11643451" y="6925106"/>
+            <a:ext cx="2024479" cy="1281551"/>
+          </a:xfrm>
+          <a:prstGeom prst="rect">
+            <a:avLst/>
+          </a:prstGeom>
+        </p:spPr>
+      </p:pic>
+      <p:pic>
+        <p:nvPicPr>
+          <p:cNvPr id="1030" name="Picture 1029">
+            <a:extLst>
+              <a:ext uri="{FF2B5EF4-FFF2-40B4-BE49-F238E27FC236}">
+                <a16:creationId xmlns:a16="http://schemas.microsoft.com/office/drawing/2014/main" id="{150CAB63-06C6-0B31-DCAD-3DBDD7470F1B}"/>
+              </a:ext>
+            </a:extLst>
+          </p:cNvPr>
+          <p:cNvPicPr>
+            <a:picLocks noChangeAspect="1"/>
+          </p:cNvPicPr>
+          <p:nvPr/>
+        </p:nvPicPr>
+        <p:blipFill>
+          <a:blip r:embed="rId49"/>
+          <a:stretch>
+            <a:fillRect/>
+          </a:stretch>
+        </p:blipFill>
+        <p:spPr>
+          <a:xfrm>
+            <a:off x="11902595" y="4934592"/>
+            <a:ext cx="1635553" cy="1356998"/>
+          </a:xfrm>
+          <a:prstGeom prst="rect">
+            <a:avLst/>
+          </a:prstGeom>
+        </p:spPr>
+      </p:pic>
+      <p:pic>
+        <p:nvPicPr>
+          <p:cNvPr id="1032" name="Picture 1031">
+            <a:extLst>
+              <a:ext uri="{FF2B5EF4-FFF2-40B4-BE49-F238E27FC236}">
+                <a16:creationId xmlns:a16="http://schemas.microsoft.com/office/drawing/2014/main" id="{6F2EE4B4-CBEB-A797-B10E-140D3844D504}"/>
+              </a:ext>
+            </a:extLst>
+          </p:cNvPr>
+          <p:cNvPicPr>
+            <a:picLocks noChangeAspect="1"/>
+          </p:cNvPicPr>
+          <p:nvPr/>
+        </p:nvPicPr>
+        <p:blipFill>
+          <a:blip r:embed="rId50">
+            <a:extLst>
+              <a:ext uri="{28A0092B-C50C-407E-A947-70E740481C1C}">
+                <a14:useLocalDpi xmlns:a14="http://schemas.microsoft.com/office/drawing/2010/main" val="0"/>
+              </a:ext>
+            </a:extLst>
+          </a:blip>
+          <a:stretch>
+            <a:fillRect/>
+          </a:stretch>
+        </p:blipFill>
+        <p:spPr>
+          <a:xfrm>
+            <a:off x="10544746" y="9063067"/>
+            <a:ext cx="1243948" cy="799681"/>
           </a:xfrm>
           <a:prstGeom prst="rect">
             <a:avLst/>
